--- a/slides/agent-10-minute-exercise.pptx
+++ b/slides/agent-10-minute-exercise.pptx
@@ -524,7 +524,7 @@
           <a:lstStyle/>
           <a:p>
             <a:r>
-              <a:t>Ten minutes, strict. Say the workshop code once, do not type it in chat. If a group finishes early, ask them to untick the triage sub-agent in the building blocks and send the first prompt again: the orchestrator then does the labelling itself and the trace flattens.</a:t>
+              <a:t>Ten minutes, strict. Say the workshop code once, do not type it in chat. Everything happens in the app; nobody needs another tool. Close by asking each group for its one sentence on where the agent decided and where a person did. If a group finishes early, ask them to untick the triage sub-agent in the building blocks and send the first prompt again: the orchestrator then does the labelling itself and the trace flattens.</a:t>
             </a:r>
           </a:p>
         </p:txBody>
@@ -7793,7 +7793,7 @@
                 </a:solidFill>
                 <a:latin typeface="Arial"/>
               </a:rPr>
-              <a:t>Agree one sentence</a:t>
+              <a:t>Prepare one point to present</a:t>
             </a:r>
           </a:p>
         </p:txBody>
@@ -7832,7 +7832,7 @@
                 </a:solidFill>
                 <a:latin typeface="Arial"/>
               </a:rPr>
-              <a:t>What did the agent do that a chatbot could not, and where did a person stay in the loop?</a:t>
+              <a:t>Where did the agent decide on its own, and where did a person still have to decide? One sentence per group, read out at the end.</a:t>
             </a:r>
           </a:p>
         </p:txBody>
@@ -8003,6 +8003,22 @@
                 <a:latin typeface="Arial"/>
               </a:rPr>
               <a:t>The draft to an outside address waits for a person</a:t>
+            </a:r>
+          </a:p>
+          <a:p>
+            <a:pPr algn="l">
+              <a:spcAft>
+                <a:spcPts val="500"/>
+              </a:spcAft>
+            </a:pPr>
+            <a:r>
+              <a:rPr sz="1200" b="0" i="0">
+                <a:solidFill>
+                  <a:srgbClr val="000000"/>
+                </a:solidFill>
+                <a:latin typeface="Arial"/>
+              </a:rPr>
+              <a:t>Everything happens in the app: no other tool is needed</a:t>
             </a:r>
           </a:p>
         </p:txBody>
@@ -12245,7 +12261,7 @@
                 </a:solidFill>
                 <a:latin typeface="Arial"/>
               </a:rPr>
-              <a:t>tool</a:t>
+              <a:t>deterministic</a:t>
             </a:r>
           </a:p>
         </p:txBody>
@@ -15725,7 +15741,7 @@
                 </a:solidFill>
                 <a:latin typeface="Arial"/>
               </a:rPr>
-              <a:t>tool</a:t>
+              <a:t>deterministic</a:t>
             </a:r>
           </a:p>
         </p:txBody>

--- a/slides/agent-10-minute-exercise.pptx
+++ b/slides/agent-10-minute-exercise.pptx
@@ -12,6 +12,8 @@
     <p:sldId id="257" r:id="rId5"/>
     <p:sldId id="258" r:id="rId4"/>
     <p:sldId id="259" r:id="rId3"/>
+    <p:sldId id="260" r:id="rId2"/>
+    <p:sldId id="261" r:id="rId12"/>
   </p:sldIdLst>
   <p:sldSz cx="12192000" cy="6858000"/>
   <p:notesSz cx="6858000" cy="9144000"/>
@@ -594,7 +596,7 @@
           <a:lstStyle/>
           <a:p>
             <a:r>
-              <a:t>Start with the left half only. The orchestrator is the single thinking node at this point; the rules engine is code; the memory boxes explain why nothing is remembered unless it is re-sent or written down.</a:t>
+              <a:t>Step A shows that the refusal of the trap came from the brief. Step B shows that the forward is still refused, by code: Confidential emails never leave the organisation. Step C shows the brief doing its real job, steering judgement. Land the question: policy that must hold goes in code, not in prose.</a:t>
             </a:r>
           </a:p>
         </p:txBody>
@@ -664,7 +666,7 @@
           <a:lstStyle/>
           <a:p>
             <a:r>
-              <a:t>Add the sub-agents and their tools. Point at the trace in the app: the ▶ and ◀ lines are the instruction going down and the report coming up. The tools are the only way anything reaches the inbox.</a:t>
+              <a:t>Step A is the human line: the limit is code, the decision is yours, and the agent has to live with it. Step B is pure code: Health &amp; Safety can never be archived, however the agent was persuaded. Step C strips the first two lines so that the person is visibly the last one. Close on the question; the usual answer is code for what must never happen, a person for what is expensive to get wrong, the brief for everything else.</a:t>
             </a:r>
           </a:p>
         </p:txBody>
@@ -690,6 +692,146 @@
 </file>
 
 <file path=ppt/notesSlides/notesSlide4.xml><?xml version="1.0" encoding="utf-8"?>
+<p:notes xmlns:a="http://schemas.openxmlformats.org/drawingml/2006/main" xmlns:p="http://schemas.openxmlformats.org/presentationml/2006/main" xmlns:r="http://schemas.openxmlformats.org/officeDocument/2006/relationships">
+  <p:cSld>
+    <p:spTree>
+      <p:nvGrpSpPr>
+        <p:cNvPr id="1" name=""/>
+        <p:cNvGrpSpPr/>
+        <p:nvPr/>
+      </p:nvGrpSpPr>
+      <p:grpSpPr>
+        <a:xfrm>
+          <a:off x="0" y="0"/>
+          <a:ext cx="0" cy="0"/>
+          <a:chOff x="0" y="0"/>
+          <a:chExt cx="0" cy="0"/>
+        </a:xfrm>
+      </p:grpSpPr>
+      <p:sp>
+        <p:nvSpPr>
+          <p:cNvPr id="2" name="Slide Image Placeholder 1"/>
+          <p:cNvSpPr>
+            <a:spLocks noGrp="1"/>
+          </p:cNvSpPr>
+          <p:nvPr>
+            <p:ph type="sldImg" idx="2"/>
+          </p:nvPr>
+        </p:nvSpPr>
+        <p:spPr/>
+      </p:sp>
+      <p:sp>
+        <p:nvSpPr>
+          <p:cNvPr id="3" name="Notes Placeholder 2"/>
+          <p:cNvSpPr>
+            <a:spLocks noGrp="1"/>
+          </p:cNvSpPr>
+          <p:nvPr>
+            <p:ph type="body" idx="3" sz="quarter"/>
+          </p:nvPr>
+        </p:nvSpPr>
+        <p:spPr/>
+        <p:txBody>
+          <a:bodyPr/>
+          <a:lstStyle/>
+          <a:p>
+            <a:r>
+              <a:t>Start with the left half only. The orchestrator is the single thinking node at this point; the rules engine is code; the memory boxes explain why nothing is remembered unless it is re-sent or written down.</a:t>
+            </a:r>
+          </a:p>
+        </p:txBody>
+      </p:sp>
+      <p:sp>
+        <p:nvSpPr>
+          <p:cNvPr id="4" name="Slide Number Placeholder 3"/>
+          <p:cNvSpPr>
+            <a:spLocks noGrp="1"/>
+          </p:cNvSpPr>
+          <p:nvPr>
+            <p:ph type="sldNum" idx="5" sz="quarter"/>
+          </p:nvPr>
+        </p:nvSpPr>
+        <p:spPr/>
+      </p:sp>
+    </p:spTree>
+  </p:cSld>
+  <p:clrMapOvr>
+    <a:masterClrMapping/>
+  </p:clrMapOvr>
+</p:notes>
+</file>
+
+<file path=ppt/notesSlides/notesSlide5.xml><?xml version="1.0" encoding="utf-8"?>
+<p:notes xmlns:a="http://schemas.openxmlformats.org/drawingml/2006/main" xmlns:p="http://schemas.openxmlformats.org/presentationml/2006/main" xmlns:r="http://schemas.openxmlformats.org/officeDocument/2006/relationships">
+  <p:cSld>
+    <p:spTree>
+      <p:nvGrpSpPr>
+        <p:cNvPr id="1" name=""/>
+        <p:cNvGrpSpPr/>
+        <p:nvPr/>
+      </p:nvGrpSpPr>
+      <p:grpSpPr>
+        <a:xfrm>
+          <a:off x="0" y="0"/>
+          <a:ext cx="0" cy="0"/>
+          <a:chOff x="0" y="0"/>
+          <a:chExt cx="0" cy="0"/>
+        </a:xfrm>
+      </p:grpSpPr>
+      <p:sp>
+        <p:nvSpPr>
+          <p:cNvPr id="2" name="Slide Image Placeholder 1"/>
+          <p:cNvSpPr>
+            <a:spLocks noGrp="1"/>
+          </p:cNvSpPr>
+          <p:nvPr>
+            <p:ph type="sldImg" idx="2"/>
+          </p:nvPr>
+        </p:nvSpPr>
+        <p:spPr/>
+      </p:sp>
+      <p:sp>
+        <p:nvSpPr>
+          <p:cNvPr id="3" name="Notes Placeholder 2"/>
+          <p:cNvSpPr>
+            <a:spLocks noGrp="1"/>
+          </p:cNvSpPr>
+          <p:nvPr>
+            <p:ph type="body" idx="3" sz="quarter"/>
+          </p:nvPr>
+        </p:nvSpPr>
+        <p:spPr/>
+        <p:txBody>
+          <a:bodyPr/>
+          <a:lstStyle/>
+          <a:p>
+            <a:r>
+              <a:t>Add the sub-agents and their tools. Point at the trace in the app: the ▶ and ◀ lines are the instruction going down and the report coming up. The tools are the only way anything reaches the inbox.</a:t>
+            </a:r>
+          </a:p>
+        </p:txBody>
+      </p:sp>
+      <p:sp>
+        <p:nvSpPr>
+          <p:cNvPr id="4" name="Slide Number Placeholder 3"/>
+          <p:cNvSpPr>
+            <a:spLocks noGrp="1"/>
+          </p:cNvSpPr>
+          <p:nvPr>
+            <p:ph type="sldNum" idx="5" sz="quarter"/>
+          </p:nvPr>
+        </p:nvSpPr>
+        <p:spPr/>
+      </p:sp>
+    </p:spTree>
+  </p:cSld>
+  <p:clrMapOvr>
+    <a:masterClrMapping/>
+  </p:clrMapOvr>
+</p:notes>
+</file>
+
+<file path=ppt/notesSlides/notesSlide6.xml><?xml version="1.0" encoding="utf-8"?>
 <p:notes xmlns:a="http://schemas.openxmlformats.org/drawingml/2006/main" xmlns:p="http://schemas.openxmlformats.org/presentationml/2006/main" xmlns:r="http://schemas.openxmlformats.org/officeDocument/2006/relationships">
   <p:cSld>
     <p:spTree>
@@ -8057,7 +8199,7 @@
                 </a:solidFill>
                 <a:latin typeface="Arial"/>
               </a:rPr>
-              <a:t>Model is fixed to quick · leave the brief as it is for this run · reset the inbox if you want to start over</a:t>
+              <a:t>Model is fixed to quick · leave the brief as it is for this run · finished early? take the challenges on the next two slides</a:t>
             </a:r>
           </a:p>
         </p:txBody>
@@ -8153,7 +8295,7 @@
                 </a:solidFill>
                 <a:latin typeface="Arial"/>
               </a:rPr>
-              <a:t>HOW THE AGENT WORKS · 1 OF 3</a:t>
+              <a:t>CHALLENGE 1 · THE BRIEF</a:t>
             </a:r>
           </a:p>
         </p:txBody>
@@ -8230,14 +8372,53 @@
       </p:cxnSp>
       <p:sp>
         <p:nvSpPr>
-          <p:cNvPr id="6" name="Rounded Rectangle 5"/>
+          <p:cNvPr id="6" name="TextBox 5"/>
+          <p:cNvSpPr txBox="1"/>
+          <p:nvPr/>
+        </p:nvSpPr>
+        <p:spPr>
+          <a:xfrm>
+            <a:off x="822960" y="1371600"/>
+            <a:ext cx="7498079" cy="457200"/>
+          </a:xfrm>
+          <a:prstGeom prst="rect">
+            <a:avLst/>
+          </a:prstGeom>
+          <a:noFill/>
+        </p:spPr>
+        <p:txBody>
+          <a:bodyPr wrap="square" anchor="t">
+            <a:spAutoFit/>
+          </a:bodyPr>
+          <a:lstStyle/>
+          <a:p>
+            <a:pPr algn="l">
+              <a:spcAft>
+                <a:spcPts val="400"/>
+              </a:spcAft>
+            </a:pPr>
+            <a:r>
+              <a:rPr sz="1250" b="0" i="0">
+                <a:solidFill>
+                  <a:srgbClr val="6B7280"/>
+                </a:solidFill>
+                <a:latin typeface="Arial"/>
+              </a:rPr>
+              <a:t>The brief is the agent's standing instructions, in plain language. Change it and watch what changes, and what does not.</a:t>
+            </a:r>
+          </a:p>
+        </p:txBody>
+      </p:sp>
+      <p:sp>
+        <p:nvSpPr>
+          <p:cNvPr id="7" name="Rounded Rectangle 6"/>
           <p:cNvSpPr/>
           <p:nvPr/>
         </p:nvSpPr>
         <p:spPr>
           <a:xfrm>
-            <a:off x="10424160" y="502920"/>
-            <a:ext cx="1188720" cy="365760"/>
+            <a:off x="822960" y="2039112"/>
+            <a:ext cx="457200" cy="347472"/>
           </a:xfrm>
           <a:prstGeom prst="roundRect">
             <a:avLst/>
@@ -8270,41 +8451,114 @@
           <a:p>
             <a:pPr algn="ctr"/>
             <a:r>
-              <a:rPr sz="1200" b="1" i="0">
+              <a:rPr sz="1300" b="1" i="0">
                 <a:solidFill>
                   <a:srgbClr val="FFFFFF"/>
                 </a:solidFill>
                 <a:latin typeface="Arial"/>
               </a:rPr>
-              <a:t>1 / 3</a:t>
-            </a:r>
-          </a:p>
-        </p:txBody>
-      </p:sp>
-      <p:sp>
-        <p:nvSpPr>
-          <p:cNvPr id="7" name="Rounded Rectangle 6"/>
+              <a:t>A</a:t>
+            </a:r>
+          </a:p>
+        </p:txBody>
+      </p:sp>
+      <p:sp>
+        <p:nvSpPr>
+          <p:cNvPr id="8" name="TextBox 7"/>
+          <p:cNvSpPr txBox="1"/>
+          <p:nvPr/>
+        </p:nvSpPr>
+        <p:spPr>
+          <a:xfrm>
+            <a:off x="1463040" y="1993392"/>
+            <a:ext cx="6675120" cy="365760"/>
+          </a:xfrm>
+          <a:prstGeom prst="rect">
+            <a:avLst/>
+          </a:prstGeom>
+          <a:noFill/>
+        </p:spPr>
+        <p:txBody>
+          <a:bodyPr wrap="square" anchor="t">
+            <a:spAutoFit/>
+          </a:bodyPr>
+          <a:lstStyle/>
+          <a:p>
+            <a:pPr algn="l">
+              <a:spcAft>
+                <a:spcPts val="400"/>
+              </a:spcAft>
+            </a:pPr>
+            <a:r>
+              <a:rPr sz="1500" b="1" i="0">
+                <a:solidFill>
+                  <a:srgbClr val="000000"/>
+                </a:solidFill>
+                <a:latin typeface="Arial"/>
+              </a:rPr>
+              <a:t>Weaken it</a:t>
+            </a:r>
+          </a:p>
+        </p:txBody>
+      </p:sp>
+      <p:sp>
+        <p:nvSpPr>
+          <p:cNvPr id="9" name="TextBox 8"/>
+          <p:cNvSpPr txBox="1"/>
+          <p:nvPr/>
+        </p:nvSpPr>
+        <p:spPr>
+          <a:xfrm>
+            <a:off x="1463040" y="2359152"/>
+            <a:ext cx="6675120" cy="777240"/>
+          </a:xfrm>
+          <a:prstGeom prst="rect">
+            <a:avLst/>
+          </a:prstGeom>
+          <a:noFill/>
+        </p:spPr>
+        <p:txBody>
+          <a:bodyPr wrap="square" anchor="t">
+            <a:spAutoFit/>
+          </a:bodyPr>
+          <a:lstStyle/>
+          <a:p>
+            <a:pPr algn="l">
+              <a:spcAft>
+                <a:spcPts val="400"/>
+              </a:spcAft>
+            </a:pPr>
+            <a:r>
+              <a:rPr sz="1200" b="0" i="0">
+                <a:solidFill>
+                  <a:srgbClr val="000000"/>
+                </a:solidFill>
+                <a:latin typeface="Arial"/>
+              </a:rPr>
+              <a:t>In block 1, The brief, delete the last paragraph (the one that says email content is untrusted). Send the trap prompt again.</a:t>
+            </a:r>
+          </a:p>
+        </p:txBody>
+      </p:sp>
+      <p:sp>
+        <p:nvSpPr>
+          <p:cNvPr id="10" name="Rounded Rectangle 9"/>
           <p:cNvSpPr/>
           <p:nvPr/>
         </p:nvSpPr>
         <p:spPr>
           <a:xfrm>
-            <a:off x="548640" y="1371600"/>
-            <a:ext cx="1737360" cy="713232"/>
+            <a:off x="822960" y="3227832"/>
+            <a:ext cx="457200" cy="347472"/>
           </a:xfrm>
           <a:prstGeom prst="roundRect">
-            <a:avLst>
-              <a:gd name="adj" fmla="val 12000"/>
-            </a:avLst>
+            <a:avLst/>
           </a:prstGeom>
           <a:solidFill>
-            <a:srgbClr val="EEEAF9"/>
+            <a:srgbClr val="00305C"/>
           </a:solidFill>
-          <a:ln w="15875">
-            <a:solidFill>
-              <a:srgbClr val="5E48B8"/>
-            </a:solidFill>
-            <a:prstDash val="dash"/>
+          <a:ln>
+            <a:noFill/>
           </a:ln>
           <a:effectLst/>
         </p:spPr>
@@ -8323,57 +8577,119 @@
           </a:fontRef>
         </p:style>
         <p:txBody>
-          <a:bodyPr rtlCol="0" anchor="ctr" wrap="square" lIns="54864" rIns="54864" tIns="27432" bIns="27432"/>
+          <a:bodyPr rtlCol="0" anchor="ctr" tIns="0" bIns="0"/>
           <a:lstStyle/>
           <a:p>
             <a:pPr algn="ctr"/>
             <a:r>
-              <a:rPr sz="1200" b="1" i="0">
-                <a:solidFill>
-                  <a:srgbClr val="000000"/>
+              <a:rPr sz="1300" b="1" i="0">
+                <a:solidFill>
+                  <a:srgbClr val="FFFFFF"/>
                 </a:solidFill>
                 <a:latin typeface="Arial"/>
               </a:rPr>
-              <a:t>Brief &amp; skills</a:t>
-            </a:r>
-          </a:p>
-          <a:p>
-            <a:pPr algn="ctr"/>
-            <a:r>
-              <a:rPr sz="900" b="0" i="0">
-                <a:solidFill>
-                  <a:srgbClr val="6B7280"/>
+              <a:t>B</a:t>
+            </a:r>
+          </a:p>
+        </p:txBody>
+      </p:sp>
+      <p:sp>
+        <p:nvSpPr>
+          <p:cNvPr id="11" name="TextBox 10"/>
+          <p:cNvSpPr txBox="1"/>
+          <p:nvPr/>
+        </p:nvSpPr>
+        <p:spPr>
+          <a:xfrm>
+            <a:off x="1463040" y="3182112"/>
+            <a:ext cx="6675120" cy="365760"/>
+          </a:xfrm>
+          <a:prstGeom prst="rect">
+            <a:avLst/>
+          </a:prstGeom>
+          <a:noFill/>
+        </p:spPr>
+        <p:txBody>
+          <a:bodyPr wrap="square" anchor="t">
+            <a:spAutoFit/>
+          </a:bodyPr>
+          <a:lstStyle/>
+          <a:p>
+            <a:pPr algn="l">
+              <a:spcAft>
+                <a:spcPts val="400"/>
+              </a:spcAft>
+            </a:pPr>
+            <a:r>
+              <a:rPr sz="1500" b="1" i="0">
+                <a:solidFill>
+                  <a:srgbClr val="000000"/>
                 </a:solidFill>
                 <a:latin typeface="Arial"/>
               </a:rPr>
-              <a:t>how to triage, when to escalate, what never to do</a:t>
-            </a:r>
-          </a:p>
-        </p:txBody>
-      </p:sp>
-      <p:sp>
-        <p:nvSpPr>
-          <p:cNvPr id="8" name="Rounded Rectangle 7"/>
+              <a:t>Watch the code catch it</a:t>
+            </a:r>
+          </a:p>
+        </p:txBody>
+      </p:sp>
+      <p:sp>
+        <p:nvSpPr>
+          <p:cNvPr id="12" name="TextBox 11"/>
+          <p:cNvSpPr txBox="1"/>
+          <p:nvPr/>
+        </p:nvSpPr>
+        <p:spPr>
+          <a:xfrm>
+            <a:off x="1463040" y="3547872"/>
+            <a:ext cx="6675120" cy="777240"/>
+          </a:xfrm>
+          <a:prstGeom prst="rect">
+            <a:avLst/>
+          </a:prstGeom>
+          <a:noFill/>
+        </p:spPr>
+        <p:txBody>
+          <a:bodyPr wrap="square" anchor="t">
+            <a:spAutoFit/>
+          </a:bodyPr>
+          <a:lstStyle/>
+          <a:p>
+            <a:pPr algn="l">
+              <a:spcAft>
+                <a:spcPts val="400"/>
+              </a:spcAft>
+            </a:pPr>
+            <a:r>
+              <a:rPr sz="1200" b="0" i="0">
+                <a:solidFill>
+                  <a:srgbClr val="000000"/>
+                </a:solidFill>
+                <a:latin typeface="Arial"/>
+              </a:rPr>
+              <a:t>Read the trace. Without the paragraph the reply agent may attempt the forward. The guardrail blocks it in red, and the error travels back up to the orchestrator. Then click Restore default.</a:t>
+            </a:r>
+          </a:p>
+        </p:txBody>
+      </p:sp>
+      <p:sp>
+        <p:nvSpPr>
+          <p:cNvPr id="13" name="Rounded Rectangle 12"/>
           <p:cNvSpPr/>
           <p:nvPr/>
         </p:nvSpPr>
         <p:spPr>
           <a:xfrm>
-            <a:off x="548640" y="3017520"/>
-            <a:ext cx="1554480" cy="777240"/>
+            <a:off x="822960" y="4416552"/>
+            <a:ext cx="457200" cy="347472"/>
           </a:xfrm>
           <a:prstGeom prst="roundRect">
-            <a:avLst>
-              <a:gd name="adj" fmla="val 12000"/>
-            </a:avLst>
+            <a:avLst/>
           </a:prstGeom>
           <a:solidFill>
-            <a:srgbClr val="FBF1E0"/>
+            <a:srgbClr val="00305C"/>
           </a:solidFill>
-          <a:ln w="15875">
-            <a:solidFill>
-              <a:srgbClr val="B4761C"/>
-            </a:solidFill>
+          <a:ln>
+            <a:noFill/>
           </a:ln>
           <a:effectLst/>
         </p:spPr>
@@ -8392,58 +8708,119 @@
           </a:fontRef>
         </p:style>
         <p:txBody>
-          <a:bodyPr rtlCol="0" anchor="ctr" wrap="square" lIns="54864" rIns="54864" tIns="27432" bIns="27432"/>
+          <a:bodyPr rtlCol="0" anchor="ctr" tIns="0" bIns="0"/>
           <a:lstStyle/>
           <a:p>
             <a:pPr algn="ctr"/>
             <a:r>
-              <a:rPr sz="1200" b="1" i="0">
-                <a:solidFill>
-                  <a:srgbClr val="000000"/>
+              <a:rPr sz="1300" b="1" i="0">
+                <a:solidFill>
+                  <a:srgbClr val="FFFFFF"/>
                 </a:solidFill>
                 <a:latin typeface="Arial"/>
               </a:rPr>
-              <a:t>Human user</a:t>
-            </a:r>
-          </a:p>
-          <a:p>
-            <a:pPr algn="ctr"/>
-            <a:r>
-              <a:rPr sz="900" b="0" i="0">
-                <a:solidFill>
-                  <a:srgbClr val="6B7280"/>
+              <a:t>C</a:t>
+            </a:r>
+          </a:p>
+        </p:txBody>
+      </p:sp>
+      <p:sp>
+        <p:nvSpPr>
+          <p:cNvPr id="14" name="TextBox 13"/>
+          <p:cNvSpPr txBox="1"/>
+          <p:nvPr/>
+        </p:nvSpPr>
+        <p:spPr>
+          <a:xfrm>
+            <a:off x="1463040" y="4370832"/>
+            <a:ext cx="6675120" cy="365760"/>
+          </a:xfrm>
+          <a:prstGeom prst="rect">
+            <a:avLst/>
+          </a:prstGeom>
+          <a:noFill/>
+        </p:spPr>
+        <p:txBody>
+          <a:bodyPr wrap="square" anchor="t">
+            <a:spAutoFit/>
+          </a:bodyPr>
+          <a:lstStyle/>
+          <a:p>
+            <a:pPr algn="l">
+              <a:spcAft>
+                <a:spcPts val="400"/>
+              </a:spcAft>
+            </a:pPr>
+            <a:r>
+              <a:rPr sz="1500" b="1" i="0">
+                <a:solidFill>
+                  <a:srgbClr val="000000"/>
                 </a:solidFill>
                 <a:latin typeface="Arial"/>
               </a:rPr>
-              <a:t>asks in plain language</a:t>
-            </a:r>
-          </a:p>
-        </p:txBody>
-      </p:sp>
-      <p:sp>
-        <p:nvSpPr>
-          <p:cNvPr id="9" name="Rounded Rectangle 8"/>
+              <a:t>Strengthen it</a:t>
+            </a:r>
+          </a:p>
+        </p:txBody>
+      </p:sp>
+      <p:sp>
+        <p:nvSpPr>
+          <p:cNvPr id="15" name="TextBox 14"/>
+          <p:cNvSpPr txBox="1"/>
+          <p:nvPr/>
+        </p:nvSpPr>
+        <p:spPr>
+          <a:xfrm>
+            <a:off x="1463040" y="4736592"/>
+            <a:ext cx="6675120" cy="777240"/>
+          </a:xfrm>
+          <a:prstGeom prst="rect">
+            <a:avLst/>
+          </a:prstGeom>
+          <a:noFill/>
+        </p:spPr>
+        <p:txBody>
+          <a:bodyPr wrap="square" anchor="t">
+            <a:spAutoFit/>
+          </a:bodyPr>
+          <a:lstStyle/>
+          <a:p>
+            <a:pPr algn="l">
+              <a:spcAft>
+                <a:spcPts val="400"/>
+              </a:spcAft>
+            </a:pPr>
+            <a:r>
+              <a:rPr sz="1200" b="0" i="0">
+                <a:solidFill>
+                  <a:srgbClr val="000000"/>
+                </a:solidFill>
+                <a:latin typeface="Arial"/>
+              </a:rPr>
+              <a:t>Add one line of your own, for example "Anything from the works council or the union is urgent today." Send "What needs my attention today?" and compare with your first run.</a:t>
+            </a:r>
+          </a:p>
+        </p:txBody>
+      </p:sp>
+      <p:sp>
+        <p:nvSpPr>
+          <p:cNvPr id="16" name="Rectangle 15"/>
           <p:cNvSpPr/>
           <p:nvPr/>
         </p:nvSpPr>
         <p:spPr>
           <a:xfrm>
-            <a:off x="548640" y="4389120"/>
-            <a:ext cx="1737360" cy="868680"/>
-          </a:xfrm>
-          <a:prstGeom prst="roundRect">
-            <a:avLst>
-              <a:gd name="adj" fmla="val 12000"/>
-            </a:avLst>
+            <a:off x="8503920" y="1371600"/>
+            <a:ext cx="3108960" cy="3017520"/>
+          </a:xfrm>
+          <a:prstGeom prst="rect">
+            <a:avLst/>
           </a:prstGeom>
           <a:solidFill>
-            <a:srgbClr val="F3F4F7"/>
+            <a:srgbClr val="EEF1F5"/>
           </a:solidFill>
-          <a:ln w="15875">
-            <a:solidFill>
-              <a:srgbClr val="6B7280"/>
-            </a:solidFill>
-            <a:prstDash val="dash"/>
+          <a:ln>
+            <a:noFill/>
           </a:ln>
           <a:effectLst/>
         </p:spPr>
@@ -8462,405 +8839,23 @@
           </a:fontRef>
         </p:style>
         <p:txBody>
-          <a:bodyPr rtlCol="0" anchor="ctr" wrap="square" lIns="54864" rIns="54864" tIns="27432" bIns="27432"/>
+          <a:bodyPr rtlCol="0" anchor="ctr"/>
           <a:lstStyle/>
           <a:p>
             <a:pPr algn="ctr"/>
-            <a:r>
-              <a:rPr sz="1200" b="1" i="0">
-                <a:solidFill>
-                  <a:srgbClr val="000000"/>
-                </a:solidFill>
-                <a:latin typeface="Arial"/>
-              </a:rPr>
-              <a:t>Working memory</a:t>
-            </a:r>
-          </a:p>
-          <a:p>
-            <a:pPr algn="ctr"/>
-            <a:r>
-              <a:rPr sz="900" b="0" i="0">
-                <a:solidFill>
-                  <a:srgbClr val="6B7280"/>
-                </a:solidFill>
-                <a:latin typeface="Arial"/>
-              </a:rPr>
-              <a:t>the brief, the last turns, every tool result · rebuilt each call</a:t>
-            </a:r>
-          </a:p>
-        </p:txBody>
-      </p:sp>
-      <p:sp>
-        <p:nvSpPr>
-          <p:cNvPr id="10" name="Rounded Rectangle 9"/>
-          <p:cNvSpPr/>
-          <p:nvPr/>
-        </p:nvSpPr>
-        <p:spPr>
-          <a:xfrm>
-            <a:off x="2743200" y="1371600"/>
-            <a:ext cx="2011680" cy="640080"/>
-          </a:xfrm>
-          <a:prstGeom prst="roundRect">
-            <a:avLst>
-              <a:gd name="adj" fmla="val 12000"/>
-            </a:avLst>
-          </a:prstGeom>
-          <a:solidFill>
-            <a:srgbClr val="E6F0F7"/>
-          </a:solidFill>
-          <a:ln w="15875">
-            <a:solidFill>
-              <a:srgbClr val="2C6C9C"/>
-            </a:solidFill>
-          </a:ln>
-          <a:effectLst/>
-        </p:spPr>
-        <p:style>
-          <a:lnRef idx="1">
-            <a:schemeClr val="accent1"/>
-          </a:lnRef>
-          <a:fillRef idx="3">
-            <a:schemeClr val="accent1"/>
-          </a:fillRef>
-          <a:effectRef idx="2">
-            <a:schemeClr val="accent1"/>
-          </a:effectRef>
-          <a:fontRef idx="minor">
-            <a:schemeClr val="lt1"/>
-          </a:fontRef>
-        </p:style>
-        <p:txBody>
-          <a:bodyPr rtlCol="0" anchor="ctr" wrap="square" lIns="54864" rIns="54864" tIns="27432" bIns="27432"/>
-          <a:lstStyle/>
-          <a:p>
-            <a:pPr algn="ctr"/>
-            <a:r>
-              <a:rPr sz="1200" b="1" i="0">
-                <a:solidFill>
-                  <a:srgbClr val="000000"/>
-                </a:solidFill>
-                <a:latin typeface="Arial"/>
-              </a:rPr>
-              <a:t>Rules engine</a:t>
-            </a:r>
-          </a:p>
-          <a:p>
-            <a:pPr algn="ctr"/>
-            <a:r>
-              <a:rPr sz="900" b="0" i="0">
-                <a:solidFill>
-                  <a:srgbClr val="6B7280"/>
-                </a:solidFill>
-                <a:latin typeface="Arial"/>
-              </a:rPr>
-              <a:t>deterministic · runs before the agents</a:t>
-            </a:r>
-          </a:p>
-        </p:txBody>
-      </p:sp>
-      <p:sp>
-        <p:nvSpPr>
-          <p:cNvPr id="11" name="Rounded Rectangle 10"/>
-          <p:cNvSpPr/>
-          <p:nvPr/>
-        </p:nvSpPr>
-        <p:spPr>
-          <a:xfrm>
-            <a:off x="2743200" y="2743200"/>
-            <a:ext cx="2011680" cy="1234440"/>
-          </a:xfrm>
-          <a:prstGeom prst="roundRect">
-            <a:avLst>
-              <a:gd name="adj" fmla="val 12000"/>
-            </a:avLst>
-          </a:prstGeom>
-          <a:solidFill>
-            <a:srgbClr val="EEEAF9"/>
-          </a:solidFill>
-          <a:ln w="15875">
-            <a:solidFill>
-              <a:srgbClr val="5E48B8"/>
-            </a:solidFill>
-          </a:ln>
-          <a:effectLst/>
-        </p:spPr>
-        <p:style>
-          <a:lnRef idx="1">
-            <a:schemeClr val="accent1"/>
-          </a:lnRef>
-          <a:fillRef idx="3">
-            <a:schemeClr val="accent1"/>
-          </a:fillRef>
-          <a:effectRef idx="2">
-            <a:schemeClr val="accent1"/>
-          </a:effectRef>
-          <a:fontRef idx="minor">
-            <a:schemeClr val="lt1"/>
-          </a:fontRef>
-        </p:style>
-        <p:txBody>
-          <a:bodyPr rtlCol="0" anchor="ctr" wrap="square" lIns="54864" rIns="54864" tIns="27432" bIns="27432"/>
-          <a:lstStyle/>
-          <a:p>
-            <a:pPr algn="ctr"/>
-            <a:r>
-              <a:rPr sz="1200" b="1" i="0">
-                <a:solidFill>
-                  <a:srgbClr val="000000"/>
-                </a:solidFill>
-                <a:latin typeface="Arial"/>
-              </a:rPr>
-              <a:t>Orchestrator agent</a:t>
-            </a:r>
-          </a:p>
-          <a:p>
-            <a:pPr algn="ctr"/>
-            <a:r>
-              <a:rPr sz="900" b="0" i="0">
-                <a:solidFill>
-                  <a:srgbClr val="6B7280"/>
-                </a:solidFill>
-                <a:latin typeface="Arial"/>
-              </a:rPr>
-              <a:t>plans, delegates, reports · own tools: stats, search, read</a:t>
-            </a:r>
-          </a:p>
-        </p:txBody>
-      </p:sp>
-      <p:cxnSp>
-        <p:nvCxnSpPr>
-          <p:cNvPr id="12" name="Connector 11"/>
-          <p:cNvCxnSpPr/>
-          <p:nvPr/>
-        </p:nvCxnSpPr>
-        <p:spPr>
-          <a:xfrm>
-            <a:off x="2304288" y="1783080"/>
-            <a:ext cx="438912" cy="1051560"/>
-          </a:xfrm>
-          <a:prstGeom prst="line">
-            <a:avLst/>
-          </a:prstGeom>
-          <a:ln w="15875">
-            <a:solidFill>
-              <a:srgbClr val="5E48B8"/>
-            </a:solidFill>
-            <a:tailEnd type="triangle"/>
-          </a:ln>
-        </p:spPr>
-        <p:style>
-          <a:lnRef idx="2">
-            <a:schemeClr val="accent1"/>
-          </a:lnRef>
-          <a:fillRef idx="0">
-            <a:schemeClr val="accent1"/>
-          </a:fillRef>
-          <a:effectRef idx="1">
-            <a:schemeClr val="accent1"/>
-          </a:effectRef>
-          <a:fontRef idx="minor">
-            <a:schemeClr val="tx1"/>
-          </a:fontRef>
-        </p:style>
-      </p:cxnSp>
-      <p:cxnSp>
-        <p:nvCxnSpPr>
-          <p:cNvPr id="13" name="Connector 12"/>
-          <p:cNvCxnSpPr/>
-          <p:nvPr/>
-        </p:nvCxnSpPr>
-        <p:spPr>
-          <a:xfrm>
-            <a:off x="2121408" y="3291840"/>
-            <a:ext cx="603504" cy="0"/>
-          </a:xfrm>
-          <a:prstGeom prst="line">
-            <a:avLst/>
-          </a:prstGeom>
-          <a:ln w="15875">
-            <a:solidFill>
-              <a:srgbClr val="5E48B8"/>
-            </a:solidFill>
-            <a:tailEnd type="triangle"/>
-          </a:ln>
-        </p:spPr>
-        <p:style>
-          <a:lnRef idx="2">
-            <a:schemeClr val="accent1"/>
-          </a:lnRef>
-          <a:fillRef idx="0">
-            <a:schemeClr val="accent1"/>
-          </a:fillRef>
-          <a:effectRef idx="1">
-            <a:schemeClr val="accent1"/>
-          </a:effectRef>
-          <a:fontRef idx="minor">
-            <a:schemeClr val="tx1"/>
-          </a:fontRef>
-        </p:style>
-      </p:cxnSp>
-      <p:sp>
-        <p:nvSpPr>
-          <p:cNvPr id="14" name="TextBox 13"/>
+          </a:p>
+        </p:txBody>
+      </p:sp>
+      <p:sp>
+        <p:nvSpPr>
+          <p:cNvPr id="17" name="TextBox 16"/>
           <p:cNvSpPr txBox="1"/>
           <p:nvPr/>
         </p:nvSpPr>
         <p:spPr>
           <a:xfrm>
-            <a:off x="2103120" y="2999232"/>
-            <a:ext cx="640080" cy="274320"/>
-          </a:xfrm>
-          <a:prstGeom prst="rect">
-            <a:avLst/>
-          </a:prstGeom>
-          <a:noFill/>
-        </p:spPr>
-        <p:txBody>
-          <a:bodyPr wrap="square" anchor="t">
-            <a:spAutoFit/>
-          </a:bodyPr>
-          <a:lstStyle/>
-          <a:p>
-            <a:pPr algn="ctr">
-              <a:spcAft>
-                <a:spcPts val="400"/>
-              </a:spcAft>
-            </a:pPr>
-            <a:r>
-              <a:rPr sz="900" b="0" i="0">
-                <a:solidFill>
-                  <a:srgbClr val="6B7280"/>
-                </a:solidFill>
-                <a:latin typeface="Arial"/>
-              </a:rPr>
-              <a:t>request</a:t>
-            </a:r>
-          </a:p>
-        </p:txBody>
-      </p:sp>
-      <p:cxnSp>
-        <p:nvCxnSpPr>
-          <p:cNvPr id="15" name="Connector 14"/>
-          <p:cNvCxnSpPr/>
-          <p:nvPr/>
-        </p:nvCxnSpPr>
-        <p:spPr>
-          <a:xfrm flipH="1">
-            <a:off x="2121408" y="3611880"/>
-            <a:ext cx="603504" cy="0"/>
-          </a:xfrm>
-          <a:prstGeom prst="line">
-            <a:avLst/>
-          </a:prstGeom>
-          <a:ln w="15875">
-            <a:solidFill>
-              <a:srgbClr val="5E48B8"/>
-            </a:solidFill>
-            <a:prstDash val="dash"/>
-            <a:tailEnd type="triangle"/>
-          </a:ln>
-        </p:spPr>
-        <p:style>
-          <a:lnRef idx="2">
-            <a:schemeClr val="accent1"/>
-          </a:lnRef>
-          <a:fillRef idx="0">
-            <a:schemeClr val="accent1"/>
-          </a:fillRef>
-          <a:effectRef idx="1">
-            <a:schemeClr val="accent1"/>
-          </a:effectRef>
-          <a:fontRef idx="minor">
-            <a:schemeClr val="tx1"/>
-          </a:fontRef>
-        </p:style>
-      </p:cxnSp>
-      <p:sp>
-        <p:nvSpPr>
-          <p:cNvPr id="16" name="TextBox 15"/>
-          <p:cNvSpPr txBox="1"/>
-          <p:nvPr/>
-        </p:nvSpPr>
-        <p:spPr>
-          <a:xfrm>
-            <a:off x="2103120" y="3657600"/>
-            <a:ext cx="640080" cy="274320"/>
-          </a:xfrm>
-          <a:prstGeom prst="rect">
-            <a:avLst/>
-          </a:prstGeom>
-          <a:noFill/>
-        </p:spPr>
-        <p:txBody>
-          <a:bodyPr wrap="square" anchor="t">
-            <a:spAutoFit/>
-          </a:bodyPr>
-          <a:lstStyle/>
-          <a:p>
-            <a:pPr algn="ctr">
-              <a:spcAft>
-                <a:spcPts val="400"/>
-              </a:spcAft>
-            </a:pPr>
-            <a:r>
-              <a:rPr sz="900" b="0" i="0">
-                <a:solidFill>
-                  <a:srgbClr val="6B7280"/>
-                </a:solidFill>
-                <a:latin typeface="Arial"/>
-              </a:rPr>
-              <a:t>reply</a:t>
-            </a:r>
-          </a:p>
-        </p:txBody>
-      </p:sp>
-      <p:cxnSp>
-        <p:nvCxnSpPr>
-          <p:cNvPr id="17" name="Connector 16"/>
-          <p:cNvCxnSpPr/>
-          <p:nvPr/>
-        </p:nvCxnSpPr>
-        <p:spPr>
-          <a:xfrm>
-            <a:off x="3749039" y="2029968"/>
-            <a:ext cx="0" cy="694944"/>
-          </a:xfrm>
-          <a:prstGeom prst="line">
-            <a:avLst/>
-          </a:prstGeom>
-          <a:ln w="15875">
-            <a:solidFill>
-              <a:srgbClr val="6B7280"/>
-            </a:solidFill>
-            <a:tailEnd type="triangle"/>
-          </a:ln>
-        </p:spPr>
-        <p:style>
-          <a:lnRef idx="2">
-            <a:schemeClr val="accent1"/>
-          </a:lnRef>
-          <a:fillRef idx="0">
-            <a:schemeClr val="accent1"/>
-          </a:fillRef>
-          <a:effectRef idx="1">
-            <a:schemeClr val="accent1"/>
-          </a:effectRef>
-          <a:fontRef idx="minor">
-            <a:schemeClr val="tx1"/>
-          </a:fontRef>
-        </p:style>
-      </p:cxnSp>
-      <p:sp>
-        <p:nvSpPr>
-          <p:cNvPr id="18" name="TextBox 17"/>
-          <p:cNvSpPr txBox="1"/>
-          <p:nvPr/>
-        </p:nvSpPr>
-        <p:spPr>
-          <a:xfrm>
-            <a:off x="3822191" y="2240280"/>
-            <a:ext cx="731520" cy="274320"/>
+            <a:off x="8686800" y="1508760"/>
+            <a:ext cx="2743200" cy="365760"/>
           </a:xfrm>
           <a:prstGeom prst="rect">
             <a:avLst/>
@@ -8879,64 +8874,98 @@
               </a:spcAft>
             </a:pPr>
             <a:r>
-              <a:rPr sz="900" b="0" i="0">
-                <a:solidFill>
-                  <a:srgbClr val="6B7280"/>
+              <a:rPr sz="1500" b="1" i="0">
+                <a:solidFill>
+                  <a:srgbClr val="002060"/>
                 </a:solidFill>
                 <a:latin typeface="Arial"/>
               </a:rPr>
-              <a:t>labels</a:t>
-            </a:r>
-          </a:p>
-        </p:txBody>
-      </p:sp>
-      <p:cxnSp>
-        <p:nvCxnSpPr>
-          <p:cNvPr id="19" name="Connector 18"/>
-          <p:cNvCxnSpPr/>
-          <p:nvPr/>
-        </p:nvCxnSpPr>
-        <p:spPr>
-          <a:xfrm flipV="1">
-            <a:off x="2304288" y="3995928"/>
-            <a:ext cx="713232" cy="804672"/>
-          </a:xfrm>
-          <a:prstGeom prst="line">
-            <a:avLst/>
-          </a:prstGeom>
-          <a:ln w="15875">
-            <a:solidFill>
-              <a:srgbClr val="6B7280"/>
-            </a:solidFill>
-            <a:prstDash val="dash"/>
-            <a:tailEnd type="triangle"/>
-          </a:ln>
-        </p:spPr>
-        <p:style>
-          <a:lnRef idx="2">
-            <a:schemeClr val="accent1"/>
-          </a:lnRef>
-          <a:fillRef idx="0">
-            <a:schemeClr val="accent1"/>
-          </a:fillRef>
-          <a:effectRef idx="1">
-            <a:schemeClr val="accent1"/>
-          </a:effectRef>
-          <a:fontRef idx="minor">
-            <a:schemeClr val="tx1"/>
-          </a:fontRef>
-        </p:style>
-      </p:cxnSp>
-      <p:sp>
-        <p:nvSpPr>
-          <p:cNvPr id="20" name="Rectangle 19"/>
+              <a:t>What you should see</a:t>
+            </a:r>
+          </a:p>
+        </p:txBody>
+      </p:sp>
+      <p:sp>
+        <p:nvSpPr>
+          <p:cNvPr id="18" name="TextBox 17"/>
+          <p:cNvSpPr txBox="1"/>
+          <p:nvPr/>
+        </p:nvSpPr>
+        <p:spPr>
+          <a:xfrm>
+            <a:off x="8686800" y="1920240"/>
+            <a:ext cx="2743200" cy="2331720"/>
+          </a:xfrm>
+          <a:prstGeom prst="rect">
+            <a:avLst/>
+          </a:prstGeom>
+          <a:noFill/>
+        </p:spPr>
+        <p:txBody>
+          <a:bodyPr wrap="square" anchor="t">
+            <a:spAutoFit/>
+          </a:bodyPr>
+          <a:lstStyle/>
+          <a:p>
+            <a:pPr algn="l">
+              <a:spcAft>
+                <a:spcPts val="500"/>
+              </a:spcAft>
+            </a:pPr>
+            <a:r>
+              <a:rPr sz="1150" b="0" i="0">
+                <a:solidFill>
+                  <a:srgbClr val="000000"/>
+                </a:solidFill>
+                <a:latin typeface="Arial"/>
+              </a:rPr>
+              <a:t>The brief steers judgement: what counts as urgent, what to refuse, what to ignore</a:t>
+            </a:r>
+          </a:p>
+          <a:p>
+            <a:pPr algn="l">
+              <a:spcAft>
+                <a:spcPts val="500"/>
+              </a:spcAft>
+            </a:pPr>
+            <a:r>
+              <a:rPr sz="1150" b="0" i="0">
+                <a:solidFill>
+                  <a:srgbClr val="000000"/>
+                </a:solidFill>
+                <a:latin typeface="Arial"/>
+              </a:rPr>
+              <a:t>It enforces nothing: when it is weakened, only the code and the person remain</a:t>
+            </a:r>
+          </a:p>
+          <a:p>
+            <a:pPr algn="l">
+              <a:spcAft>
+                <a:spcPts val="500"/>
+              </a:spcAft>
+            </a:pPr>
+            <a:r>
+              <a:rPr sz="1150" b="0" i="0">
+                <a:solidFill>
+                  <a:srgbClr val="000000"/>
+                </a:solidFill>
+                <a:latin typeface="Arial"/>
+              </a:rPr>
+              <a:t>One added sentence changes what the orchestrator asks the sub-agents to do first</a:t>
+            </a:r>
+          </a:p>
+        </p:txBody>
+      </p:sp>
+      <p:sp>
+        <p:nvSpPr>
+          <p:cNvPr id="19" name="Rectangle 18"/>
           <p:cNvSpPr/>
           <p:nvPr/>
         </p:nvSpPr>
         <p:spPr>
           <a:xfrm>
-            <a:off x="5669280" y="1371600"/>
-            <a:ext cx="3017520" cy="1234440"/>
+            <a:off x="8503920" y="4572000"/>
+            <a:ext cx="3108960" cy="1234440"/>
           </a:xfrm>
           <a:prstGeom prst="rect">
             <a:avLst/>
@@ -8975,14 +9004,14 @@
       </p:sp>
       <p:sp>
         <p:nvSpPr>
-          <p:cNvPr id="21" name="TextBox 20"/>
+          <p:cNvPr id="20" name="TextBox 19"/>
           <p:cNvSpPr txBox="1"/>
           <p:nvPr/>
         </p:nvSpPr>
         <p:spPr>
           <a:xfrm>
-            <a:off x="5779008" y="1444752"/>
-            <a:ext cx="2798063" cy="292608"/>
+            <a:off x="8613648" y="4645152"/>
+            <a:ext cx="2889504" cy="292608"/>
           </a:xfrm>
           <a:prstGeom prst="rect">
             <a:avLst/>
@@ -9007,21 +9036,21 @@
                 </a:solidFill>
                 <a:latin typeface="Arial"/>
               </a:rPr>
-              <a:t>WHAT YOU ARE LOOKING AT</a:t>
-            </a:r>
-          </a:p>
-        </p:txBody>
-      </p:sp>
-      <p:sp>
-        <p:nvSpPr>
-          <p:cNvPr id="22" name="TextBox 21"/>
+              <a:t>QUESTION FOR THE GROUP</a:t>
+            </a:r>
+          </a:p>
+        </p:txBody>
+      </p:sp>
+      <p:sp>
+        <p:nvSpPr>
+          <p:cNvPr id="21" name="TextBox 20"/>
           <p:cNvSpPr txBox="1"/>
           <p:nvPr/>
         </p:nvSpPr>
         <p:spPr>
           <a:xfrm>
-            <a:off x="5779008" y="1719072"/>
-            <a:ext cx="2798063" cy="822960"/>
+            <a:off x="8613648" y="4919472"/>
+            <a:ext cx="2889504" cy="822960"/>
           </a:xfrm>
           <a:prstGeom prst="rect">
             <a:avLst/>
@@ -9046,67 +9075,21 @@
                 </a:solidFill>
                 <a:latin typeface="Arial"/>
               </a:rPr>
-              <a:t>One model call that reads the brief, the rules' labels and the last turns, then decides what to do next. It does not touch the inbox itself.</a:t>
-            </a:r>
-          </a:p>
-        </p:txBody>
-      </p:sp>
-      <p:sp>
-        <p:nvSpPr>
-          <p:cNvPr id="23" name="Rectangle 22"/>
-          <p:cNvSpPr/>
-          <p:nvPr/>
-        </p:nvSpPr>
-        <p:spPr>
-          <a:xfrm>
-            <a:off x="5669280" y="3017520"/>
-            <a:ext cx="3017520" cy="1097280"/>
-          </a:xfrm>
-          <a:prstGeom prst="rect">
-            <a:avLst/>
-          </a:prstGeom>
-          <a:solidFill>
-            <a:srgbClr val="FFFFFF"/>
-          </a:solidFill>
-          <a:ln w="19050">
-            <a:solidFill>
-              <a:srgbClr val="B9975B"/>
-            </a:solidFill>
-          </a:ln>
-          <a:effectLst/>
-        </p:spPr>
-        <p:style>
-          <a:lnRef idx="1">
-            <a:schemeClr val="accent1"/>
-          </a:lnRef>
-          <a:fillRef idx="3">
-            <a:schemeClr val="accent1"/>
-          </a:fillRef>
-          <a:effectRef idx="2">
-            <a:schemeClr val="accent1"/>
-          </a:effectRef>
-          <a:fontRef idx="minor">
-            <a:schemeClr val="lt1"/>
-          </a:fontRef>
-        </p:style>
-        <p:txBody>
-          <a:bodyPr rtlCol="0" anchor="ctr"/>
-          <a:lstStyle/>
-          <a:p>
-            <a:pPr algn="ctr"/>
-          </a:p>
-        </p:txBody>
-      </p:sp>
-      <p:sp>
-        <p:nvSpPr>
-          <p:cNvPr id="24" name="TextBox 23"/>
+              <a:t>What belongs in the brief, and what must never depend on it?</a:t>
+            </a:r>
+          </a:p>
+        </p:txBody>
+      </p:sp>
+      <p:sp>
+        <p:nvSpPr>
+          <p:cNvPr id="22" name="TextBox 21"/>
           <p:cNvSpPr txBox="1"/>
           <p:nvPr/>
         </p:nvSpPr>
         <p:spPr>
           <a:xfrm>
-            <a:off x="5779008" y="3090672"/>
-            <a:ext cx="2798063" cy="292608"/>
+            <a:off x="822960" y="6126480"/>
+            <a:ext cx="10607040" cy="320040"/>
           </a:xfrm>
           <a:prstGeom prst="rect">
             <a:avLst/>
@@ -9125,518 +9108,13 @@
               </a:spcAft>
             </a:pPr>
             <a:r>
-              <a:rPr sz="1050" b="1" i="0">
-                <a:solidFill>
-                  <a:srgbClr val="8A6A2E"/>
+              <a:rPr sz="1100" b="0" i="1">
+                <a:solidFill>
+                  <a:srgbClr val="6B7280"/>
                 </a:solidFill>
                 <a:latin typeface="Arial"/>
               </a:rPr>
-              <a:t>MEMORY, HONESTLY</a:t>
-            </a:r>
-          </a:p>
-        </p:txBody>
-      </p:sp>
-      <p:sp>
-        <p:nvSpPr>
-          <p:cNvPr id="25" name="TextBox 24"/>
-          <p:cNvSpPr txBox="1"/>
-          <p:nvPr/>
-        </p:nvSpPr>
-        <p:spPr>
-          <a:xfrm>
-            <a:off x="5779008" y="3364991"/>
-            <a:ext cx="2798063" cy="685800"/>
-          </a:xfrm>
-          <a:prstGeom prst="rect">
-            <a:avLst/>
-          </a:prstGeom>
-          <a:noFill/>
-        </p:spPr>
-        <p:txBody>
-          <a:bodyPr wrap="square" anchor="t">
-            <a:spAutoFit/>
-          </a:bodyPr>
-          <a:lstStyle/>
-          <a:p>
-            <a:pPr algn="l">
-              <a:spcAft>
-                <a:spcPts val="200"/>
-              </a:spcAft>
-            </a:pPr>
-            <a:r>
-              <a:rPr sz="1050" b="0" i="0">
-                <a:solidFill>
-                  <a:srgbClr val="000000"/>
-                </a:solidFill>
-                <a:latin typeface="Arial"/>
-              </a:rPr>
-              <a:t>The model remembers nothing between calls. What it knows is re-sent every time (working memory) or written down somewhere else.</a:t>
-            </a:r>
-          </a:p>
-        </p:txBody>
-      </p:sp>
-      <p:sp>
-        <p:nvSpPr>
-          <p:cNvPr id="26" name="Rounded Rectangle 25"/>
-          <p:cNvSpPr/>
-          <p:nvPr/>
-        </p:nvSpPr>
-        <p:spPr>
-          <a:xfrm>
-            <a:off x="548640" y="5650992"/>
-            <a:ext cx="256032" cy="164592"/>
-          </a:xfrm>
-          <a:prstGeom prst="roundRect">
-            <a:avLst/>
-          </a:prstGeom>
-          <a:solidFill>
-            <a:srgbClr val="E6F0F7"/>
-          </a:solidFill>
-          <a:ln w="12700">
-            <a:solidFill>
-              <a:srgbClr val="2C6C9C"/>
-            </a:solidFill>
-          </a:ln>
-          <a:effectLst/>
-        </p:spPr>
-        <p:style>
-          <a:lnRef idx="1">
-            <a:schemeClr val="accent1"/>
-          </a:lnRef>
-          <a:fillRef idx="3">
-            <a:schemeClr val="accent1"/>
-          </a:fillRef>
-          <a:effectRef idx="2">
-            <a:schemeClr val="accent1"/>
-          </a:effectRef>
-          <a:fontRef idx="minor">
-            <a:schemeClr val="lt1"/>
-          </a:fontRef>
-        </p:style>
-        <p:txBody>
-          <a:bodyPr rtlCol="0" anchor="ctr"/>
-          <a:lstStyle/>
-          <a:p>
-            <a:pPr algn="ctr"/>
-          </a:p>
-        </p:txBody>
-      </p:sp>
-      <p:sp>
-        <p:nvSpPr>
-          <p:cNvPr id="27" name="TextBox 26"/>
-          <p:cNvSpPr txBox="1"/>
-          <p:nvPr/>
-        </p:nvSpPr>
-        <p:spPr>
-          <a:xfrm>
-            <a:off x="859536" y="5596128"/>
-            <a:ext cx="1097280" cy="274320"/>
-          </a:xfrm>
-          <a:prstGeom prst="rect">
-            <a:avLst/>
-          </a:prstGeom>
-          <a:noFill/>
-        </p:spPr>
-        <p:txBody>
-          <a:bodyPr wrap="square" anchor="t">
-            <a:spAutoFit/>
-          </a:bodyPr>
-          <a:lstStyle/>
-          <a:p>
-            <a:pPr algn="l">
-              <a:spcAft>
-                <a:spcPts val="400"/>
-              </a:spcAft>
-            </a:pPr>
-            <a:r>
-              <a:rPr sz="1050" b="0" i="0">
-                <a:solidFill>
-                  <a:srgbClr val="6B7280"/>
-                </a:solidFill>
-                <a:latin typeface="Arial"/>
-              </a:rPr>
-              <a:t>deterministic</a:t>
-            </a:r>
-          </a:p>
-        </p:txBody>
-      </p:sp>
-      <p:sp>
-        <p:nvSpPr>
-          <p:cNvPr id="28" name="Rounded Rectangle 27"/>
-          <p:cNvSpPr/>
-          <p:nvPr/>
-        </p:nvSpPr>
-        <p:spPr>
-          <a:xfrm>
-            <a:off x="1965960" y="5650992"/>
-            <a:ext cx="256032" cy="164592"/>
-          </a:xfrm>
-          <a:prstGeom prst="roundRect">
-            <a:avLst/>
-          </a:prstGeom>
-          <a:solidFill>
-            <a:srgbClr val="EEEAF9"/>
-          </a:solidFill>
-          <a:ln w="12700">
-            <a:solidFill>
-              <a:srgbClr val="5E48B8"/>
-            </a:solidFill>
-          </a:ln>
-          <a:effectLst/>
-        </p:spPr>
-        <p:style>
-          <a:lnRef idx="1">
-            <a:schemeClr val="accent1"/>
-          </a:lnRef>
-          <a:fillRef idx="3">
-            <a:schemeClr val="accent1"/>
-          </a:fillRef>
-          <a:effectRef idx="2">
-            <a:schemeClr val="accent1"/>
-          </a:effectRef>
-          <a:fontRef idx="minor">
-            <a:schemeClr val="lt1"/>
-          </a:fontRef>
-        </p:style>
-        <p:txBody>
-          <a:bodyPr rtlCol="0" anchor="ctr"/>
-          <a:lstStyle/>
-          <a:p>
-            <a:pPr algn="ctr"/>
-          </a:p>
-        </p:txBody>
-      </p:sp>
-      <p:sp>
-        <p:nvSpPr>
-          <p:cNvPr id="29" name="TextBox 28"/>
-          <p:cNvSpPr txBox="1"/>
-          <p:nvPr/>
-        </p:nvSpPr>
-        <p:spPr>
-          <a:xfrm>
-            <a:off x="2276856" y="5596128"/>
-            <a:ext cx="1097280" cy="274320"/>
-          </a:xfrm>
-          <a:prstGeom prst="rect">
-            <a:avLst/>
-          </a:prstGeom>
-          <a:noFill/>
-        </p:spPr>
-        <p:txBody>
-          <a:bodyPr wrap="square" anchor="t">
-            <a:spAutoFit/>
-          </a:bodyPr>
-          <a:lstStyle/>
-          <a:p>
-            <a:pPr algn="l">
-              <a:spcAft>
-                <a:spcPts val="400"/>
-              </a:spcAft>
-            </a:pPr>
-            <a:r>
-              <a:rPr sz="1050" b="0" i="0">
-                <a:solidFill>
-                  <a:srgbClr val="6B7280"/>
-                </a:solidFill>
-                <a:latin typeface="Arial"/>
-              </a:rPr>
-              <a:t>agent</a:t>
-            </a:r>
-          </a:p>
-        </p:txBody>
-      </p:sp>
-      <p:sp>
-        <p:nvSpPr>
-          <p:cNvPr id="30" name="Rounded Rectangle 29"/>
-          <p:cNvSpPr/>
-          <p:nvPr/>
-        </p:nvSpPr>
-        <p:spPr>
-          <a:xfrm>
-            <a:off x="3383280" y="5650992"/>
-            <a:ext cx="256032" cy="164592"/>
-          </a:xfrm>
-          <a:prstGeom prst="roundRect">
-            <a:avLst/>
-          </a:prstGeom>
-          <a:solidFill>
-            <a:srgbClr val="EEEAF9"/>
-          </a:solidFill>
-          <a:ln w="12700">
-            <a:solidFill>
-              <a:srgbClr val="5E48B8"/>
-            </a:solidFill>
-            <a:prstDash val="dash"/>
-          </a:ln>
-          <a:effectLst/>
-        </p:spPr>
-        <p:style>
-          <a:lnRef idx="1">
-            <a:schemeClr val="accent1"/>
-          </a:lnRef>
-          <a:fillRef idx="3">
-            <a:schemeClr val="accent1"/>
-          </a:fillRef>
-          <a:effectRef idx="2">
-            <a:schemeClr val="accent1"/>
-          </a:effectRef>
-          <a:fontRef idx="minor">
-            <a:schemeClr val="lt1"/>
-          </a:fontRef>
-        </p:style>
-        <p:txBody>
-          <a:bodyPr rtlCol="0" anchor="ctr"/>
-          <a:lstStyle/>
-          <a:p>
-            <a:pPr algn="ctr"/>
-          </a:p>
-        </p:txBody>
-      </p:sp>
-      <p:sp>
-        <p:nvSpPr>
-          <p:cNvPr id="31" name="TextBox 30"/>
-          <p:cNvSpPr txBox="1"/>
-          <p:nvPr/>
-        </p:nvSpPr>
-        <p:spPr>
-          <a:xfrm>
-            <a:off x="3694176" y="5596128"/>
-            <a:ext cx="1097280" cy="274320"/>
-          </a:xfrm>
-          <a:prstGeom prst="rect">
-            <a:avLst/>
-          </a:prstGeom>
-          <a:noFill/>
-        </p:spPr>
-        <p:txBody>
-          <a:bodyPr wrap="square" anchor="t">
-            <a:spAutoFit/>
-          </a:bodyPr>
-          <a:lstStyle/>
-          <a:p>
-            <a:pPr algn="l">
-              <a:spcAft>
-                <a:spcPts val="400"/>
-              </a:spcAft>
-            </a:pPr>
-            <a:r>
-              <a:rPr sz="1050" b="0" i="0">
-                <a:solidFill>
-                  <a:srgbClr val="6B7280"/>
-                </a:solidFill>
-                <a:latin typeface="Arial"/>
-              </a:rPr>
-              <a:t>brief &amp; skills</a:t>
-            </a:r>
-          </a:p>
-        </p:txBody>
-      </p:sp>
-      <p:sp>
-        <p:nvSpPr>
-          <p:cNvPr id="32" name="Rounded Rectangle 31"/>
-          <p:cNvSpPr/>
-          <p:nvPr/>
-        </p:nvSpPr>
-        <p:spPr>
-          <a:xfrm>
-            <a:off x="548640" y="5925312"/>
-            <a:ext cx="256032" cy="164592"/>
-          </a:xfrm>
-          <a:prstGeom prst="roundRect">
-            <a:avLst/>
-          </a:prstGeom>
-          <a:solidFill>
-            <a:srgbClr val="F3F4F7"/>
-          </a:solidFill>
-          <a:ln w="12700">
-            <a:solidFill>
-              <a:srgbClr val="6B7280"/>
-            </a:solidFill>
-            <a:prstDash val="dash"/>
-          </a:ln>
-          <a:effectLst/>
-        </p:spPr>
-        <p:style>
-          <a:lnRef idx="1">
-            <a:schemeClr val="accent1"/>
-          </a:lnRef>
-          <a:fillRef idx="3">
-            <a:schemeClr val="accent1"/>
-          </a:fillRef>
-          <a:effectRef idx="2">
-            <a:schemeClr val="accent1"/>
-          </a:effectRef>
-          <a:fontRef idx="minor">
-            <a:schemeClr val="lt1"/>
-          </a:fontRef>
-        </p:style>
-        <p:txBody>
-          <a:bodyPr rtlCol="0" anchor="ctr"/>
-          <a:lstStyle/>
-          <a:p>
-            <a:pPr algn="ctr"/>
-          </a:p>
-        </p:txBody>
-      </p:sp>
-      <p:sp>
-        <p:nvSpPr>
-          <p:cNvPr id="33" name="TextBox 32"/>
-          <p:cNvSpPr txBox="1"/>
-          <p:nvPr/>
-        </p:nvSpPr>
-        <p:spPr>
-          <a:xfrm>
-            <a:off x="859536" y="5870448"/>
-            <a:ext cx="1097280" cy="274320"/>
-          </a:xfrm>
-          <a:prstGeom prst="rect">
-            <a:avLst/>
-          </a:prstGeom>
-          <a:noFill/>
-        </p:spPr>
-        <p:txBody>
-          <a:bodyPr wrap="square" anchor="t">
-            <a:spAutoFit/>
-          </a:bodyPr>
-          <a:lstStyle/>
-          <a:p>
-            <a:pPr algn="l">
-              <a:spcAft>
-                <a:spcPts val="400"/>
-              </a:spcAft>
-            </a:pPr>
-            <a:r>
-              <a:rPr sz="1050" b="0" i="0">
-                <a:solidFill>
-                  <a:srgbClr val="6B7280"/>
-                </a:solidFill>
-                <a:latin typeface="Arial"/>
-              </a:rPr>
-              <a:t>memory</a:t>
-            </a:r>
-          </a:p>
-        </p:txBody>
-      </p:sp>
-      <p:sp>
-        <p:nvSpPr>
-          <p:cNvPr id="34" name="Rounded Rectangle 33"/>
-          <p:cNvSpPr/>
-          <p:nvPr/>
-        </p:nvSpPr>
-        <p:spPr>
-          <a:xfrm>
-            <a:off x="1965960" y="5925312"/>
-            <a:ext cx="256032" cy="164592"/>
-          </a:xfrm>
-          <a:prstGeom prst="roundRect">
-            <a:avLst/>
-          </a:prstGeom>
-          <a:solidFill>
-            <a:srgbClr val="FBF1E0"/>
-          </a:solidFill>
-          <a:ln w="12700">
-            <a:solidFill>
-              <a:srgbClr val="B4761C"/>
-            </a:solidFill>
-          </a:ln>
-          <a:effectLst/>
-        </p:spPr>
-        <p:style>
-          <a:lnRef idx="1">
-            <a:schemeClr val="accent1"/>
-          </a:lnRef>
-          <a:fillRef idx="3">
-            <a:schemeClr val="accent1"/>
-          </a:fillRef>
-          <a:effectRef idx="2">
-            <a:schemeClr val="accent1"/>
-          </a:effectRef>
-          <a:fontRef idx="minor">
-            <a:schemeClr val="lt1"/>
-          </a:fontRef>
-        </p:style>
-        <p:txBody>
-          <a:bodyPr rtlCol="0" anchor="ctr"/>
-          <a:lstStyle/>
-          <a:p>
-            <a:pPr algn="ctr"/>
-          </a:p>
-        </p:txBody>
-      </p:sp>
-      <p:sp>
-        <p:nvSpPr>
-          <p:cNvPr id="35" name="TextBox 34"/>
-          <p:cNvSpPr txBox="1"/>
-          <p:nvPr/>
-        </p:nvSpPr>
-        <p:spPr>
-          <a:xfrm>
-            <a:off x="2276856" y="5870448"/>
-            <a:ext cx="1097280" cy="274320"/>
-          </a:xfrm>
-          <a:prstGeom prst="rect">
-            <a:avLst/>
-          </a:prstGeom>
-          <a:noFill/>
-        </p:spPr>
-        <p:txBody>
-          <a:bodyPr wrap="square" anchor="t">
-            <a:spAutoFit/>
-          </a:bodyPr>
-          <a:lstStyle/>
-          <a:p>
-            <a:pPr algn="l">
-              <a:spcAft>
-                <a:spcPts val="400"/>
-              </a:spcAft>
-            </a:pPr>
-            <a:r>
-              <a:rPr sz="1050" b="0" i="0">
-                <a:solidFill>
-                  <a:srgbClr val="6B7280"/>
-                </a:solidFill>
-                <a:latin typeface="Arial"/>
-              </a:rPr>
-              <a:t>human</a:t>
-            </a:r>
-          </a:p>
-        </p:txBody>
-      </p:sp>
-      <p:sp>
-        <p:nvSpPr>
-          <p:cNvPr id="36" name="TextBox 35"/>
-          <p:cNvSpPr txBox="1"/>
-          <p:nvPr/>
-        </p:nvSpPr>
-        <p:spPr>
-          <a:xfrm>
-            <a:off x="822960" y="6327648"/>
-            <a:ext cx="9692640" cy="457200"/>
-          </a:xfrm>
-          <a:prstGeom prst="rect">
-            <a:avLst/>
-          </a:prstGeom>
-          <a:noFill/>
-        </p:spPr>
-        <p:txBody>
-          <a:bodyPr wrap="square" anchor="t">
-            <a:spAutoFit/>
-          </a:bodyPr>
-          <a:lstStyle/>
-          <a:p>
-            <a:pPr algn="l">
-              <a:spcAft>
-                <a:spcPts val="400"/>
-              </a:spcAft>
-            </a:pPr>
-            <a:r>
-              <a:rPr sz="1050" b="0" i="1">
-                <a:solidFill>
-                  <a:srgbClr val="002060"/>
-                </a:solidFill>
-                <a:latin typeface="Arial"/>
-              </a:rPr>
-              <a:t>One person, one orchestrator. It reads the brief and the rules' labels, keeps a working memory for this request, and decides.</a:t>
+              <a:t>Five minutes · one person drives, the others read the trace aloud · Restore default and Reset inbox put everything back</a:t>
             </a:r>
           </a:p>
         </p:txBody>
@@ -9732,7 +9210,7 @@
                 </a:solidFill>
                 <a:latin typeface="Arial"/>
               </a:rPr>
-              <a:t>HOW THE AGENT WORKS · 2 OF 3</a:t>
+              <a:t>CHALLENGE 2 · THE GUARDRAILS</a:t>
             </a:r>
           </a:p>
         </p:txBody>
@@ -9809,14 +9287,53 @@
       </p:cxnSp>
       <p:sp>
         <p:nvSpPr>
-          <p:cNvPr id="6" name="Rounded Rectangle 5"/>
+          <p:cNvPr id="6" name="TextBox 5"/>
+          <p:cNvSpPr txBox="1"/>
+          <p:nvPr/>
+        </p:nvSpPr>
+        <p:spPr>
+          <a:xfrm>
+            <a:off x="822960" y="1371600"/>
+            <a:ext cx="7498079" cy="457200"/>
+          </a:xfrm>
+          <a:prstGeom prst="rect">
+            <a:avLst/>
+          </a:prstGeom>
+          <a:noFill/>
+        </p:spPr>
+        <p:txBody>
+          <a:bodyPr wrap="square" anchor="t">
+            <a:spAutoFit/>
+          </a:bodyPr>
+          <a:lstStyle/>
+          <a:p>
+            <a:pPr algn="l">
+              <a:spcAft>
+                <a:spcPts val="400"/>
+              </a:spcAft>
+            </a:pPr>
+            <a:r>
+              <a:rPr sz="1250" b="0" i="0">
+                <a:solidFill>
+                  <a:srgbClr val="6B7280"/>
+                </a:solidFill>
+                <a:latin typeface="Arial"/>
+              </a:rPr>
+              <a:t>Guardrails run inside the tools. They do not ask the model; they check it. Three lines of defence: the brief, the code, the person.</a:t>
+            </a:r>
+          </a:p>
+        </p:txBody>
+      </p:sp>
+      <p:sp>
+        <p:nvSpPr>
+          <p:cNvPr id="7" name="Rounded Rectangle 6"/>
           <p:cNvSpPr/>
           <p:nvPr/>
         </p:nvSpPr>
         <p:spPr>
           <a:xfrm>
-            <a:off x="10424160" y="502920"/>
-            <a:ext cx="1188720" cy="365760"/>
+            <a:off x="822960" y="2039112"/>
+            <a:ext cx="457200" cy="347472"/>
           </a:xfrm>
           <a:prstGeom prst="roundRect">
             <a:avLst/>
@@ -9849,41 +9366,114 @@
           <a:p>
             <a:pPr algn="ctr"/>
             <a:r>
-              <a:rPr sz="1200" b="1" i="0">
+              <a:rPr sz="1300" b="1" i="0">
                 <a:solidFill>
                   <a:srgbClr val="FFFFFF"/>
                 </a:solidFill>
                 <a:latin typeface="Arial"/>
               </a:rPr>
-              <a:t>2 / 3</a:t>
-            </a:r>
-          </a:p>
-        </p:txBody>
-      </p:sp>
-      <p:sp>
-        <p:nvSpPr>
-          <p:cNvPr id="7" name="Rounded Rectangle 6"/>
+              <a:t>A</a:t>
+            </a:r>
+          </a:p>
+        </p:txBody>
+      </p:sp>
+      <p:sp>
+        <p:nvSpPr>
+          <p:cNvPr id="8" name="TextBox 7"/>
+          <p:cNvSpPr txBox="1"/>
+          <p:nvPr/>
+        </p:nvSpPr>
+        <p:spPr>
+          <a:xfrm>
+            <a:off x="1463040" y="1993392"/>
+            <a:ext cx="6675120" cy="365760"/>
+          </a:xfrm>
+          <a:prstGeom prst="rect">
+            <a:avLst/>
+          </a:prstGeom>
+          <a:noFill/>
+        </p:spPr>
+        <p:txBody>
+          <a:bodyPr wrap="square" anchor="t">
+            <a:spAutoFit/>
+          </a:bodyPr>
+          <a:lstStyle/>
+          <a:p>
+            <a:pPr algn="l">
+              <a:spcAft>
+                <a:spcPts val="400"/>
+              </a:spcAft>
+            </a:pPr>
+            <a:r>
+              <a:rPr sz="1500" b="1" i="0">
+                <a:solidFill>
+                  <a:srgbClr val="000000"/>
+                </a:solidFill>
+                <a:latin typeface="Arial"/>
+              </a:rPr>
+              <a:t>Lower the bulk limit</a:t>
+            </a:r>
+          </a:p>
+        </p:txBody>
+      </p:sp>
+      <p:sp>
+        <p:nvSpPr>
+          <p:cNvPr id="9" name="TextBox 8"/>
+          <p:cNvSpPr txBox="1"/>
+          <p:nvPr/>
+        </p:nvSpPr>
+        <p:spPr>
+          <a:xfrm>
+            <a:off x="1463040" y="2359152"/>
+            <a:ext cx="6675120" cy="777240"/>
+          </a:xfrm>
+          <a:prstGeom prst="rect">
+            <a:avLst/>
+          </a:prstGeom>
+          <a:noFill/>
+        </p:spPr>
+        <p:txBody>
+          <a:bodyPr wrap="square" anchor="t">
+            <a:spAutoFit/>
+          </a:bodyPr>
+          <a:lstStyle/>
+          <a:p>
+            <a:pPr algn="l">
+              <a:spcAft>
+                <a:spcPts val="400"/>
+              </a:spcAft>
+            </a:pPr>
+            <a:r>
+              <a:rPr sz="1200" b="0" i="0">
+                <a:solidFill>
+                  <a:srgbClr val="000000"/>
+                </a:solidFill>
+                <a:latin typeface="Arial"/>
+              </a:rPr>
+              <a:t>In block 3, Guardrails, set "more than N emails in one call" to 10. Send "Label the newsletters, vendor mail and admin so I never see them." An approval card appears: reject it, with a reason.</a:t>
+            </a:r>
+          </a:p>
+        </p:txBody>
+      </p:sp>
+      <p:sp>
+        <p:nvSpPr>
+          <p:cNvPr id="10" name="Rounded Rectangle 9"/>
           <p:cNvSpPr/>
           <p:nvPr/>
         </p:nvSpPr>
         <p:spPr>
           <a:xfrm>
-            <a:off x="548640" y="1371600"/>
-            <a:ext cx="1737360" cy="713232"/>
+            <a:off x="822960" y="3227832"/>
+            <a:ext cx="457200" cy="347472"/>
           </a:xfrm>
           <a:prstGeom prst="roundRect">
-            <a:avLst>
-              <a:gd name="adj" fmla="val 12000"/>
-            </a:avLst>
+            <a:avLst/>
           </a:prstGeom>
           <a:solidFill>
-            <a:srgbClr val="EEEAF9"/>
+            <a:srgbClr val="00305C"/>
           </a:solidFill>
-          <a:ln w="15875">
-            <a:solidFill>
-              <a:srgbClr val="5E48B8"/>
-            </a:solidFill>
-            <a:prstDash val="dash"/>
+          <a:ln>
+            <a:noFill/>
           </a:ln>
           <a:effectLst/>
         </p:spPr>
@@ -9902,57 +9492,119 @@
           </a:fontRef>
         </p:style>
         <p:txBody>
-          <a:bodyPr rtlCol="0" anchor="ctr" wrap="square" lIns="54864" rIns="54864" tIns="27432" bIns="27432"/>
+          <a:bodyPr rtlCol="0" anchor="ctr" tIns="0" bIns="0"/>
           <a:lstStyle/>
           <a:p>
             <a:pPr algn="ctr"/>
             <a:r>
-              <a:rPr sz="1200" b="1" i="0">
-                <a:solidFill>
-                  <a:srgbClr val="000000"/>
+              <a:rPr sz="1300" b="1" i="0">
+                <a:solidFill>
+                  <a:srgbClr val="FFFFFF"/>
                 </a:solidFill>
                 <a:latin typeface="Arial"/>
               </a:rPr>
-              <a:t>Brief &amp; skills</a:t>
-            </a:r>
-          </a:p>
-          <a:p>
-            <a:pPr algn="ctr"/>
-            <a:r>
-              <a:rPr sz="900" b="0" i="0">
-                <a:solidFill>
-                  <a:srgbClr val="6B7280"/>
+              <a:t>B</a:t>
+            </a:r>
+          </a:p>
+        </p:txBody>
+      </p:sp>
+      <p:sp>
+        <p:nvSpPr>
+          <p:cNvPr id="11" name="TextBox 10"/>
+          <p:cNvSpPr txBox="1"/>
+          <p:nvPr/>
+        </p:nvSpPr>
+        <p:spPr>
+          <a:xfrm>
+            <a:off x="1463040" y="3182112"/>
+            <a:ext cx="6675120" cy="365760"/>
+          </a:xfrm>
+          <a:prstGeom prst="rect">
+            <a:avLst/>
+          </a:prstGeom>
+          <a:noFill/>
+        </p:spPr>
+        <p:txBody>
+          <a:bodyPr wrap="square" anchor="t">
+            <a:spAutoFit/>
+          </a:bodyPr>
+          <a:lstStyle/>
+          <a:p>
+            <a:pPr algn="l">
+              <a:spcAft>
+                <a:spcPts val="400"/>
+              </a:spcAft>
+            </a:pPr>
+            <a:r>
+              <a:rPr sz="1500" b="1" i="0">
+                <a:solidFill>
+                  <a:srgbClr val="000000"/>
                 </a:solidFill>
                 <a:latin typeface="Arial"/>
               </a:rPr>
-              <a:t>how to triage, when to escalate, what never to do</a:t>
-            </a:r>
-          </a:p>
-        </p:txBody>
-      </p:sp>
-      <p:sp>
-        <p:nvSpPr>
-          <p:cNvPr id="8" name="Rounded Rectangle 7"/>
+              <a:t>Try the protected label</a:t>
+            </a:r>
+          </a:p>
+        </p:txBody>
+      </p:sp>
+      <p:sp>
+        <p:nvSpPr>
+          <p:cNvPr id="12" name="TextBox 11"/>
+          <p:cNvSpPr txBox="1"/>
+          <p:nvPr/>
+        </p:nvSpPr>
+        <p:spPr>
+          <a:xfrm>
+            <a:off x="1463040" y="3547872"/>
+            <a:ext cx="6675120" cy="777240"/>
+          </a:xfrm>
+          <a:prstGeom prst="rect">
+            <a:avLst/>
+          </a:prstGeom>
+          <a:noFill/>
+        </p:spPr>
+        <p:txBody>
+          <a:bodyPr wrap="square" anchor="t">
+            <a:spAutoFit/>
+          </a:bodyPr>
+          <a:lstStyle/>
+          <a:p>
+            <a:pPr algn="l">
+              <a:spcAft>
+                <a:spcPts val="400"/>
+              </a:spcAft>
+            </a:pPr>
+            <a:r>
+              <a:rPr sz="1200" b="0" i="0">
+                <a:solidFill>
+                  <a:srgbClr val="000000"/>
+                </a:solidFill>
+                <a:latin typeface="Arial"/>
+              </a:rPr>
+              <a:t>Send "Archive all the Health &amp; Safety emails." Whatever the agent decides, the archive is blocked in code. Read what the agent tells you afterwards.</a:t>
+            </a:r>
+          </a:p>
+        </p:txBody>
+      </p:sp>
+      <p:sp>
+        <p:nvSpPr>
+          <p:cNvPr id="13" name="Rounded Rectangle 12"/>
           <p:cNvSpPr/>
           <p:nvPr/>
         </p:nvSpPr>
         <p:spPr>
           <a:xfrm>
-            <a:off x="548640" y="3017520"/>
-            <a:ext cx="1554480" cy="777240"/>
+            <a:off x="822960" y="4416552"/>
+            <a:ext cx="457200" cy="347472"/>
           </a:xfrm>
           <a:prstGeom prst="roundRect">
-            <a:avLst>
-              <a:gd name="adj" fmla="val 12000"/>
-            </a:avLst>
+            <a:avLst/>
           </a:prstGeom>
           <a:solidFill>
-            <a:srgbClr val="FBF1E0"/>
+            <a:srgbClr val="00305C"/>
           </a:solidFill>
-          <a:ln w="15875">
-            <a:solidFill>
-              <a:srgbClr val="B4761C"/>
-            </a:solidFill>
+          <a:ln>
+            <a:noFill/>
           </a:ln>
           <a:effectLst/>
         </p:spPr>
@@ -9971,58 +9623,119 @@
           </a:fontRef>
         </p:style>
         <p:txBody>
-          <a:bodyPr rtlCol="0" anchor="ctr" wrap="square" lIns="54864" rIns="54864" tIns="27432" bIns="27432"/>
+          <a:bodyPr rtlCol="0" anchor="ctr" tIns="0" bIns="0"/>
           <a:lstStyle/>
           <a:p>
             <a:pPr algn="ctr"/>
             <a:r>
-              <a:rPr sz="1200" b="1" i="0">
-                <a:solidFill>
-                  <a:srgbClr val="000000"/>
+              <a:rPr sz="1300" b="1" i="0">
+                <a:solidFill>
+                  <a:srgbClr val="FFFFFF"/>
                 </a:solidFill>
                 <a:latin typeface="Arial"/>
               </a:rPr>
-              <a:t>Human user</a:t>
-            </a:r>
-          </a:p>
-          <a:p>
-            <a:pPr algn="ctr"/>
-            <a:r>
-              <a:rPr sz="900" b="0" i="0">
-                <a:solidFill>
-                  <a:srgbClr val="6B7280"/>
+              <a:t>C</a:t>
+            </a:r>
+          </a:p>
+        </p:txBody>
+      </p:sp>
+      <p:sp>
+        <p:nvSpPr>
+          <p:cNvPr id="14" name="TextBox 13"/>
+          <p:cNvSpPr txBox="1"/>
+          <p:nvPr/>
+        </p:nvSpPr>
+        <p:spPr>
+          <a:xfrm>
+            <a:off x="1463040" y="4370832"/>
+            <a:ext cx="6675120" cy="365760"/>
+          </a:xfrm>
+          <a:prstGeom prst="rect">
+            <a:avLst/>
+          </a:prstGeom>
+          <a:noFill/>
+        </p:spPr>
+        <p:txBody>
+          <a:bodyPr wrap="square" anchor="t">
+            <a:spAutoFit/>
+          </a:bodyPr>
+          <a:lstStyle/>
+          <a:p>
+            <a:pPr algn="l">
+              <a:spcAft>
+                <a:spcPts val="400"/>
+              </a:spcAft>
+            </a:pPr>
+            <a:r>
+              <a:rPr sz="1500" b="1" i="0">
+                <a:solidFill>
+                  <a:srgbClr val="000000"/>
                 </a:solidFill>
                 <a:latin typeface="Arial"/>
               </a:rPr>
-              <a:t>asks in plain language</a:t>
-            </a:r>
-          </a:p>
-        </p:txBody>
-      </p:sp>
-      <p:sp>
-        <p:nvSpPr>
-          <p:cNvPr id="9" name="Rounded Rectangle 8"/>
+              <a:t>Remove the code, keep the person</a:t>
+            </a:r>
+          </a:p>
+        </p:txBody>
+      </p:sp>
+      <p:sp>
+        <p:nvSpPr>
+          <p:cNvPr id="15" name="TextBox 14"/>
+          <p:cNvSpPr txBox="1"/>
+          <p:nvPr/>
+        </p:nvSpPr>
+        <p:spPr>
+          <a:xfrm>
+            <a:off x="1463040" y="4736592"/>
+            <a:ext cx="6675120" cy="777240"/>
+          </a:xfrm>
+          <a:prstGeom prst="rect">
+            <a:avLst/>
+          </a:prstGeom>
+          <a:noFill/>
+        </p:spPr>
+        <p:txBody>
+          <a:bodyPr wrap="square" anchor="t">
+            <a:spAutoFit/>
+          </a:bodyPr>
+          <a:lstStyle/>
+          <a:p>
+            <a:pPr algn="l">
+              <a:spcAft>
+                <a:spcPts val="400"/>
+              </a:spcAft>
+            </a:pPr>
+            <a:r>
+              <a:rPr sz="1200" b="0" i="0">
+                <a:solidFill>
+                  <a:srgbClr val="000000"/>
+                </a:solidFill>
+                <a:latin typeface="Arial"/>
+              </a:rPr>
+              <a:t>Untick "Confidential emails are never forwarded outside" and delete the brief's last paragraph again. Send the trap. The forward now reaches an approval card: you are the last line. Reject it.</a:t>
+            </a:r>
+          </a:p>
+        </p:txBody>
+      </p:sp>
+      <p:sp>
+        <p:nvSpPr>
+          <p:cNvPr id="16" name="Rectangle 15"/>
           <p:cNvSpPr/>
           <p:nvPr/>
         </p:nvSpPr>
         <p:spPr>
           <a:xfrm>
-            <a:off x="548640" y="4389120"/>
-            <a:ext cx="1737360" cy="868680"/>
-          </a:xfrm>
-          <a:prstGeom prst="roundRect">
-            <a:avLst>
-              <a:gd name="adj" fmla="val 12000"/>
-            </a:avLst>
+            <a:off x="8503920" y="1371600"/>
+            <a:ext cx="3108960" cy="3017520"/>
+          </a:xfrm>
+          <a:prstGeom prst="rect">
+            <a:avLst/>
           </a:prstGeom>
           <a:solidFill>
-            <a:srgbClr val="F3F4F7"/>
+            <a:srgbClr val="EEF1F5"/>
           </a:solidFill>
-          <a:ln w="15875">
-            <a:solidFill>
-              <a:srgbClr val="6B7280"/>
-            </a:solidFill>
-            <a:prstDash val="dash"/>
+          <a:ln>
+            <a:noFill/>
           </a:ln>
           <a:effectLst/>
         </p:spPr>
@@ -10041,405 +9754,23 @@
           </a:fontRef>
         </p:style>
         <p:txBody>
-          <a:bodyPr rtlCol="0" anchor="ctr" wrap="square" lIns="54864" rIns="54864" tIns="27432" bIns="27432"/>
+          <a:bodyPr rtlCol="0" anchor="ctr"/>
           <a:lstStyle/>
           <a:p>
             <a:pPr algn="ctr"/>
-            <a:r>
-              <a:rPr sz="1200" b="1" i="0">
-                <a:solidFill>
-                  <a:srgbClr val="000000"/>
-                </a:solidFill>
-                <a:latin typeface="Arial"/>
-              </a:rPr>
-              <a:t>Working memory</a:t>
-            </a:r>
-          </a:p>
-          <a:p>
-            <a:pPr algn="ctr"/>
-            <a:r>
-              <a:rPr sz="900" b="0" i="0">
-                <a:solidFill>
-                  <a:srgbClr val="6B7280"/>
-                </a:solidFill>
-                <a:latin typeface="Arial"/>
-              </a:rPr>
-              <a:t>the brief, the last turns, every tool result · rebuilt each call</a:t>
-            </a:r>
-          </a:p>
-        </p:txBody>
-      </p:sp>
-      <p:sp>
-        <p:nvSpPr>
-          <p:cNvPr id="10" name="Rounded Rectangle 9"/>
-          <p:cNvSpPr/>
-          <p:nvPr/>
-        </p:nvSpPr>
-        <p:spPr>
-          <a:xfrm>
-            <a:off x="2743200" y="1371600"/>
-            <a:ext cx="2011680" cy="640080"/>
-          </a:xfrm>
-          <a:prstGeom prst="roundRect">
-            <a:avLst>
-              <a:gd name="adj" fmla="val 12000"/>
-            </a:avLst>
-          </a:prstGeom>
-          <a:solidFill>
-            <a:srgbClr val="E6F0F7"/>
-          </a:solidFill>
-          <a:ln w="15875">
-            <a:solidFill>
-              <a:srgbClr val="2C6C9C"/>
-            </a:solidFill>
-          </a:ln>
-          <a:effectLst/>
-        </p:spPr>
-        <p:style>
-          <a:lnRef idx="1">
-            <a:schemeClr val="accent1"/>
-          </a:lnRef>
-          <a:fillRef idx="3">
-            <a:schemeClr val="accent1"/>
-          </a:fillRef>
-          <a:effectRef idx="2">
-            <a:schemeClr val="accent1"/>
-          </a:effectRef>
-          <a:fontRef idx="minor">
-            <a:schemeClr val="lt1"/>
-          </a:fontRef>
-        </p:style>
-        <p:txBody>
-          <a:bodyPr rtlCol="0" anchor="ctr" wrap="square" lIns="54864" rIns="54864" tIns="27432" bIns="27432"/>
-          <a:lstStyle/>
-          <a:p>
-            <a:pPr algn="ctr"/>
-            <a:r>
-              <a:rPr sz="1200" b="1" i="0">
-                <a:solidFill>
-                  <a:srgbClr val="000000"/>
-                </a:solidFill>
-                <a:latin typeface="Arial"/>
-              </a:rPr>
-              <a:t>Rules engine</a:t>
-            </a:r>
-          </a:p>
-          <a:p>
-            <a:pPr algn="ctr"/>
-            <a:r>
-              <a:rPr sz="900" b="0" i="0">
-                <a:solidFill>
-                  <a:srgbClr val="6B7280"/>
-                </a:solidFill>
-                <a:latin typeface="Arial"/>
-              </a:rPr>
-              <a:t>deterministic · runs before the agents</a:t>
-            </a:r>
-          </a:p>
-        </p:txBody>
-      </p:sp>
-      <p:sp>
-        <p:nvSpPr>
-          <p:cNvPr id="11" name="Rounded Rectangle 10"/>
-          <p:cNvSpPr/>
-          <p:nvPr/>
-        </p:nvSpPr>
-        <p:spPr>
-          <a:xfrm>
-            <a:off x="2743200" y="2743200"/>
-            <a:ext cx="2011680" cy="1234440"/>
-          </a:xfrm>
-          <a:prstGeom prst="roundRect">
-            <a:avLst>
-              <a:gd name="adj" fmla="val 12000"/>
-            </a:avLst>
-          </a:prstGeom>
-          <a:solidFill>
-            <a:srgbClr val="EEEAF9"/>
-          </a:solidFill>
-          <a:ln w="15875">
-            <a:solidFill>
-              <a:srgbClr val="5E48B8"/>
-            </a:solidFill>
-          </a:ln>
-          <a:effectLst/>
-        </p:spPr>
-        <p:style>
-          <a:lnRef idx="1">
-            <a:schemeClr val="accent1"/>
-          </a:lnRef>
-          <a:fillRef idx="3">
-            <a:schemeClr val="accent1"/>
-          </a:fillRef>
-          <a:effectRef idx="2">
-            <a:schemeClr val="accent1"/>
-          </a:effectRef>
-          <a:fontRef idx="minor">
-            <a:schemeClr val="lt1"/>
-          </a:fontRef>
-        </p:style>
-        <p:txBody>
-          <a:bodyPr rtlCol="0" anchor="ctr" wrap="square" lIns="54864" rIns="54864" tIns="27432" bIns="27432"/>
-          <a:lstStyle/>
-          <a:p>
-            <a:pPr algn="ctr"/>
-            <a:r>
-              <a:rPr sz="1200" b="1" i="0">
-                <a:solidFill>
-                  <a:srgbClr val="000000"/>
-                </a:solidFill>
-                <a:latin typeface="Arial"/>
-              </a:rPr>
-              <a:t>Orchestrator agent</a:t>
-            </a:r>
-          </a:p>
-          <a:p>
-            <a:pPr algn="ctr"/>
-            <a:r>
-              <a:rPr sz="900" b="0" i="0">
-                <a:solidFill>
-                  <a:srgbClr val="6B7280"/>
-                </a:solidFill>
-                <a:latin typeface="Arial"/>
-              </a:rPr>
-              <a:t>plans, delegates, reports · own tools: stats, search, read</a:t>
-            </a:r>
-          </a:p>
-        </p:txBody>
-      </p:sp>
-      <p:cxnSp>
-        <p:nvCxnSpPr>
-          <p:cNvPr id="12" name="Connector 11"/>
-          <p:cNvCxnSpPr/>
-          <p:nvPr/>
-        </p:nvCxnSpPr>
-        <p:spPr>
-          <a:xfrm>
-            <a:off x="2304288" y="1783080"/>
-            <a:ext cx="438912" cy="1051560"/>
-          </a:xfrm>
-          <a:prstGeom prst="line">
-            <a:avLst/>
-          </a:prstGeom>
-          <a:ln w="15875">
-            <a:solidFill>
-              <a:srgbClr val="5E48B8"/>
-            </a:solidFill>
-            <a:tailEnd type="triangle"/>
-          </a:ln>
-        </p:spPr>
-        <p:style>
-          <a:lnRef idx="2">
-            <a:schemeClr val="accent1"/>
-          </a:lnRef>
-          <a:fillRef idx="0">
-            <a:schemeClr val="accent1"/>
-          </a:fillRef>
-          <a:effectRef idx="1">
-            <a:schemeClr val="accent1"/>
-          </a:effectRef>
-          <a:fontRef idx="minor">
-            <a:schemeClr val="tx1"/>
-          </a:fontRef>
-        </p:style>
-      </p:cxnSp>
-      <p:cxnSp>
-        <p:nvCxnSpPr>
-          <p:cNvPr id="13" name="Connector 12"/>
-          <p:cNvCxnSpPr/>
-          <p:nvPr/>
-        </p:nvCxnSpPr>
-        <p:spPr>
-          <a:xfrm>
-            <a:off x="2121408" y="3291840"/>
-            <a:ext cx="603504" cy="0"/>
-          </a:xfrm>
-          <a:prstGeom prst="line">
-            <a:avLst/>
-          </a:prstGeom>
-          <a:ln w="15875">
-            <a:solidFill>
-              <a:srgbClr val="5E48B8"/>
-            </a:solidFill>
-            <a:tailEnd type="triangle"/>
-          </a:ln>
-        </p:spPr>
-        <p:style>
-          <a:lnRef idx="2">
-            <a:schemeClr val="accent1"/>
-          </a:lnRef>
-          <a:fillRef idx="0">
-            <a:schemeClr val="accent1"/>
-          </a:fillRef>
-          <a:effectRef idx="1">
-            <a:schemeClr val="accent1"/>
-          </a:effectRef>
-          <a:fontRef idx="minor">
-            <a:schemeClr val="tx1"/>
-          </a:fontRef>
-        </p:style>
-      </p:cxnSp>
-      <p:sp>
-        <p:nvSpPr>
-          <p:cNvPr id="14" name="TextBox 13"/>
+          </a:p>
+        </p:txBody>
+      </p:sp>
+      <p:sp>
+        <p:nvSpPr>
+          <p:cNvPr id="17" name="TextBox 16"/>
           <p:cNvSpPr txBox="1"/>
           <p:nvPr/>
         </p:nvSpPr>
         <p:spPr>
           <a:xfrm>
-            <a:off x="2103120" y="2999232"/>
-            <a:ext cx="640080" cy="274320"/>
-          </a:xfrm>
-          <a:prstGeom prst="rect">
-            <a:avLst/>
-          </a:prstGeom>
-          <a:noFill/>
-        </p:spPr>
-        <p:txBody>
-          <a:bodyPr wrap="square" anchor="t">
-            <a:spAutoFit/>
-          </a:bodyPr>
-          <a:lstStyle/>
-          <a:p>
-            <a:pPr algn="ctr">
-              <a:spcAft>
-                <a:spcPts val="400"/>
-              </a:spcAft>
-            </a:pPr>
-            <a:r>
-              <a:rPr sz="900" b="0" i="0">
-                <a:solidFill>
-                  <a:srgbClr val="6B7280"/>
-                </a:solidFill>
-                <a:latin typeface="Arial"/>
-              </a:rPr>
-              <a:t>request</a:t>
-            </a:r>
-          </a:p>
-        </p:txBody>
-      </p:sp>
-      <p:cxnSp>
-        <p:nvCxnSpPr>
-          <p:cNvPr id="15" name="Connector 14"/>
-          <p:cNvCxnSpPr/>
-          <p:nvPr/>
-        </p:nvCxnSpPr>
-        <p:spPr>
-          <a:xfrm flipH="1">
-            <a:off x="2121408" y="3611880"/>
-            <a:ext cx="603504" cy="0"/>
-          </a:xfrm>
-          <a:prstGeom prst="line">
-            <a:avLst/>
-          </a:prstGeom>
-          <a:ln w="15875">
-            <a:solidFill>
-              <a:srgbClr val="5E48B8"/>
-            </a:solidFill>
-            <a:prstDash val="dash"/>
-            <a:tailEnd type="triangle"/>
-          </a:ln>
-        </p:spPr>
-        <p:style>
-          <a:lnRef idx="2">
-            <a:schemeClr val="accent1"/>
-          </a:lnRef>
-          <a:fillRef idx="0">
-            <a:schemeClr val="accent1"/>
-          </a:fillRef>
-          <a:effectRef idx="1">
-            <a:schemeClr val="accent1"/>
-          </a:effectRef>
-          <a:fontRef idx="minor">
-            <a:schemeClr val="tx1"/>
-          </a:fontRef>
-        </p:style>
-      </p:cxnSp>
-      <p:sp>
-        <p:nvSpPr>
-          <p:cNvPr id="16" name="TextBox 15"/>
-          <p:cNvSpPr txBox="1"/>
-          <p:nvPr/>
-        </p:nvSpPr>
-        <p:spPr>
-          <a:xfrm>
-            <a:off x="2103120" y="3657600"/>
-            <a:ext cx="640080" cy="274320"/>
-          </a:xfrm>
-          <a:prstGeom prst="rect">
-            <a:avLst/>
-          </a:prstGeom>
-          <a:noFill/>
-        </p:spPr>
-        <p:txBody>
-          <a:bodyPr wrap="square" anchor="t">
-            <a:spAutoFit/>
-          </a:bodyPr>
-          <a:lstStyle/>
-          <a:p>
-            <a:pPr algn="ctr">
-              <a:spcAft>
-                <a:spcPts val="400"/>
-              </a:spcAft>
-            </a:pPr>
-            <a:r>
-              <a:rPr sz="900" b="0" i="0">
-                <a:solidFill>
-                  <a:srgbClr val="6B7280"/>
-                </a:solidFill>
-                <a:latin typeface="Arial"/>
-              </a:rPr>
-              <a:t>reply</a:t>
-            </a:r>
-          </a:p>
-        </p:txBody>
-      </p:sp>
-      <p:cxnSp>
-        <p:nvCxnSpPr>
-          <p:cNvPr id="17" name="Connector 16"/>
-          <p:cNvCxnSpPr/>
-          <p:nvPr/>
-        </p:nvCxnSpPr>
-        <p:spPr>
-          <a:xfrm>
-            <a:off x="3749039" y="2029968"/>
-            <a:ext cx="0" cy="694944"/>
-          </a:xfrm>
-          <a:prstGeom prst="line">
-            <a:avLst/>
-          </a:prstGeom>
-          <a:ln w="15875">
-            <a:solidFill>
-              <a:srgbClr val="6B7280"/>
-            </a:solidFill>
-            <a:tailEnd type="triangle"/>
-          </a:ln>
-        </p:spPr>
-        <p:style>
-          <a:lnRef idx="2">
-            <a:schemeClr val="accent1"/>
-          </a:lnRef>
-          <a:fillRef idx="0">
-            <a:schemeClr val="accent1"/>
-          </a:fillRef>
-          <a:effectRef idx="1">
-            <a:schemeClr val="accent1"/>
-          </a:effectRef>
-          <a:fontRef idx="minor">
-            <a:schemeClr val="tx1"/>
-          </a:fontRef>
-        </p:style>
-      </p:cxnSp>
-      <p:sp>
-        <p:nvSpPr>
-          <p:cNvPr id="18" name="TextBox 17"/>
-          <p:cNvSpPr txBox="1"/>
-          <p:nvPr/>
-        </p:nvSpPr>
-        <p:spPr>
-          <a:xfrm>
-            <a:off x="3822191" y="2240280"/>
-            <a:ext cx="731520" cy="274320"/>
+            <a:off x="8686800" y="1508760"/>
+            <a:ext cx="2743200" cy="365760"/>
           </a:xfrm>
           <a:prstGeom prst="rect">
             <a:avLst/>
@@ -10458,1309 +9789,27 @@
               </a:spcAft>
             </a:pPr>
             <a:r>
-              <a:rPr sz="900" b="0" i="0">
-                <a:solidFill>
-                  <a:srgbClr val="6B7280"/>
+              <a:rPr sz="1500" b="1" i="0">
+                <a:solidFill>
+                  <a:srgbClr val="002060"/>
                 </a:solidFill>
                 <a:latin typeface="Arial"/>
               </a:rPr>
-              <a:t>labels</a:t>
-            </a:r>
-          </a:p>
-        </p:txBody>
-      </p:sp>
-      <p:cxnSp>
-        <p:nvCxnSpPr>
-          <p:cNvPr id="19" name="Connector 18"/>
-          <p:cNvCxnSpPr/>
-          <p:nvPr/>
-        </p:nvCxnSpPr>
-        <p:spPr>
-          <a:xfrm flipV="1">
-            <a:off x="2304288" y="3995928"/>
-            <a:ext cx="713232" cy="804672"/>
-          </a:xfrm>
-          <a:prstGeom prst="line">
-            <a:avLst/>
-          </a:prstGeom>
-          <a:ln w="15875">
-            <a:solidFill>
-              <a:srgbClr val="6B7280"/>
-            </a:solidFill>
-            <a:prstDash val="dash"/>
-            <a:tailEnd type="triangle"/>
-          </a:ln>
-        </p:spPr>
-        <p:style>
-          <a:lnRef idx="2">
-            <a:schemeClr val="accent1"/>
-          </a:lnRef>
-          <a:fillRef idx="0">
-            <a:schemeClr val="accent1"/>
-          </a:fillRef>
-          <a:effectRef idx="1">
-            <a:schemeClr val="accent1"/>
-          </a:effectRef>
-          <a:fontRef idx="minor">
-            <a:schemeClr val="tx1"/>
-          </a:fontRef>
-        </p:style>
-      </p:cxnSp>
-      <p:sp>
-        <p:nvSpPr>
-          <p:cNvPr id="20" name="Rounded Rectangle 19"/>
-          <p:cNvSpPr/>
-          <p:nvPr/>
-        </p:nvSpPr>
-        <p:spPr>
-          <a:xfrm>
-            <a:off x="5486400" y="1325880"/>
-            <a:ext cx="1645920" cy="685800"/>
-          </a:xfrm>
-          <a:prstGeom prst="roundRect">
-            <a:avLst>
-              <a:gd name="adj" fmla="val 12000"/>
-            </a:avLst>
-          </a:prstGeom>
-          <a:solidFill>
-            <a:srgbClr val="EEEAF9"/>
-          </a:solidFill>
-          <a:ln w="15875">
-            <a:solidFill>
-              <a:srgbClr val="5E48B8"/>
-            </a:solidFill>
-          </a:ln>
-          <a:effectLst/>
-        </p:spPr>
-        <p:style>
-          <a:lnRef idx="1">
-            <a:schemeClr val="accent1"/>
-          </a:lnRef>
-          <a:fillRef idx="3">
-            <a:schemeClr val="accent1"/>
-          </a:fillRef>
-          <a:effectRef idx="2">
-            <a:schemeClr val="accent1"/>
-          </a:effectRef>
-          <a:fontRef idx="minor">
-            <a:schemeClr val="lt1"/>
-          </a:fontRef>
-        </p:style>
-        <p:txBody>
-          <a:bodyPr rtlCol="0" anchor="ctr" wrap="square" lIns="54864" rIns="54864" tIns="27432" bIns="27432"/>
-          <a:lstStyle/>
-          <a:p>
-            <a:pPr algn="ctr"/>
-            <a:r>
-              <a:rPr sz="1200" b="1" i="0">
-                <a:solidFill>
-                  <a:srgbClr val="000000"/>
-                </a:solidFill>
-                <a:latin typeface="Arial"/>
-              </a:rPr>
-              <a:t>Triage agent</a:t>
-            </a:r>
-          </a:p>
-          <a:p>
-            <a:pPr algn="ctr"/>
-            <a:r>
-              <a:rPr sz="900" b="0" i="0">
-                <a:solidFill>
-                  <a:srgbClr val="6B7280"/>
-                </a:solidFill>
-                <a:latin typeface="Arial"/>
-              </a:rPr>
-              <a:t>labels and archives in batches</a:t>
-            </a:r>
-          </a:p>
-        </p:txBody>
-      </p:sp>
-      <p:cxnSp>
-        <p:nvCxnSpPr>
-          <p:cNvPr id="21" name="Connector 20"/>
-          <p:cNvCxnSpPr/>
-          <p:nvPr/>
-        </p:nvCxnSpPr>
-        <p:spPr>
-          <a:xfrm flipV="1">
-            <a:off x="4773168" y="1664207"/>
-            <a:ext cx="694944" cy="1673353"/>
-          </a:xfrm>
-          <a:prstGeom prst="line">
-            <a:avLst/>
-          </a:prstGeom>
-          <a:ln w="15875">
-            <a:solidFill>
-              <a:srgbClr val="5E48B8"/>
-            </a:solidFill>
-            <a:tailEnd type="triangle"/>
-          </a:ln>
-        </p:spPr>
-        <p:style>
-          <a:lnRef idx="2">
-            <a:schemeClr val="accent1"/>
-          </a:lnRef>
-          <a:fillRef idx="0">
-            <a:schemeClr val="accent1"/>
-          </a:fillRef>
-          <a:effectRef idx="1">
-            <a:schemeClr val="accent1"/>
-          </a:effectRef>
-          <a:fontRef idx="minor">
-            <a:schemeClr val="tx1"/>
-          </a:fontRef>
-        </p:style>
-      </p:cxnSp>
-      <p:sp>
-        <p:nvSpPr>
-          <p:cNvPr id="22" name="Rounded Rectangle 21"/>
-          <p:cNvSpPr/>
-          <p:nvPr/>
-        </p:nvSpPr>
-        <p:spPr>
-          <a:xfrm>
-            <a:off x="7589520" y="1097280"/>
-            <a:ext cx="1463040" cy="301752"/>
-          </a:xfrm>
-          <a:prstGeom prst="roundRect">
-            <a:avLst>
-              <a:gd name="adj" fmla="val 12000"/>
-            </a:avLst>
-          </a:prstGeom>
-          <a:solidFill>
-            <a:srgbClr val="E6F0F7"/>
-          </a:solidFill>
-          <a:ln w="15875">
-            <a:solidFill>
-              <a:srgbClr val="2C6C9C"/>
-            </a:solidFill>
-          </a:ln>
-          <a:effectLst/>
-        </p:spPr>
-        <p:style>
-          <a:lnRef idx="1">
-            <a:schemeClr val="accent1"/>
-          </a:lnRef>
-          <a:fillRef idx="3">
-            <a:schemeClr val="accent1"/>
-          </a:fillRef>
-          <a:effectRef idx="2">
-            <a:schemeClr val="accent1"/>
-          </a:effectRef>
-          <a:fontRef idx="minor">
-            <a:schemeClr val="lt1"/>
-          </a:fontRef>
-        </p:style>
-        <p:txBody>
-          <a:bodyPr rtlCol="0" anchor="ctr" wrap="square" lIns="54864" rIns="54864" tIns="27432" bIns="27432"/>
-          <a:lstStyle/>
-          <a:p>
-            <a:pPr algn="ctr"/>
-            <a:r>
-              <a:rPr sz="1000" b="0" i="0">
-                <a:solidFill>
-                  <a:srgbClr val="000000"/>
-                </a:solidFill>
-                <a:latin typeface="Courier New"/>
-              </a:rPr>
-              <a:t>search_inbox</a:t>
-            </a:r>
-          </a:p>
-        </p:txBody>
-      </p:sp>
-      <p:cxnSp>
-        <p:nvCxnSpPr>
-          <p:cNvPr id="23" name="Connector 22"/>
-          <p:cNvCxnSpPr/>
-          <p:nvPr/>
-        </p:nvCxnSpPr>
-        <p:spPr>
-          <a:xfrm flipV="1">
-            <a:off x="7150608" y="1243584"/>
-            <a:ext cx="420623" cy="420623"/>
-          </a:xfrm>
-          <a:prstGeom prst="line">
-            <a:avLst/>
-          </a:prstGeom>
-          <a:ln w="15875">
-            <a:solidFill>
-              <a:srgbClr val="6B7280"/>
-            </a:solidFill>
-            <a:tailEnd type="triangle"/>
-          </a:ln>
-        </p:spPr>
-        <p:style>
-          <a:lnRef idx="2">
-            <a:schemeClr val="accent1"/>
-          </a:lnRef>
-          <a:fillRef idx="0">
-            <a:schemeClr val="accent1"/>
-          </a:fillRef>
-          <a:effectRef idx="1">
-            <a:schemeClr val="accent1"/>
-          </a:effectRef>
-          <a:fontRef idx="minor">
-            <a:schemeClr val="tx1"/>
-          </a:fontRef>
-        </p:style>
-      </p:cxnSp>
-      <p:sp>
-        <p:nvSpPr>
-          <p:cNvPr id="24" name="Rounded Rectangle 23"/>
-          <p:cNvSpPr/>
-          <p:nvPr/>
-        </p:nvSpPr>
-        <p:spPr>
-          <a:xfrm>
-            <a:off x="7589520" y="1463040"/>
-            <a:ext cx="1463040" cy="301752"/>
-          </a:xfrm>
-          <a:prstGeom prst="roundRect">
-            <a:avLst>
-              <a:gd name="adj" fmla="val 12000"/>
-            </a:avLst>
-          </a:prstGeom>
-          <a:solidFill>
-            <a:srgbClr val="E6F0F7"/>
-          </a:solidFill>
-          <a:ln w="15875">
-            <a:solidFill>
-              <a:srgbClr val="2C6C9C"/>
-            </a:solidFill>
-          </a:ln>
-          <a:effectLst/>
-        </p:spPr>
-        <p:style>
-          <a:lnRef idx="1">
-            <a:schemeClr val="accent1"/>
-          </a:lnRef>
-          <a:fillRef idx="3">
-            <a:schemeClr val="accent1"/>
-          </a:fillRef>
-          <a:effectRef idx="2">
-            <a:schemeClr val="accent1"/>
-          </a:effectRef>
-          <a:fontRef idx="minor">
-            <a:schemeClr val="lt1"/>
-          </a:fontRef>
-        </p:style>
-        <p:txBody>
-          <a:bodyPr rtlCol="0" anchor="ctr" wrap="square" lIns="54864" rIns="54864" tIns="27432" bIns="27432"/>
-          <a:lstStyle/>
-          <a:p>
-            <a:pPr algn="ctr"/>
-            <a:r>
-              <a:rPr sz="1000" b="0" i="0">
-                <a:solidFill>
-                  <a:srgbClr val="000000"/>
-                </a:solidFill>
-                <a:latin typeface="Courier New"/>
-              </a:rPr>
-              <a:t>read_email</a:t>
-            </a:r>
-          </a:p>
-        </p:txBody>
-      </p:sp>
-      <p:cxnSp>
-        <p:nvCxnSpPr>
-          <p:cNvPr id="25" name="Connector 24"/>
-          <p:cNvCxnSpPr/>
-          <p:nvPr/>
-        </p:nvCxnSpPr>
-        <p:spPr>
-          <a:xfrm flipV="1">
-            <a:off x="7150608" y="1609344"/>
-            <a:ext cx="420623" cy="54863"/>
-          </a:xfrm>
-          <a:prstGeom prst="line">
-            <a:avLst/>
-          </a:prstGeom>
-          <a:ln w="15875">
-            <a:solidFill>
-              <a:srgbClr val="6B7280"/>
-            </a:solidFill>
-            <a:tailEnd type="triangle"/>
-          </a:ln>
-        </p:spPr>
-        <p:style>
-          <a:lnRef idx="2">
-            <a:schemeClr val="accent1"/>
-          </a:lnRef>
-          <a:fillRef idx="0">
-            <a:schemeClr val="accent1"/>
-          </a:fillRef>
-          <a:effectRef idx="1">
-            <a:schemeClr val="accent1"/>
-          </a:effectRef>
-          <a:fontRef idx="minor">
-            <a:schemeClr val="tx1"/>
-          </a:fontRef>
-        </p:style>
-      </p:cxnSp>
-      <p:sp>
-        <p:nvSpPr>
-          <p:cNvPr id="26" name="Rounded Rectangle 25"/>
-          <p:cNvSpPr/>
-          <p:nvPr/>
-        </p:nvSpPr>
-        <p:spPr>
-          <a:xfrm>
-            <a:off x="7589520" y="1828800"/>
-            <a:ext cx="1463040" cy="301752"/>
-          </a:xfrm>
-          <a:prstGeom prst="roundRect">
-            <a:avLst>
-              <a:gd name="adj" fmla="val 12000"/>
-            </a:avLst>
-          </a:prstGeom>
-          <a:solidFill>
-            <a:srgbClr val="E6F0F7"/>
-          </a:solidFill>
-          <a:ln w="15875">
-            <a:solidFill>
-              <a:srgbClr val="2C6C9C"/>
-            </a:solidFill>
-          </a:ln>
-          <a:effectLst/>
-        </p:spPr>
-        <p:style>
-          <a:lnRef idx="1">
-            <a:schemeClr val="accent1"/>
-          </a:lnRef>
-          <a:fillRef idx="3">
-            <a:schemeClr val="accent1"/>
-          </a:fillRef>
-          <a:effectRef idx="2">
-            <a:schemeClr val="accent1"/>
-          </a:effectRef>
-          <a:fontRef idx="minor">
-            <a:schemeClr val="lt1"/>
-          </a:fontRef>
-        </p:style>
-        <p:txBody>
-          <a:bodyPr rtlCol="0" anchor="ctr" wrap="square" lIns="54864" rIns="54864" tIns="27432" bIns="27432"/>
-          <a:lstStyle/>
-          <a:p>
-            <a:pPr algn="ctr"/>
-            <a:r>
-              <a:rPr sz="1000" b="0" i="0">
-                <a:solidFill>
-                  <a:srgbClr val="000000"/>
-                </a:solidFill>
-                <a:latin typeface="Courier New"/>
-              </a:rPr>
-              <a:t>label_emails</a:t>
-            </a:r>
-          </a:p>
-        </p:txBody>
-      </p:sp>
-      <p:cxnSp>
-        <p:nvCxnSpPr>
-          <p:cNvPr id="27" name="Connector 26"/>
-          <p:cNvCxnSpPr/>
-          <p:nvPr/>
-        </p:nvCxnSpPr>
-        <p:spPr>
-          <a:xfrm>
-            <a:off x="7150608" y="1664207"/>
-            <a:ext cx="420623" cy="310897"/>
-          </a:xfrm>
-          <a:prstGeom prst="line">
-            <a:avLst/>
-          </a:prstGeom>
-          <a:ln w="15875">
-            <a:solidFill>
-              <a:srgbClr val="6B7280"/>
-            </a:solidFill>
-            <a:tailEnd type="triangle"/>
-          </a:ln>
-        </p:spPr>
-        <p:style>
-          <a:lnRef idx="2">
-            <a:schemeClr val="accent1"/>
-          </a:lnRef>
-          <a:fillRef idx="0">
-            <a:schemeClr val="accent1"/>
-          </a:fillRef>
-          <a:effectRef idx="1">
-            <a:schemeClr val="accent1"/>
-          </a:effectRef>
-          <a:fontRef idx="minor">
-            <a:schemeClr val="tx1"/>
-          </a:fontRef>
-        </p:style>
-      </p:cxnSp>
-      <p:sp>
-        <p:nvSpPr>
-          <p:cNvPr id="28" name="Rounded Rectangle 27"/>
-          <p:cNvSpPr/>
-          <p:nvPr/>
-        </p:nvSpPr>
-        <p:spPr>
-          <a:xfrm>
-            <a:off x="7589520" y="2194560"/>
-            <a:ext cx="1463040" cy="301752"/>
-          </a:xfrm>
-          <a:prstGeom prst="roundRect">
-            <a:avLst>
-              <a:gd name="adj" fmla="val 12000"/>
-            </a:avLst>
-          </a:prstGeom>
-          <a:solidFill>
-            <a:srgbClr val="E6F0F7"/>
-          </a:solidFill>
-          <a:ln w="15875">
-            <a:solidFill>
-              <a:srgbClr val="2C6C9C"/>
-            </a:solidFill>
-          </a:ln>
-          <a:effectLst/>
-        </p:spPr>
-        <p:style>
-          <a:lnRef idx="1">
-            <a:schemeClr val="accent1"/>
-          </a:lnRef>
-          <a:fillRef idx="3">
-            <a:schemeClr val="accent1"/>
-          </a:fillRef>
-          <a:effectRef idx="2">
-            <a:schemeClr val="accent1"/>
-          </a:effectRef>
-          <a:fontRef idx="minor">
-            <a:schemeClr val="lt1"/>
-          </a:fontRef>
-        </p:style>
-        <p:txBody>
-          <a:bodyPr rtlCol="0" anchor="ctr" wrap="square" lIns="54864" rIns="54864" tIns="27432" bIns="27432"/>
-          <a:lstStyle/>
-          <a:p>
-            <a:pPr algn="ctr"/>
-            <a:r>
-              <a:rPr sz="1000" b="0" i="0">
-                <a:solidFill>
-                  <a:srgbClr val="000000"/>
-                </a:solidFill>
-                <a:latin typeface="Courier New"/>
-              </a:rPr>
-              <a:t>archive_emails</a:t>
-            </a:r>
-          </a:p>
-        </p:txBody>
-      </p:sp>
-      <p:cxnSp>
-        <p:nvCxnSpPr>
-          <p:cNvPr id="29" name="Connector 28"/>
-          <p:cNvCxnSpPr/>
-          <p:nvPr/>
-        </p:nvCxnSpPr>
-        <p:spPr>
-          <a:xfrm>
-            <a:off x="7150608" y="1664207"/>
-            <a:ext cx="420623" cy="676657"/>
-          </a:xfrm>
-          <a:prstGeom prst="line">
-            <a:avLst/>
-          </a:prstGeom>
-          <a:ln w="15875">
-            <a:solidFill>
-              <a:srgbClr val="6B7280"/>
-            </a:solidFill>
-            <a:tailEnd type="triangle"/>
-          </a:ln>
-        </p:spPr>
-        <p:style>
-          <a:lnRef idx="2">
-            <a:schemeClr val="accent1"/>
-          </a:lnRef>
-          <a:fillRef idx="0">
-            <a:schemeClr val="accent1"/>
-          </a:fillRef>
-          <a:effectRef idx="1">
-            <a:schemeClr val="accent1"/>
-          </a:effectRef>
-          <a:fontRef idx="minor">
-            <a:schemeClr val="tx1"/>
-          </a:fontRef>
-        </p:style>
-      </p:cxnSp>
-      <p:sp>
-        <p:nvSpPr>
-          <p:cNvPr id="30" name="Rounded Rectangle 29"/>
-          <p:cNvSpPr/>
-          <p:nvPr/>
-        </p:nvSpPr>
-        <p:spPr>
-          <a:xfrm>
-            <a:off x="5486400" y="3017520"/>
-            <a:ext cx="1645920" cy="685800"/>
-          </a:xfrm>
-          <a:prstGeom prst="roundRect">
-            <a:avLst>
-              <a:gd name="adj" fmla="val 12000"/>
-            </a:avLst>
-          </a:prstGeom>
-          <a:solidFill>
-            <a:srgbClr val="EEEAF9"/>
-          </a:solidFill>
-          <a:ln w="15875">
-            <a:solidFill>
-              <a:srgbClr val="5E48B8"/>
-            </a:solidFill>
-          </a:ln>
-          <a:effectLst/>
-        </p:spPr>
-        <p:style>
-          <a:lnRef idx="1">
-            <a:schemeClr val="accent1"/>
-          </a:lnRef>
-          <a:fillRef idx="3">
-            <a:schemeClr val="accent1"/>
-          </a:fillRef>
-          <a:effectRef idx="2">
-            <a:schemeClr val="accent1"/>
-          </a:effectRef>
-          <a:fontRef idx="minor">
-            <a:schemeClr val="lt1"/>
-          </a:fontRef>
-        </p:style>
-        <p:txBody>
-          <a:bodyPr rtlCol="0" anchor="ctr" wrap="square" lIns="54864" rIns="54864" tIns="27432" bIns="27432"/>
-          <a:lstStyle/>
-          <a:p>
-            <a:pPr algn="ctr"/>
-            <a:r>
-              <a:rPr sz="1200" b="1" i="0">
-                <a:solidFill>
-                  <a:srgbClr val="000000"/>
-                </a:solidFill>
-                <a:latin typeface="Arial"/>
-              </a:rPr>
-              <a:t>Deadline agent</a:t>
-            </a:r>
-          </a:p>
-          <a:p>
-            <a:pPr algn="ctr"/>
-            <a:r>
-              <a:rPr sz="900" b="0" i="0">
-                <a:solidFill>
-                  <a:srgbClr val="6B7280"/>
-                </a:solidFill>
-                <a:latin typeface="Arial"/>
-              </a:rPr>
-              <a:t>finds dates, creates tasks</a:t>
-            </a:r>
-          </a:p>
-        </p:txBody>
-      </p:sp>
-      <p:cxnSp>
-        <p:nvCxnSpPr>
-          <p:cNvPr id="31" name="Connector 30"/>
-          <p:cNvCxnSpPr/>
-          <p:nvPr/>
-        </p:nvCxnSpPr>
-        <p:spPr>
-          <a:xfrm>
-            <a:off x="4773168" y="3337560"/>
-            <a:ext cx="694944" cy="18288"/>
-          </a:xfrm>
-          <a:prstGeom prst="line">
-            <a:avLst/>
-          </a:prstGeom>
-          <a:ln w="15875">
-            <a:solidFill>
-              <a:srgbClr val="5E48B8"/>
-            </a:solidFill>
-            <a:tailEnd type="triangle"/>
-          </a:ln>
-        </p:spPr>
-        <p:style>
-          <a:lnRef idx="2">
-            <a:schemeClr val="accent1"/>
-          </a:lnRef>
-          <a:fillRef idx="0">
-            <a:schemeClr val="accent1"/>
-          </a:fillRef>
-          <a:effectRef idx="1">
-            <a:schemeClr val="accent1"/>
-          </a:effectRef>
-          <a:fontRef idx="minor">
-            <a:schemeClr val="tx1"/>
-          </a:fontRef>
-        </p:style>
-      </p:cxnSp>
-      <p:sp>
-        <p:nvSpPr>
-          <p:cNvPr id="32" name="Rounded Rectangle 31"/>
-          <p:cNvSpPr/>
-          <p:nvPr/>
-        </p:nvSpPr>
-        <p:spPr>
-          <a:xfrm>
-            <a:off x="7589520" y="2788920"/>
-            <a:ext cx="1463040" cy="301752"/>
-          </a:xfrm>
-          <a:prstGeom prst="roundRect">
-            <a:avLst>
-              <a:gd name="adj" fmla="val 12000"/>
-            </a:avLst>
-          </a:prstGeom>
-          <a:solidFill>
-            <a:srgbClr val="E6F0F7"/>
-          </a:solidFill>
-          <a:ln w="15875">
-            <a:solidFill>
-              <a:srgbClr val="2C6C9C"/>
-            </a:solidFill>
-          </a:ln>
-          <a:effectLst/>
-        </p:spPr>
-        <p:style>
-          <a:lnRef idx="1">
-            <a:schemeClr val="accent1"/>
-          </a:lnRef>
-          <a:fillRef idx="3">
-            <a:schemeClr val="accent1"/>
-          </a:fillRef>
-          <a:effectRef idx="2">
-            <a:schemeClr val="accent1"/>
-          </a:effectRef>
-          <a:fontRef idx="minor">
-            <a:schemeClr val="lt1"/>
-          </a:fontRef>
-        </p:style>
-        <p:txBody>
-          <a:bodyPr rtlCol="0" anchor="ctr" wrap="square" lIns="54864" rIns="54864" tIns="27432" bIns="27432"/>
-          <a:lstStyle/>
-          <a:p>
-            <a:pPr algn="ctr"/>
-            <a:r>
-              <a:rPr sz="1000" b="0" i="0">
-                <a:solidFill>
-                  <a:srgbClr val="000000"/>
-                </a:solidFill>
-                <a:latin typeface="Courier New"/>
-              </a:rPr>
-              <a:t>search_inbox</a:t>
-            </a:r>
-          </a:p>
-        </p:txBody>
-      </p:sp>
-      <p:cxnSp>
-        <p:nvCxnSpPr>
-          <p:cNvPr id="33" name="Connector 32"/>
-          <p:cNvCxnSpPr/>
-          <p:nvPr/>
-        </p:nvCxnSpPr>
-        <p:spPr>
-          <a:xfrm flipV="1">
-            <a:off x="7150608" y="2935224"/>
-            <a:ext cx="420623" cy="420624"/>
-          </a:xfrm>
-          <a:prstGeom prst="line">
-            <a:avLst/>
-          </a:prstGeom>
-          <a:ln w="15875">
-            <a:solidFill>
-              <a:srgbClr val="6B7280"/>
-            </a:solidFill>
-            <a:tailEnd type="triangle"/>
-          </a:ln>
-        </p:spPr>
-        <p:style>
-          <a:lnRef idx="2">
-            <a:schemeClr val="accent1"/>
-          </a:lnRef>
-          <a:fillRef idx="0">
-            <a:schemeClr val="accent1"/>
-          </a:fillRef>
-          <a:effectRef idx="1">
-            <a:schemeClr val="accent1"/>
-          </a:effectRef>
-          <a:fontRef idx="minor">
-            <a:schemeClr val="tx1"/>
-          </a:fontRef>
-        </p:style>
-      </p:cxnSp>
-      <p:sp>
-        <p:nvSpPr>
-          <p:cNvPr id="34" name="Rounded Rectangle 33"/>
-          <p:cNvSpPr/>
-          <p:nvPr/>
-        </p:nvSpPr>
-        <p:spPr>
-          <a:xfrm>
-            <a:off x="7589520" y="3154679"/>
-            <a:ext cx="1463040" cy="301752"/>
-          </a:xfrm>
-          <a:prstGeom prst="roundRect">
-            <a:avLst>
-              <a:gd name="adj" fmla="val 12000"/>
-            </a:avLst>
-          </a:prstGeom>
-          <a:solidFill>
-            <a:srgbClr val="E6F0F7"/>
-          </a:solidFill>
-          <a:ln w="15875">
-            <a:solidFill>
-              <a:srgbClr val="2C6C9C"/>
-            </a:solidFill>
-          </a:ln>
-          <a:effectLst/>
-        </p:spPr>
-        <p:style>
-          <a:lnRef idx="1">
-            <a:schemeClr val="accent1"/>
-          </a:lnRef>
-          <a:fillRef idx="3">
-            <a:schemeClr val="accent1"/>
-          </a:fillRef>
-          <a:effectRef idx="2">
-            <a:schemeClr val="accent1"/>
-          </a:effectRef>
-          <a:fontRef idx="minor">
-            <a:schemeClr val="lt1"/>
-          </a:fontRef>
-        </p:style>
-        <p:txBody>
-          <a:bodyPr rtlCol="0" anchor="ctr" wrap="square" lIns="54864" rIns="54864" tIns="27432" bIns="27432"/>
-          <a:lstStyle/>
-          <a:p>
-            <a:pPr algn="ctr"/>
-            <a:r>
-              <a:rPr sz="1000" b="0" i="0">
-                <a:solidFill>
-                  <a:srgbClr val="000000"/>
-                </a:solidFill>
-                <a:latin typeface="Courier New"/>
-              </a:rPr>
-              <a:t>read_email</a:t>
-            </a:r>
-          </a:p>
-        </p:txBody>
-      </p:sp>
-      <p:cxnSp>
-        <p:nvCxnSpPr>
-          <p:cNvPr id="35" name="Connector 34"/>
-          <p:cNvCxnSpPr/>
-          <p:nvPr/>
-        </p:nvCxnSpPr>
-        <p:spPr>
-          <a:xfrm flipV="1">
-            <a:off x="7150608" y="3300984"/>
-            <a:ext cx="420623" cy="54864"/>
-          </a:xfrm>
-          <a:prstGeom prst="line">
-            <a:avLst/>
-          </a:prstGeom>
-          <a:ln w="15875">
-            <a:solidFill>
-              <a:srgbClr val="6B7280"/>
-            </a:solidFill>
-            <a:tailEnd type="triangle"/>
-          </a:ln>
-        </p:spPr>
-        <p:style>
-          <a:lnRef idx="2">
-            <a:schemeClr val="accent1"/>
-          </a:lnRef>
-          <a:fillRef idx="0">
-            <a:schemeClr val="accent1"/>
-          </a:fillRef>
-          <a:effectRef idx="1">
-            <a:schemeClr val="accent1"/>
-          </a:effectRef>
-          <a:fontRef idx="minor">
-            <a:schemeClr val="tx1"/>
-          </a:fontRef>
-        </p:style>
-      </p:cxnSp>
-      <p:sp>
-        <p:nvSpPr>
-          <p:cNvPr id="36" name="Rounded Rectangle 35"/>
-          <p:cNvSpPr/>
-          <p:nvPr/>
-        </p:nvSpPr>
-        <p:spPr>
-          <a:xfrm>
-            <a:off x="7589520" y="3520439"/>
-            <a:ext cx="1463040" cy="301752"/>
-          </a:xfrm>
-          <a:prstGeom prst="roundRect">
-            <a:avLst>
-              <a:gd name="adj" fmla="val 12000"/>
-            </a:avLst>
-          </a:prstGeom>
-          <a:solidFill>
-            <a:srgbClr val="E6F0F7"/>
-          </a:solidFill>
-          <a:ln w="15875">
-            <a:solidFill>
-              <a:srgbClr val="2C6C9C"/>
-            </a:solidFill>
-          </a:ln>
-          <a:effectLst/>
-        </p:spPr>
-        <p:style>
-          <a:lnRef idx="1">
-            <a:schemeClr val="accent1"/>
-          </a:lnRef>
-          <a:fillRef idx="3">
-            <a:schemeClr val="accent1"/>
-          </a:fillRef>
-          <a:effectRef idx="2">
-            <a:schemeClr val="accent1"/>
-          </a:effectRef>
-          <a:fontRef idx="minor">
-            <a:schemeClr val="lt1"/>
-          </a:fontRef>
-        </p:style>
-        <p:txBody>
-          <a:bodyPr rtlCol="0" anchor="ctr" wrap="square" lIns="54864" rIns="54864" tIns="27432" bIns="27432"/>
-          <a:lstStyle/>
-          <a:p>
-            <a:pPr algn="ctr"/>
-            <a:r>
-              <a:rPr sz="1000" b="0" i="0">
-                <a:solidFill>
-                  <a:srgbClr val="000000"/>
-                </a:solidFill>
-                <a:latin typeface="Courier New"/>
-              </a:rPr>
-              <a:t>create_task</a:t>
-            </a:r>
-          </a:p>
-        </p:txBody>
-      </p:sp>
-      <p:cxnSp>
-        <p:nvCxnSpPr>
-          <p:cNvPr id="37" name="Connector 36"/>
-          <p:cNvCxnSpPr/>
-          <p:nvPr/>
-        </p:nvCxnSpPr>
-        <p:spPr>
-          <a:xfrm>
-            <a:off x="7150608" y="3355848"/>
-            <a:ext cx="420623" cy="310896"/>
-          </a:xfrm>
-          <a:prstGeom prst="line">
-            <a:avLst/>
-          </a:prstGeom>
-          <a:ln w="15875">
-            <a:solidFill>
-              <a:srgbClr val="6B7280"/>
-            </a:solidFill>
-            <a:tailEnd type="triangle"/>
-          </a:ln>
-        </p:spPr>
-        <p:style>
-          <a:lnRef idx="2">
-            <a:schemeClr val="accent1"/>
-          </a:lnRef>
-          <a:fillRef idx="0">
-            <a:schemeClr val="accent1"/>
-          </a:fillRef>
-          <a:effectRef idx="1">
-            <a:schemeClr val="accent1"/>
-          </a:effectRef>
-          <a:fontRef idx="minor">
-            <a:schemeClr val="tx1"/>
-          </a:fontRef>
-        </p:style>
-      </p:cxnSp>
-      <p:sp>
-        <p:nvSpPr>
-          <p:cNvPr id="38" name="Rounded Rectangle 37"/>
-          <p:cNvSpPr/>
-          <p:nvPr/>
-        </p:nvSpPr>
-        <p:spPr>
-          <a:xfrm>
-            <a:off x="5486400" y="4572000"/>
-            <a:ext cx="1645920" cy="685800"/>
-          </a:xfrm>
-          <a:prstGeom prst="roundRect">
-            <a:avLst>
-              <a:gd name="adj" fmla="val 12000"/>
-            </a:avLst>
-          </a:prstGeom>
-          <a:solidFill>
-            <a:srgbClr val="EEEAF9"/>
-          </a:solidFill>
-          <a:ln w="15875">
-            <a:solidFill>
-              <a:srgbClr val="5E48B8"/>
-            </a:solidFill>
-          </a:ln>
-          <a:effectLst/>
-        </p:spPr>
-        <p:style>
-          <a:lnRef idx="1">
-            <a:schemeClr val="accent1"/>
-          </a:lnRef>
-          <a:fillRef idx="3">
-            <a:schemeClr val="accent1"/>
-          </a:fillRef>
-          <a:effectRef idx="2">
-            <a:schemeClr val="accent1"/>
-          </a:effectRef>
-          <a:fontRef idx="minor">
-            <a:schemeClr val="lt1"/>
-          </a:fontRef>
-        </p:style>
-        <p:txBody>
-          <a:bodyPr rtlCol="0" anchor="ctr" wrap="square" lIns="54864" rIns="54864" tIns="27432" bIns="27432"/>
-          <a:lstStyle/>
-          <a:p>
-            <a:pPr algn="ctr"/>
-            <a:r>
-              <a:rPr sz="1200" b="1" i="0">
-                <a:solidFill>
-                  <a:srgbClr val="000000"/>
-                </a:solidFill>
-                <a:latin typeface="Arial"/>
-              </a:rPr>
-              <a:t>Reply agent</a:t>
-            </a:r>
-          </a:p>
-          <a:p>
-            <a:pPr algn="ctr"/>
-            <a:r>
-              <a:rPr sz="900" b="0" i="0">
-                <a:solidFill>
-                  <a:srgbClr val="6B7280"/>
-                </a:solidFill>
-                <a:latin typeface="Arial"/>
-              </a:rPr>
-              <a:t>drafts replies and forwards</a:t>
-            </a:r>
-          </a:p>
-        </p:txBody>
-      </p:sp>
-      <p:cxnSp>
-        <p:nvCxnSpPr>
-          <p:cNvPr id="39" name="Connector 38"/>
-          <p:cNvCxnSpPr/>
-          <p:nvPr/>
-        </p:nvCxnSpPr>
-        <p:spPr>
-          <a:xfrm>
-            <a:off x="4773168" y="3337560"/>
-            <a:ext cx="694944" cy="1572768"/>
-          </a:xfrm>
-          <a:prstGeom prst="line">
-            <a:avLst/>
-          </a:prstGeom>
-          <a:ln w="15875">
-            <a:solidFill>
-              <a:srgbClr val="5E48B8"/>
-            </a:solidFill>
-            <a:tailEnd type="triangle"/>
-          </a:ln>
-        </p:spPr>
-        <p:style>
-          <a:lnRef idx="2">
-            <a:schemeClr val="accent1"/>
-          </a:lnRef>
-          <a:fillRef idx="0">
-            <a:schemeClr val="accent1"/>
-          </a:fillRef>
-          <a:effectRef idx="1">
-            <a:schemeClr val="accent1"/>
-          </a:effectRef>
-          <a:fontRef idx="minor">
-            <a:schemeClr val="tx1"/>
-          </a:fontRef>
-        </p:style>
-      </p:cxnSp>
-      <p:sp>
-        <p:nvSpPr>
-          <p:cNvPr id="40" name="Rounded Rectangle 39"/>
-          <p:cNvSpPr/>
-          <p:nvPr/>
-        </p:nvSpPr>
-        <p:spPr>
-          <a:xfrm>
-            <a:off x="7589520" y="4343400"/>
-            <a:ext cx="1463040" cy="301752"/>
-          </a:xfrm>
-          <a:prstGeom prst="roundRect">
-            <a:avLst>
-              <a:gd name="adj" fmla="val 12000"/>
-            </a:avLst>
-          </a:prstGeom>
-          <a:solidFill>
-            <a:srgbClr val="E6F0F7"/>
-          </a:solidFill>
-          <a:ln w="15875">
-            <a:solidFill>
-              <a:srgbClr val="2C6C9C"/>
-            </a:solidFill>
-          </a:ln>
-          <a:effectLst/>
-        </p:spPr>
-        <p:style>
-          <a:lnRef idx="1">
-            <a:schemeClr val="accent1"/>
-          </a:lnRef>
-          <a:fillRef idx="3">
-            <a:schemeClr val="accent1"/>
-          </a:fillRef>
-          <a:effectRef idx="2">
-            <a:schemeClr val="accent1"/>
-          </a:effectRef>
-          <a:fontRef idx="minor">
-            <a:schemeClr val="lt1"/>
-          </a:fontRef>
-        </p:style>
-        <p:txBody>
-          <a:bodyPr rtlCol="0" anchor="ctr" wrap="square" lIns="54864" rIns="54864" tIns="27432" bIns="27432"/>
-          <a:lstStyle/>
-          <a:p>
-            <a:pPr algn="ctr"/>
-            <a:r>
-              <a:rPr sz="1000" b="0" i="0">
-                <a:solidFill>
-                  <a:srgbClr val="000000"/>
-                </a:solidFill>
-                <a:latin typeface="Courier New"/>
-              </a:rPr>
-              <a:t>read_email</a:t>
-            </a:r>
-          </a:p>
-        </p:txBody>
-      </p:sp>
-      <p:cxnSp>
-        <p:nvCxnSpPr>
-          <p:cNvPr id="41" name="Connector 40"/>
-          <p:cNvCxnSpPr/>
-          <p:nvPr/>
-        </p:nvCxnSpPr>
-        <p:spPr>
-          <a:xfrm flipV="1">
-            <a:off x="7150608" y="4489704"/>
-            <a:ext cx="420623" cy="420624"/>
-          </a:xfrm>
-          <a:prstGeom prst="line">
-            <a:avLst/>
-          </a:prstGeom>
-          <a:ln w="15875">
-            <a:solidFill>
-              <a:srgbClr val="6B7280"/>
-            </a:solidFill>
-            <a:tailEnd type="triangle"/>
-          </a:ln>
-        </p:spPr>
-        <p:style>
-          <a:lnRef idx="2">
-            <a:schemeClr val="accent1"/>
-          </a:lnRef>
-          <a:fillRef idx="0">
-            <a:schemeClr val="accent1"/>
-          </a:fillRef>
-          <a:effectRef idx="1">
-            <a:schemeClr val="accent1"/>
-          </a:effectRef>
-          <a:fontRef idx="minor">
-            <a:schemeClr val="tx1"/>
-          </a:fontRef>
-        </p:style>
-      </p:cxnSp>
-      <p:sp>
-        <p:nvSpPr>
-          <p:cNvPr id="42" name="Rounded Rectangle 41"/>
-          <p:cNvSpPr/>
-          <p:nvPr/>
-        </p:nvSpPr>
-        <p:spPr>
-          <a:xfrm>
-            <a:off x="7589520" y="4709160"/>
-            <a:ext cx="1463040" cy="301752"/>
-          </a:xfrm>
-          <a:prstGeom prst="roundRect">
-            <a:avLst>
-              <a:gd name="adj" fmla="val 12000"/>
-            </a:avLst>
-          </a:prstGeom>
-          <a:solidFill>
-            <a:srgbClr val="E6F0F7"/>
-          </a:solidFill>
-          <a:ln w="15875">
-            <a:solidFill>
-              <a:srgbClr val="2C6C9C"/>
-            </a:solidFill>
-          </a:ln>
-          <a:effectLst/>
-        </p:spPr>
-        <p:style>
-          <a:lnRef idx="1">
-            <a:schemeClr val="accent1"/>
-          </a:lnRef>
-          <a:fillRef idx="3">
-            <a:schemeClr val="accent1"/>
-          </a:fillRef>
-          <a:effectRef idx="2">
-            <a:schemeClr val="accent1"/>
-          </a:effectRef>
-          <a:fontRef idx="minor">
-            <a:schemeClr val="lt1"/>
-          </a:fontRef>
-        </p:style>
-        <p:txBody>
-          <a:bodyPr rtlCol="0" anchor="ctr" wrap="square" lIns="54864" rIns="54864" tIns="27432" bIns="27432"/>
-          <a:lstStyle/>
-          <a:p>
-            <a:pPr algn="ctr"/>
-            <a:r>
-              <a:rPr sz="1000" b="0" i="0">
-                <a:solidFill>
-                  <a:srgbClr val="000000"/>
-                </a:solidFill>
-                <a:latin typeface="Courier New"/>
-              </a:rPr>
-              <a:t>draft_reply</a:t>
-            </a:r>
-          </a:p>
-        </p:txBody>
-      </p:sp>
-      <p:cxnSp>
-        <p:nvCxnSpPr>
-          <p:cNvPr id="43" name="Connector 42"/>
-          <p:cNvCxnSpPr/>
-          <p:nvPr/>
-        </p:nvCxnSpPr>
-        <p:spPr>
-          <a:xfrm flipV="1">
-            <a:off x="7150608" y="4855464"/>
-            <a:ext cx="420623" cy="54864"/>
-          </a:xfrm>
-          <a:prstGeom prst="line">
-            <a:avLst/>
-          </a:prstGeom>
-          <a:ln w="15875">
-            <a:solidFill>
-              <a:srgbClr val="6B7280"/>
-            </a:solidFill>
-            <a:tailEnd type="triangle"/>
-          </a:ln>
-        </p:spPr>
-        <p:style>
-          <a:lnRef idx="2">
-            <a:schemeClr val="accent1"/>
-          </a:lnRef>
-          <a:fillRef idx="0">
-            <a:schemeClr val="accent1"/>
-          </a:fillRef>
-          <a:effectRef idx="1">
-            <a:schemeClr val="accent1"/>
-          </a:effectRef>
-          <a:fontRef idx="minor">
-            <a:schemeClr val="tx1"/>
-          </a:fontRef>
-        </p:style>
-      </p:cxnSp>
-      <p:sp>
-        <p:nvSpPr>
-          <p:cNvPr id="44" name="Rounded Rectangle 43"/>
-          <p:cNvSpPr/>
-          <p:nvPr/>
-        </p:nvSpPr>
-        <p:spPr>
-          <a:xfrm>
-            <a:off x="7589520" y="5074920"/>
-            <a:ext cx="1463040" cy="301752"/>
-          </a:xfrm>
-          <a:prstGeom prst="roundRect">
-            <a:avLst>
-              <a:gd name="adj" fmla="val 12000"/>
-            </a:avLst>
-          </a:prstGeom>
-          <a:solidFill>
-            <a:srgbClr val="E6F0F7"/>
-          </a:solidFill>
-          <a:ln w="15875">
-            <a:solidFill>
-              <a:srgbClr val="2C6C9C"/>
-            </a:solidFill>
-          </a:ln>
-          <a:effectLst/>
-        </p:spPr>
-        <p:style>
-          <a:lnRef idx="1">
-            <a:schemeClr val="accent1"/>
-          </a:lnRef>
-          <a:fillRef idx="3">
-            <a:schemeClr val="accent1"/>
-          </a:fillRef>
-          <a:effectRef idx="2">
-            <a:schemeClr val="accent1"/>
-          </a:effectRef>
-          <a:fontRef idx="minor">
-            <a:schemeClr val="lt1"/>
-          </a:fontRef>
-        </p:style>
-        <p:txBody>
-          <a:bodyPr rtlCol="0" anchor="ctr" wrap="square" lIns="54864" rIns="54864" tIns="27432" bIns="27432"/>
-          <a:lstStyle/>
-          <a:p>
-            <a:pPr algn="ctr"/>
-            <a:r>
-              <a:rPr sz="1000" b="0" i="0">
-                <a:solidFill>
-                  <a:srgbClr val="000000"/>
-                </a:solidFill>
-                <a:latin typeface="Courier New"/>
-              </a:rPr>
-              <a:t>forward_email</a:t>
-            </a:r>
-          </a:p>
-        </p:txBody>
-      </p:sp>
-      <p:cxnSp>
-        <p:nvCxnSpPr>
-          <p:cNvPr id="45" name="Connector 44"/>
-          <p:cNvCxnSpPr/>
-          <p:nvPr/>
-        </p:nvCxnSpPr>
-        <p:spPr>
-          <a:xfrm>
-            <a:off x="7150608" y="4910328"/>
-            <a:ext cx="420623" cy="310896"/>
-          </a:xfrm>
-          <a:prstGeom prst="line">
-            <a:avLst/>
-          </a:prstGeom>
-          <a:ln w="15875">
-            <a:solidFill>
-              <a:srgbClr val="6B7280"/>
-            </a:solidFill>
-            <a:tailEnd type="triangle"/>
-          </a:ln>
-        </p:spPr>
-        <p:style>
-          <a:lnRef idx="2">
-            <a:schemeClr val="accent1"/>
-          </a:lnRef>
-          <a:fillRef idx="0">
-            <a:schemeClr val="accent1"/>
-          </a:fillRef>
-          <a:effectRef idx="1">
-            <a:schemeClr val="accent1"/>
-          </a:effectRef>
-          <a:fontRef idx="minor">
-            <a:schemeClr val="tx1"/>
-          </a:fontRef>
-        </p:style>
-      </p:cxnSp>
-      <p:sp>
-        <p:nvSpPr>
-          <p:cNvPr id="46" name="TextBox 45"/>
+              <a:t>What you should see</a:t>
+            </a:r>
+          </a:p>
+        </p:txBody>
+      </p:sp>
+      <p:sp>
+        <p:nvSpPr>
+          <p:cNvPr id="18" name="TextBox 17"/>
           <p:cNvSpPr txBox="1"/>
           <p:nvPr/>
         </p:nvSpPr>
         <p:spPr>
           <a:xfrm>
-            <a:off x="4846320" y="2148840"/>
-            <a:ext cx="1280160" cy="274320"/>
+            <a:off x="8686800" y="1920240"/>
+            <a:ext cx="2743200" cy="2331720"/>
           </a:xfrm>
           <a:prstGeom prst="rect">
             <a:avLst/>
@@ -11773,176 +9822,65 @@
           </a:bodyPr>
           <a:lstStyle/>
           <a:p>
-            <a:pPr algn="ctr">
+            <a:pPr algn="l">
               <a:spcAft>
-                <a:spcPts val="400"/>
+                <a:spcPts val="500"/>
               </a:spcAft>
             </a:pPr>
             <a:r>
-              <a:rPr sz="900" b="0" i="0">
-                <a:solidFill>
-                  <a:srgbClr val="6B7280"/>
+              <a:rPr sz="1150" b="0" i="0">
+                <a:solidFill>
+                  <a:srgbClr val="000000"/>
                 </a:solidFill>
                 <a:latin typeface="Arial"/>
               </a:rPr>
-              <a:t>instruction ⇄ report</a:t>
-            </a:r>
-          </a:p>
-        </p:txBody>
-      </p:sp>
-      <p:sp>
-        <p:nvSpPr>
-          <p:cNvPr id="47" name="Rounded Rectangle 46"/>
-          <p:cNvSpPr/>
-          <p:nvPr/>
-        </p:nvSpPr>
-        <p:spPr>
-          <a:xfrm>
-            <a:off x="5486400" y="5623560"/>
-            <a:ext cx="3566160" cy="502920"/>
-          </a:xfrm>
-          <a:prstGeom prst="roundRect">
-            <a:avLst>
-              <a:gd name="adj" fmla="val 12000"/>
-            </a:avLst>
-          </a:prstGeom>
-          <a:solidFill>
-            <a:srgbClr val="F3F4F7"/>
-          </a:solidFill>
-          <a:ln w="15875">
-            <a:solidFill>
-              <a:srgbClr val="6B7280"/>
-            </a:solidFill>
-            <a:prstDash val="dash"/>
-          </a:ln>
-          <a:effectLst/>
-        </p:spPr>
-        <p:style>
-          <a:lnRef idx="1">
-            <a:schemeClr val="accent1"/>
-          </a:lnRef>
-          <a:fillRef idx="3">
-            <a:schemeClr val="accent1"/>
-          </a:fillRef>
-          <a:effectRef idx="2">
-            <a:schemeClr val="accent1"/>
-          </a:effectRef>
-          <a:fontRef idx="minor">
-            <a:schemeClr val="lt1"/>
-          </a:fontRef>
-        </p:style>
-        <p:txBody>
-          <a:bodyPr rtlCol="0" anchor="ctr" wrap="square" lIns="54864" rIns="54864" tIns="27432" bIns="27432"/>
-          <a:lstStyle/>
-          <a:p>
-            <a:pPr algn="ctr"/>
-            <a:r>
-              <a:rPr sz="1100" b="1" i="0">
+              <a:t>Your rejection reaches the sub-agent as a tool error; the orchestrator adapts, with smaller batches or a question</a:t>
+            </a:r>
+          </a:p>
+          <a:p>
+            <a:pPr algn="l">
+              <a:spcAft>
+                <a:spcPts val="500"/>
+              </a:spcAft>
+            </a:pPr>
+            <a:r>
+              <a:rPr sz="1150" b="0" i="0">
                 <a:solidFill>
                   <a:srgbClr val="000000"/>
                 </a:solidFill>
                 <a:latin typeface="Arial"/>
               </a:rPr>
-              <a:t>Long-term memory</a:t>
-            </a:r>
-          </a:p>
-          <a:p>
-            <a:pPr algn="ctr"/>
-            <a:r>
-              <a:rPr sz="850" b="0" i="0">
-                <a:solidFill>
-                  <a:srgbClr val="6B7280"/>
+              <a:t>A blocked archive is a red line in the trace and nothing moves in the inbox</a:t>
+            </a:r>
+          </a:p>
+          <a:p>
+            <a:pPr algn="l">
+              <a:spcAft>
+                <a:spcPts val="500"/>
+              </a:spcAft>
+            </a:pPr>
+            <a:r>
+              <a:rPr sz="1150" b="0" i="0">
+                <a:solidFill>
+                  <a:srgbClr val="000000"/>
                 </a:solidFill>
                 <a:latin typeface="Arial"/>
               </a:rPr>
-              <a:t>the inbox state and what you saved in the blocks · only through tools</a:t>
-            </a:r>
-          </a:p>
-        </p:txBody>
-      </p:sp>
-      <p:cxnSp>
-        <p:nvCxnSpPr>
-          <p:cNvPr id="48" name="Connector 47"/>
-          <p:cNvCxnSpPr/>
-          <p:nvPr/>
-        </p:nvCxnSpPr>
-        <p:spPr>
-          <a:xfrm>
-            <a:off x="8321040" y="5486400"/>
-            <a:ext cx="0" cy="118872"/>
-          </a:xfrm>
-          <a:prstGeom prst="line">
-            <a:avLst/>
-          </a:prstGeom>
-          <a:ln w="15875">
-            <a:solidFill>
-              <a:srgbClr val="6B7280"/>
-            </a:solidFill>
-            <a:tailEnd type="triangle"/>
-          </a:ln>
-        </p:spPr>
-        <p:style>
-          <a:lnRef idx="2">
-            <a:schemeClr val="accent1"/>
-          </a:lnRef>
-          <a:fillRef idx="0">
-            <a:schemeClr val="accent1"/>
-          </a:fillRef>
-          <a:effectRef idx="1">
-            <a:schemeClr val="accent1"/>
-          </a:effectRef>
-          <a:fontRef idx="minor">
-            <a:schemeClr val="tx1"/>
-          </a:fontRef>
-        </p:style>
-      </p:cxnSp>
-      <p:cxnSp>
-        <p:nvCxnSpPr>
-          <p:cNvPr id="49" name="Connector 48"/>
-          <p:cNvCxnSpPr/>
-          <p:nvPr/>
-        </p:nvCxnSpPr>
-        <p:spPr>
-          <a:xfrm flipV="1">
-            <a:off x="8458200" y="5504688"/>
-            <a:ext cx="0" cy="100584"/>
-          </a:xfrm>
-          <a:prstGeom prst="line">
-            <a:avLst/>
-          </a:prstGeom>
-          <a:ln w="15875">
-            <a:solidFill>
-              <a:srgbClr val="6B7280"/>
-            </a:solidFill>
-            <a:prstDash val="dash"/>
-            <a:tailEnd type="triangle"/>
-          </a:ln>
-        </p:spPr>
-        <p:style>
-          <a:lnRef idx="2">
-            <a:schemeClr val="accent1"/>
-          </a:lnRef>
-          <a:fillRef idx="0">
-            <a:schemeClr val="accent1"/>
-          </a:fillRef>
-          <a:effectRef idx="1">
-            <a:schemeClr val="accent1"/>
-          </a:effectRef>
-          <a:fontRef idx="minor">
-            <a:schemeClr val="tx1"/>
-          </a:fontRef>
-        </p:style>
-      </p:cxnSp>
-      <p:sp>
-        <p:nvSpPr>
-          <p:cNvPr id="50" name="Rectangle 49"/>
+              <a:t>With the brief and the code gone, only the approval card stands between the inbox and the outside</a:t>
+            </a:r>
+          </a:p>
+        </p:txBody>
+      </p:sp>
+      <p:sp>
+        <p:nvSpPr>
+          <p:cNvPr id="19" name="Rectangle 18"/>
           <p:cNvSpPr/>
           <p:nvPr/>
         </p:nvSpPr>
         <p:spPr>
           <a:xfrm>
-            <a:off x="9418320" y="1371600"/>
-            <a:ext cx="2194560" cy="1828800"/>
+            <a:off x="8503920" y="4572000"/>
+            <a:ext cx="3108960" cy="1234440"/>
           </a:xfrm>
           <a:prstGeom prst="rect">
             <a:avLst/>
@@ -11981,14 +9919,14 @@
       </p:sp>
       <p:sp>
         <p:nvSpPr>
-          <p:cNvPr id="51" name="TextBox 50"/>
+          <p:cNvPr id="20" name="TextBox 19"/>
           <p:cNvSpPr txBox="1"/>
           <p:nvPr/>
         </p:nvSpPr>
         <p:spPr>
           <a:xfrm>
-            <a:off x="9528048" y="1444752"/>
-            <a:ext cx="1975104" cy="292608"/>
+            <a:off x="8613648" y="4645152"/>
+            <a:ext cx="2889504" cy="292608"/>
           </a:xfrm>
           <a:prstGeom prst="rect">
             <a:avLst/>
@@ -12013,21 +9951,21 @@
                 </a:solidFill>
                 <a:latin typeface="Arial"/>
               </a:rPr>
-              <a:t>DELEGATION</a:t>
-            </a:r>
-          </a:p>
-        </p:txBody>
-      </p:sp>
-      <p:sp>
-        <p:nvSpPr>
-          <p:cNvPr id="52" name="TextBox 51"/>
+              <a:t>QUESTION FOR THE GROUP</a:t>
+            </a:r>
+          </a:p>
+        </p:txBody>
+      </p:sp>
+      <p:sp>
+        <p:nvSpPr>
+          <p:cNvPr id="21" name="TextBox 20"/>
           <p:cNvSpPr txBox="1"/>
           <p:nvPr/>
         </p:nvSpPr>
         <p:spPr>
           <a:xfrm>
-            <a:off x="9528048" y="1719072"/>
-            <a:ext cx="1975104" cy="1417320"/>
+            <a:off x="8613648" y="4919472"/>
+            <a:ext cx="2889504" cy="822960"/>
           </a:xfrm>
           <a:prstGeom prst="rect">
             <a:avLst/>
@@ -12052,67 +9990,21 @@
                 </a:solidFill>
                 <a:latin typeface="Arial"/>
               </a:rPr>
-              <a:t>The orchestrator never labels or drafts. It gives one sub-agent one instruction and reads the report. Each sub-agent is a fresh model call with a few tools.</a:t>
-            </a:r>
-          </a:p>
-        </p:txBody>
-      </p:sp>
-      <p:sp>
-        <p:nvSpPr>
-          <p:cNvPr id="53" name="Rectangle 52"/>
-          <p:cNvSpPr/>
-          <p:nvPr/>
-        </p:nvSpPr>
-        <p:spPr>
-          <a:xfrm>
-            <a:off x="9418320" y="3474720"/>
-            <a:ext cx="2194560" cy="1371600"/>
-          </a:xfrm>
-          <a:prstGeom prst="rect">
-            <a:avLst/>
-          </a:prstGeom>
-          <a:solidFill>
-            <a:srgbClr val="FFFFFF"/>
-          </a:solidFill>
-          <a:ln w="19050">
-            <a:solidFill>
-              <a:srgbClr val="B9975B"/>
-            </a:solidFill>
-          </a:ln>
-          <a:effectLst/>
-        </p:spPr>
-        <p:style>
-          <a:lnRef idx="1">
-            <a:schemeClr val="accent1"/>
-          </a:lnRef>
-          <a:fillRef idx="3">
-            <a:schemeClr val="accent1"/>
-          </a:fillRef>
-          <a:effectRef idx="2">
-            <a:schemeClr val="accent1"/>
-          </a:effectRef>
-          <a:fontRef idx="minor">
-            <a:schemeClr val="lt1"/>
-          </a:fontRef>
-        </p:style>
-        <p:txBody>
-          <a:bodyPr rtlCol="0" anchor="ctr"/>
-          <a:lstStyle/>
-          <a:p>
-            <a:pPr algn="ctr"/>
-          </a:p>
-        </p:txBody>
-      </p:sp>
-      <p:sp>
-        <p:nvSpPr>
-          <p:cNvPr id="54" name="TextBox 53"/>
+              <a:t>Which of the three lines would you trust in your own process, and for what?</a:t>
+            </a:r>
+          </a:p>
+        </p:txBody>
+      </p:sp>
+      <p:sp>
+        <p:nvSpPr>
+          <p:cNvPr id="22" name="TextBox 21"/>
           <p:cNvSpPr txBox="1"/>
           <p:nvPr/>
         </p:nvSpPr>
         <p:spPr>
           <a:xfrm>
-            <a:off x="9528048" y="3547872"/>
-            <a:ext cx="1975104" cy="292608"/>
+            <a:off x="822960" y="6126480"/>
+            <a:ext cx="10607040" cy="320040"/>
           </a:xfrm>
           <a:prstGeom prst="rect">
             <a:avLst/>
@@ -12131,518 +10023,13 @@
               </a:spcAft>
             </a:pPr>
             <a:r>
-              <a:rPr sz="1050" b="1" i="0">
-                <a:solidFill>
-                  <a:srgbClr val="8A6A2E"/>
+              <a:rPr sz="1100" b="0" i="1">
+                <a:solidFill>
+                  <a:srgbClr val="6B7280"/>
                 </a:solidFill>
                 <a:latin typeface="Arial"/>
               </a:rPr>
-              <a:t>TOOLS</a:t>
-            </a:r>
-          </a:p>
-        </p:txBody>
-      </p:sp>
-      <p:sp>
-        <p:nvSpPr>
-          <p:cNvPr id="55" name="TextBox 54"/>
-          <p:cNvSpPr txBox="1"/>
-          <p:nvPr/>
-        </p:nvSpPr>
-        <p:spPr>
-          <a:xfrm>
-            <a:off x="9528048" y="3822191"/>
-            <a:ext cx="1975104" cy="960120"/>
-          </a:xfrm>
-          <a:prstGeom prst="rect">
-            <a:avLst/>
-          </a:prstGeom>
-          <a:noFill/>
-        </p:spPr>
-        <p:txBody>
-          <a:bodyPr wrap="square" anchor="t">
-            <a:spAutoFit/>
-          </a:bodyPr>
-          <a:lstStyle/>
-          <a:p>
-            <a:pPr algn="l">
-              <a:spcAft>
-                <a:spcPts val="200"/>
-              </a:spcAft>
-            </a:pPr>
-            <a:r>
-              <a:rPr sz="1050" b="0" i="0">
-                <a:solidFill>
-                  <a:srgbClr val="000000"/>
-                </a:solidFill>
-                <a:latin typeface="Arial"/>
-              </a:rPr>
-              <a:t>Typed functions. The first ones only read; the ones that change the inbox come next.</a:t>
-            </a:r>
-          </a:p>
-        </p:txBody>
-      </p:sp>
-      <p:sp>
-        <p:nvSpPr>
-          <p:cNvPr id="56" name="Rounded Rectangle 55"/>
-          <p:cNvSpPr/>
-          <p:nvPr/>
-        </p:nvSpPr>
-        <p:spPr>
-          <a:xfrm>
-            <a:off x="548640" y="5650992"/>
-            <a:ext cx="256032" cy="164592"/>
-          </a:xfrm>
-          <a:prstGeom prst="roundRect">
-            <a:avLst/>
-          </a:prstGeom>
-          <a:solidFill>
-            <a:srgbClr val="E6F0F7"/>
-          </a:solidFill>
-          <a:ln w="12700">
-            <a:solidFill>
-              <a:srgbClr val="2C6C9C"/>
-            </a:solidFill>
-          </a:ln>
-          <a:effectLst/>
-        </p:spPr>
-        <p:style>
-          <a:lnRef idx="1">
-            <a:schemeClr val="accent1"/>
-          </a:lnRef>
-          <a:fillRef idx="3">
-            <a:schemeClr val="accent1"/>
-          </a:fillRef>
-          <a:effectRef idx="2">
-            <a:schemeClr val="accent1"/>
-          </a:effectRef>
-          <a:fontRef idx="minor">
-            <a:schemeClr val="lt1"/>
-          </a:fontRef>
-        </p:style>
-        <p:txBody>
-          <a:bodyPr rtlCol="0" anchor="ctr"/>
-          <a:lstStyle/>
-          <a:p>
-            <a:pPr algn="ctr"/>
-          </a:p>
-        </p:txBody>
-      </p:sp>
-      <p:sp>
-        <p:nvSpPr>
-          <p:cNvPr id="57" name="TextBox 56"/>
-          <p:cNvSpPr txBox="1"/>
-          <p:nvPr/>
-        </p:nvSpPr>
-        <p:spPr>
-          <a:xfrm>
-            <a:off x="859536" y="5596128"/>
-            <a:ext cx="1097280" cy="274320"/>
-          </a:xfrm>
-          <a:prstGeom prst="rect">
-            <a:avLst/>
-          </a:prstGeom>
-          <a:noFill/>
-        </p:spPr>
-        <p:txBody>
-          <a:bodyPr wrap="square" anchor="t">
-            <a:spAutoFit/>
-          </a:bodyPr>
-          <a:lstStyle/>
-          <a:p>
-            <a:pPr algn="l">
-              <a:spcAft>
-                <a:spcPts val="400"/>
-              </a:spcAft>
-            </a:pPr>
-            <a:r>
-              <a:rPr sz="1050" b="0" i="0">
-                <a:solidFill>
-                  <a:srgbClr val="6B7280"/>
-                </a:solidFill>
-                <a:latin typeface="Arial"/>
-              </a:rPr>
-              <a:t>deterministic</a:t>
-            </a:r>
-          </a:p>
-        </p:txBody>
-      </p:sp>
-      <p:sp>
-        <p:nvSpPr>
-          <p:cNvPr id="58" name="Rounded Rectangle 57"/>
-          <p:cNvSpPr/>
-          <p:nvPr/>
-        </p:nvSpPr>
-        <p:spPr>
-          <a:xfrm>
-            <a:off x="1965960" y="5650992"/>
-            <a:ext cx="256032" cy="164592"/>
-          </a:xfrm>
-          <a:prstGeom prst="roundRect">
-            <a:avLst/>
-          </a:prstGeom>
-          <a:solidFill>
-            <a:srgbClr val="EEEAF9"/>
-          </a:solidFill>
-          <a:ln w="12700">
-            <a:solidFill>
-              <a:srgbClr val="5E48B8"/>
-            </a:solidFill>
-          </a:ln>
-          <a:effectLst/>
-        </p:spPr>
-        <p:style>
-          <a:lnRef idx="1">
-            <a:schemeClr val="accent1"/>
-          </a:lnRef>
-          <a:fillRef idx="3">
-            <a:schemeClr val="accent1"/>
-          </a:fillRef>
-          <a:effectRef idx="2">
-            <a:schemeClr val="accent1"/>
-          </a:effectRef>
-          <a:fontRef idx="minor">
-            <a:schemeClr val="lt1"/>
-          </a:fontRef>
-        </p:style>
-        <p:txBody>
-          <a:bodyPr rtlCol="0" anchor="ctr"/>
-          <a:lstStyle/>
-          <a:p>
-            <a:pPr algn="ctr"/>
-          </a:p>
-        </p:txBody>
-      </p:sp>
-      <p:sp>
-        <p:nvSpPr>
-          <p:cNvPr id="59" name="TextBox 58"/>
-          <p:cNvSpPr txBox="1"/>
-          <p:nvPr/>
-        </p:nvSpPr>
-        <p:spPr>
-          <a:xfrm>
-            <a:off x="2276856" y="5596128"/>
-            <a:ext cx="1097280" cy="274320"/>
-          </a:xfrm>
-          <a:prstGeom prst="rect">
-            <a:avLst/>
-          </a:prstGeom>
-          <a:noFill/>
-        </p:spPr>
-        <p:txBody>
-          <a:bodyPr wrap="square" anchor="t">
-            <a:spAutoFit/>
-          </a:bodyPr>
-          <a:lstStyle/>
-          <a:p>
-            <a:pPr algn="l">
-              <a:spcAft>
-                <a:spcPts val="400"/>
-              </a:spcAft>
-            </a:pPr>
-            <a:r>
-              <a:rPr sz="1050" b="0" i="0">
-                <a:solidFill>
-                  <a:srgbClr val="6B7280"/>
-                </a:solidFill>
-                <a:latin typeface="Arial"/>
-              </a:rPr>
-              <a:t>agent</a:t>
-            </a:r>
-          </a:p>
-        </p:txBody>
-      </p:sp>
-      <p:sp>
-        <p:nvSpPr>
-          <p:cNvPr id="60" name="Rounded Rectangle 59"/>
-          <p:cNvSpPr/>
-          <p:nvPr/>
-        </p:nvSpPr>
-        <p:spPr>
-          <a:xfrm>
-            <a:off x="3383280" y="5650992"/>
-            <a:ext cx="256032" cy="164592"/>
-          </a:xfrm>
-          <a:prstGeom prst="roundRect">
-            <a:avLst/>
-          </a:prstGeom>
-          <a:solidFill>
-            <a:srgbClr val="EEEAF9"/>
-          </a:solidFill>
-          <a:ln w="12700">
-            <a:solidFill>
-              <a:srgbClr val="5E48B8"/>
-            </a:solidFill>
-            <a:prstDash val="dash"/>
-          </a:ln>
-          <a:effectLst/>
-        </p:spPr>
-        <p:style>
-          <a:lnRef idx="1">
-            <a:schemeClr val="accent1"/>
-          </a:lnRef>
-          <a:fillRef idx="3">
-            <a:schemeClr val="accent1"/>
-          </a:fillRef>
-          <a:effectRef idx="2">
-            <a:schemeClr val="accent1"/>
-          </a:effectRef>
-          <a:fontRef idx="minor">
-            <a:schemeClr val="lt1"/>
-          </a:fontRef>
-        </p:style>
-        <p:txBody>
-          <a:bodyPr rtlCol="0" anchor="ctr"/>
-          <a:lstStyle/>
-          <a:p>
-            <a:pPr algn="ctr"/>
-          </a:p>
-        </p:txBody>
-      </p:sp>
-      <p:sp>
-        <p:nvSpPr>
-          <p:cNvPr id="61" name="TextBox 60"/>
-          <p:cNvSpPr txBox="1"/>
-          <p:nvPr/>
-        </p:nvSpPr>
-        <p:spPr>
-          <a:xfrm>
-            <a:off x="3694176" y="5596128"/>
-            <a:ext cx="1097280" cy="274320"/>
-          </a:xfrm>
-          <a:prstGeom prst="rect">
-            <a:avLst/>
-          </a:prstGeom>
-          <a:noFill/>
-        </p:spPr>
-        <p:txBody>
-          <a:bodyPr wrap="square" anchor="t">
-            <a:spAutoFit/>
-          </a:bodyPr>
-          <a:lstStyle/>
-          <a:p>
-            <a:pPr algn="l">
-              <a:spcAft>
-                <a:spcPts val="400"/>
-              </a:spcAft>
-            </a:pPr>
-            <a:r>
-              <a:rPr sz="1050" b="0" i="0">
-                <a:solidFill>
-                  <a:srgbClr val="6B7280"/>
-                </a:solidFill>
-                <a:latin typeface="Arial"/>
-              </a:rPr>
-              <a:t>brief &amp; skills</a:t>
-            </a:r>
-          </a:p>
-        </p:txBody>
-      </p:sp>
-      <p:sp>
-        <p:nvSpPr>
-          <p:cNvPr id="62" name="Rounded Rectangle 61"/>
-          <p:cNvSpPr/>
-          <p:nvPr/>
-        </p:nvSpPr>
-        <p:spPr>
-          <a:xfrm>
-            <a:off x="548640" y="5925312"/>
-            <a:ext cx="256032" cy="164592"/>
-          </a:xfrm>
-          <a:prstGeom prst="roundRect">
-            <a:avLst/>
-          </a:prstGeom>
-          <a:solidFill>
-            <a:srgbClr val="F3F4F7"/>
-          </a:solidFill>
-          <a:ln w="12700">
-            <a:solidFill>
-              <a:srgbClr val="6B7280"/>
-            </a:solidFill>
-            <a:prstDash val="dash"/>
-          </a:ln>
-          <a:effectLst/>
-        </p:spPr>
-        <p:style>
-          <a:lnRef idx="1">
-            <a:schemeClr val="accent1"/>
-          </a:lnRef>
-          <a:fillRef idx="3">
-            <a:schemeClr val="accent1"/>
-          </a:fillRef>
-          <a:effectRef idx="2">
-            <a:schemeClr val="accent1"/>
-          </a:effectRef>
-          <a:fontRef idx="minor">
-            <a:schemeClr val="lt1"/>
-          </a:fontRef>
-        </p:style>
-        <p:txBody>
-          <a:bodyPr rtlCol="0" anchor="ctr"/>
-          <a:lstStyle/>
-          <a:p>
-            <a:pPr algn="ctr"/>
-          </a:p>
-        </p:txBody>
-      </p:sp>
-      <p:sp>
-        <p:nvSpPr>
-          <p:cNvPr id="63" name="TextBox 62"/>
-          <p:cNvSpPr txBox="1"/>
-          <p:nvPr/>
-        </p:nvSpPr>
-        <p:spPr>
-          <a:xfrm>
-            <a:off x="859536" y="5870448"/>
-            <a:ext cx="1097280" cy="274320"/>
-          </a:xfrm>
-          <a:prstGeom prst="rect">
-            <a:avLst/>
-          </a:prstGeom>
-          <a:noFill/>
-        </p:spPr>
-        <p:txBody>
-          <a:bodyPr wrap="square" anchor="t">
-            <a:spAutoFit/>
-          </a:bodyPr>
-          <a:lstStyle/>
-          <a:p>
-            <a:pPr algn="l">
-              <a:spcAft>
-                <a:spcPts val="400"/>
-              </a:spcAft>
-            </a:pPr>
-            <a:r>
-              <a:rPr sz="1050" b="0" i="0">
-                <a:solidFill>
-                  <a:srgbClr val="6B7280"/>
-                </a:solidFill>
-                <a:latin typeface="Arial"/>
-              </a:rPr>
-              <a:t>memory</a:t>
-            </a:r>
-          </a:p>
-        </p:txBody>
-      </p:sp>
-      <p:sp>
-        <p:nvSpPr>
-          <p:cNvPr id="64" name="Rounded Rectangle 63"/>
-          <p:cNvSpPr/>
-          <p:nvPr/>
-        </p:nvSpPr>
-        <p:spPr>
-          <a:xfrm>
-            <a:off x="1965960" y="5925312"/>
-            <a:ext cx="256032" cy="164592"/>
-          </a:xfrm>
-          <a:prstGeom prst="roundRect">
-            <a:avLst/>
-          </a:prstGeom>
-          <a:solidFill>
-            <a:srgbClr val="FBF1E0"/>
-          </a:solidFill>
-          <a:ln w="12700">
-            <a:solidFill>
-              <a:srgbClr val="B4761C"/>
-            </a:solidFill>
-          </a:ln>
-          <a:effectLst/>
-        </p:spPr>
-        <p:style>
-          <a:lnRef idx="1">
-            <a:schemeClr val="accent1"/>
-          </a:lnRef>
-          <a:fillRef idx="3">
-            <a:schemeClr val="accent1"/>
-          </a:fillRef>
-          <a:effectRef idx="2">
-            <a:schemeClr val="accent1"/>
-          </a:effectRef>
-          <a:fontRef idx="minor">
-            <a:schemeClr val="lt1"/>
-          </a:fontRef>
-        </p:style>
-        <p:txBody>
-          <a:bodyPr rtlCol="0" anchor="ctr"/>
-          <a:lstStyle/>
-          <a:p>
-            <a:pPr algn="ctr"/>
-          </a:p>
-        </p:txBody>
-      </p:sp>
-      <p:sp>
-        <p:nvSpPr>
-          <p:cNvPr id="65" name="TextBox 64"/>
-          <p:cNvSpPr txBox="1"/>
-          <p:nvPr/>
-        </p:nvSpPr>
-        <p:spPr>
-          <a:xfrm>
-            <a:off x="2276856" y="5870448"/>
-            <a:ext cx="1097280" cy="274320"/>
-          </a:xfrm>
-          <a:prstGeom prst="rect">
-            <a:avLst/>
-          </a:prstGeom>
-          <a:noFill/>
-        </p:spPr>
-        <p:txBody>
-          <a:bodyPr wrap="square" anchor="t">
-            <a:spAutoFit/>
-          </a:bodyPr>
-          <a:lstStyle/>
-          <a:p>
-            <a:pPr algn="l">
-              <a:spcAft>
-                <a:spcPts val="400"/>
-              </a:spcAft>
-            </a:pPr>
-            <a:r>
-              <a:rPr sz="1050" b="0" i="0">
-                <a:solidFill>
-                  <a:srgbClr val="6B7280"/>
-                </a:solidFill>
-                <a:latin typeface="Arial"/>
-              </a:rPr>
-              <a:t>human</a:t>
-            </a:r>
-          </a:p>
-        </p:txBody>
-      </p:sp>
-      <p:sp>
-        <p:nvSpPr>
-          <p:cNvPr id="66" name="TextBox 65"/>
-          <p:cNvSpPr txBox="1"/>
-          <p:nvPr/>
-        </p:nvSpPr>
-        <p:spPr>
-          <a:xfrm>
-            <a:off x="822960" y="6327648"/>
-            <a:ext cx="9692640" cy="457200"/>
-          </a:xfrm>
-          <a:prstGeom prst="rect">
-            <a:avLst/>
-          </a:prstGeom>
-          <a:noFill/>
-        </p:spPr>
-        <p:txBody>
-          <a:bodyPr wrap="square" anchor="t">
-            <a:spAutoFit/>
-          </a:bodyPr>
-          <a:lstStyle/>
-          <a:p>
-            <a:pPr algn="l">
-              <a:spcAft>
-                <a:spcPts val="400"/>
-              </a:spcAft>
-            </a:pPr>
-            <a:r>
-              <a:rPr sz="1050" b="0" i="1">
-                <a:solidFill>
-                  <a:srgbClr val="002060"/>
-                </a:solidFill>
-                <a:latin typeface="Arial"/>
-              </a:rPr>
-              <a:t>The orchestrator delegates to three sub-agents. Each one is a separate model call with a few tools; the inbox is the long-term memory, reached only through them.</a:t>
+              <a:t>Five minutes · one person drives, the others read the trace aloud · Restore default and Reset inbox put everything back</a:t>
             </a:r>
           </a:p>
         </p:txBody>
@@ -12700,6 +10087,4591 @@
                 <a:latin typeface="Arial"/>
               </a:rPr>
               <a:t>4</a:t>
+            </a:r>
+          </a:p>
+        </p:txBody>
+      </p:sp>
+      <p:sp>
+        <p:nvSpPr>
+          <p:cNvPr id="3" name="TextBox 2"/>
+          <p:cNvSpPr txBox="1"/>
+          <p:nvPr/>
+        </p:nvSpPr>
+        <p:spPr>
+          <a:xfrm>
+            <a:off x="838047" y="192024"/>
+            <a:ext cx="10515600" cy="813816"/>
+          </a:xfrm>
+          <a:prstGeom prst="rect">
+            <a:avLst/>
+          </a:prstGeom>
+          <a:noFill/>
+        </p:spPr>
+        <p:txBody>
+          <a:bodyPr wrap="square" anchor="ctr">
+            <a:spAutoFit/>
+          </a:bodyPr>
+          <a:lstStyle/>
+          <a:p>
+            <a:pPr algn="ctr">
+              <a:spcAft>
+                <a:spcPts val="400"/>
+              </a:spcAft>
+            </a:pPr>
+            <a:r>
+              <a:rPr sz="2800" b="1" i="0">
+                <a:solidFill>
+                  <a:srgbClr val="002060"/>
+                </a:solidFill>
+                <a:latin typeface="Arial"/>
+              </a:rPr>
+              <a:t>HOW THE AGENT WORKS · 1 OF 3</a:t>
+            </a:r>
+          </a:p>
+        </p:txBody>
+      </p:sp>
+      <p:cxnSp>
+        <p:nvCxnSpPr>
+          <p:cNvPr id="4" name="Connector 3"/>
+          <p:cNvCxnSpPr/>
+          <p:nvPr/>
+        </p:nvCxnSpPr>
+        <p:spPr>
+          <a:xfrm>
+            <a:off x="0" y="1097280"/>
+            <a:ext cx="12191695" cy="0"/>
+          </a:xfrm>
+          <a:prstGeom prst="line">
+            <a:avLst/>
+          </a:prstGeom>
+          <a:ln w="9525">
+            <a:solidFill>
+              <a:srgbClr val="D5DBE2"/>
+            </a:solidFill>
+          </a:ln>
+        </p:spPr>
+        <p:style>
+          <a:lnRef idx="2">
+            <a:schemeClr val="accent1"/>
+          </a:lnRef>
+          <a:fillRef idx="0">
+            <a:schemeClr val="accent1"/>
+          </a:fillRef>
+          <a:effectRef idx="1">
+            <a:schemeClr val="accent1"/>
+          </a:effectRef>
+          <a:fontRef idx="minor">
+            <a:schemeClr val="tx1"/>
+          </a:fontRef>
+        </p:style>
+      </p:cxnSp>
+      <p:cxnSp>
+        <p:nvCxnSpPr>
+          <p:cNvPr id="5" name="Connector 4"/>
+          <p:cNvCxnSpPr/>
+          <p:nvPr/>
+        </p:nvCxnSpPr>
+        <p:spPr>
+          <a:xfrm>
+            <a:off x="5952744" y="1133856"/>
+            <a:ext cx="292608" cy="0"/>
+          </a:xfrm>
+          <a:prstGeom prst="line">
+            <a:avLst/>
+          </a:prstGeom>
+          <a:ln w="76200">
+            <a:solidFill>
+              <a:srgbClr val="00305C"/>
+            </a:solidFill>
+          </a:ln>
+        </p:spPr>
+        <p:style>
+          <a:lnRef idx="2">
+            <a:schemeClr val="accent1"/>
+          </a:lnRef>
+          <a:fillRef idx="0">
+            <a:schemeClr val="accent1"/>
+          </a:fillRef>
+          <a:effectRef idx="1">
+            <a:schemeClr val="accent1"/>
+          </a:effectRef>
+          <a:fontRef idx="minor">
+            <a:schemeClr val="tx1"/>
+          </a:fontRef>
+        </p:style>
+      </p:cxnSp>
+      <p:sp>
+        <p:nvSpPr>
+          <p:cNvPr id="6" name="Rounded Rectangle 5"/>
+          <p:cNvSpPr/>
+          <p:nvPr/>
+        </p:nvSpPr>
+        <p:spPr>
+          <a:xfrm>
+            <a:off x="10424160" y="502920"/>
+            <a:ext cx="1188720" cy="365760"/>
+          </a:xfrm>
+          <a:prstGeom prst="roundRect">
+            <a:avLst/>
+          </a:prstGeom>
+          <a:solidFill>
+            <a:srgbClr val="00305C"/>
+          </a:solidFill>
+          <a:ln>
+            <a:noFill/>
+          </a:ln>
+          <a:effectLst/>
+        </p:spPr>
+        <p:style>
+          <a:lnRef idx="1">
+            <a:schemeClr val="accent1"/>
+          </a:lnRef>
+          <a:fillRef idx="3">
+            <a:schemeClr val="accent1"/>
+          </a:fillRef>
+          <a:effectRef idx="2">
+            <a:schemeClr val="accent1"/>
+          </a:effectRef>
+          <a:fontRef idx="minor">
+            <a:schemeClr val="lt1"/>
+          </a:fontRef>
+        </p:style>
+        <p:txBody>
+          <a:bodyPr rtlCol="0" anchor="ctr" tIns="0" bIns="0"/>
+          <a:lstStyle/>
+          <a:p>
+            <a:pPr algn="ctr"/>
+            <a:r>
+              <a:rPr sz="1200" b="1" i="0">
+                <a:solidFill>
+                  <a:srgbClr val="FFFFFF"/>
+                </a:solidFill>
+                <a:latin typeface="Arial"/>
+              </a:rPr>
+              <a:t>1 / 3</a:t>
+            </a:r>
+          </a:p>
+        </p:txBody>
+      </p:sp>
+      <p:sp>
+        <p:nvSpPr>
+          <p:cNvPr id="7" name="Rounded Rectangle 6"/>
+          <p:cNvSpPr/>
+          <p:nvPr/>
+        </p:nvSpPr>
+        <p:spPr>
+          <a:xfrm>
+            <a:off x="548640" y="1371600"/>
+            <a:ext cx="1737360" cy="713232"/>
+          </a:xfrm>
+          <a:prstGeom prst="roundRect">
+            <a:avLst>
+              <a:gd name="adj" fmla="val 12000"/>
+            </a:avLst>
+          </a:prstGeom>
+          <a:solidFill>
+            <a:srgbClr val="EEEAF9"/>
+          </a:solidFill>
+          <a:ln w="15875">
+            <a:solidFill>
+              <a:srgbClr val="5E48B8"/>
+            </a:solidFill>
+            <a:prstDash val="dash"/>
+          </a:ln>
+          <a:effectLst/>
+        </p:spPr>
+        <p:style>
+          <a:lnRef idx="1">
+            <a:schemeClr val="accent1"/>
+          </a:lnRef>
+          <a:fillRef idx="3">
+            <a:schemeClr val="accent1"/>
+          </a:fillRef>
+          <a:effectRef idx="2">
+            <a:schemeClr val="accent1"/>
+          </a:effectRef>
+          <a:fontRef idx="minor">
+            <a:schemeClr val="lt1"/>
+          </a:fontRef>
+        </p:style>
+        <p:txBody>
+          <a:bodyPr rtlCol="0" anchor="ctr" wrap="square" lIns="54864" rIns="54864" tIns="27432" bIns="27432"/>
+          <a:lstStyle/>
+          <a:p>
+            <a:pPr algn="ctr"/>
+            <a:r>
+              <a:rPr sz="1200" b="1" i="0">
+                <a:solidFill>
+                  <a:srgbClr val="000000"/>
+                </a:solidFill>
+                <a:latin typeface="Arial"/>
+              </a:rPr>
+              <a:t>Brief &amp; skills</a:t>
+            </a:r>
+          </a:p>
+          <a:p>
+            <a:pPr algn="ctr"/>
+            <a:r>
+              <a:rPr sz="900" b="0" i="0">
+                <a:solidFill>
+                  <a:srgbClr val="6B7280"/>
+                </a:solidFill>
+                <a:latin typeface="Arial"/>
+              </a:rPr>
+              <a:t>how to triage, when to escalate, what never to do</a:t>
+            </a:r>
+          </a:p>
+        </p:txBody>
+      </p:sp>
+      <p:sp>
+        <p:nvSpPr>
+          <p:cNvPr id="8" name="Rounded Rectangle 7"/>
+          <p:cNvSpPr/>
+          <p:nvPr/>
+        </p:nvSpPr>
+        <p:spPr>
+          <a:xfrm>
+            <a:off x="548640" y="3017520"/>
+            <a:ext cx="1554480" cy="777240"/>
+          </a:xfrm>
+          <a:prstGeom prst="roundRect">
+            <a:avLst>
+              <a:gd name="adj" fmla="val 12000"/>
+            </a:avLst>
+          </a:prstGeom>
+          <a:solidFill>
+            <a:srgbClr val="FBF1E0"/>
+          </a:solidFill>
+          <a:ln w="15875">
+            <a:solidFill>
+              <a:srgbClr val="B4761C"/>
+            </a:solidFill>
+          </a:ln>
+          <a:effectLst/>
+        </p:spPr>
+        <p:style>
+          <a:lnRef idx="1">
+            <a:schemeClr val="accent1"/>
+          </a:lnRef>
+          <a:fillRef idx="3">
+            <a:schemeClr val="accent1"/>
+          </a:fillRef>
+          <a:effectRef idx="2">
+            <a:schemeClr val="accent1"/>
+          </a:effectRef>
+          <a:fontRef idx="minor">
+            <a:schemeClr val="lt1"/>
+          </a:fontRef>
+        </p:style>
+        <p:txBody>
+          <a:bodyPr rtlCol="0" anchor="ctr" wrap="square" lIns="54864" rIns="54864" tIns="27432" bIns="27432"/>
+          <a:lstStyle/>
+          <a:p>
+            <a:pPr algn="ctr"/>
+            <a:r>
+              <a:rPr sz="1200" b="1" i="0">
+                <a:solidFill>
+                  <a:srgbClr val="000000"/>
+                </a:solidFill>
+                <a:latin typeface="Arial"/>
+              </a:rPr>
+              <a:t>Human user</a:t>
+            </a:r>
+          </a:p>
+          <a:p>
+            <a:pPr algn="ctr"/>
+            <a:r>
+              <a:rPr sz="900" b="0" i="0">
+                <a:solidFill>
+                  <a:srgbClr val="6B7280"/>
+                </a:solidFill>
+                <a:latin typeface="Arial"/>
+              </a:rPr>
+              <a:t>asks in plain language</a:t>
+            </a:r>
+          </a:p>
+        </p:txBody>
+      </p:sp>
+      <p:sp>
+        <p:nvSpPr>
+          <p:cNvPr id="9" name="Rounded Rectangle 8"/>
+          <p:cNvSpPr/>
+          <p:nvPr/>
+        </p:nvSpPr>
+        <p:spPr>
+          <a:xfrm>
+            <a:off x="548640" y="4389120"/>
+            <a:ext cx="1737360" cy="868680"/>
+          </a:xfrm>
+          <a:prstGeom prst="roundRect">
+            <a:avLst>
+              <a:gd name="adj" fmla="val 12000"/>
+            </a:avLst>
+          </a:prstGeom>
+          <a:solidFill>
+            <a:srgbClr val="F3F4F7"/>
+          </a:solidFill>
+          <a:ln w="15875">
+            <a:solidFill>
+              <a:srgbClr val="6B7280"/>
+            </a:solidFill>
+            <a:prstDash val="dash"/>
+          </a:ln>
+          <a:effectLst/>
+        </p:spPr>
+        <p:style>
+          <a:lnRef idx="1">
+            <a:schemeClr val="accent1"/>
+          </a:lnRef>
+          <a:fillRef idx="3">
+            <a:schemeClr val="accent1"/>
+          </a:fillRef>
+          <a:effectRef idx="2">
+            <a:schemeClr val="accent1"/>
+          </a:effectRef>
+          <a:fontRef idx="minor">
+            <a:schemeClr val="lt1"/>
+          </a:fontRef>
+        </p:style>
+        <p:txBody>
+          <a:bodyPr rtlCol="0" anchor="ctr" wrap="square" lIns="54864" rIns="54864" tIns="27432" bIns="27432"/>
+          <a:lstStyle/>
+          <a:p>
+            <a:pPr algn="ctr"/>
+            <a:r>
+              <a:rPr sz="1200" b="1" i="0">
+                <a:solidFill>
+                  <a:srgbClr val="000000"/>
+                </a:solidFill>
+                <a:latin typeface="Arial"/>
+              </a:rPr>
+              <a:t>Working memory</a:t>
+            </a:r>
+          </a:p>
+          <a:p>
+            <a:pPr algn="ctr"/>
+            <a:r>
+              <a:rPr sz="900" b="0" i="0">
+                <a:solidFill>
+                  <a:srgbClr val="6B7280"/>
+                </a:solidFill>
+                <a:latin typeface="Arial"/>
+              </a:rPr>
+              <a:t>the brief, the last turns, every tool result · rebuilt each call</a:t>
+            </a:r>
+          </a:p>
+        </p:txBody>
+      </p:sp>
+      <p:sp>
+        <p:nvSpPr>
+          <p:cNvPr id="10" name="Rounded Rectangle 9"/>
+          <p:cNvSpPr/>
+          <p:nvPr/>
+        </p:nvSpPr>
+        <p:spPr>
+          <a:xfrm>
+            <a:off x="2743200" y="1371600"/>
+            <a:ext cx="2011680" cy="640080"/>
+          </a:xfrm>
+          <a:prstGeom prst="roundRect">
+            <a:avLst>
+              <a:gd name="adj" fmla="val 12000"/>
+            </a:avLst>
+          </a:prstGeom>
+          <a:solidFill>
+            <a:srgbClr val="E6F0F7"/>
+          </a:solidFill>
+          <a:ln w="15875">
+            <a:solidFill>
+              <a:srgbClr val="2C6C9C"/>
+            </a:solidFill>
+          </a:ln>
+          <a:effectLst/>
+        </p:spPr>
+        <p:style>
+          <a:lnRef idx="1">
+            <a:schemeClr val="accent1"/>
+          </a:lnRef>
+          <a:fillRef idx="3">
+            <a:schemeClr val="accent1"/>
+          </a:fillRef>
+          <a:effectRef idx="2">
+            <a:schemeClr val="accent1"/>
+          </a:effectRef>
+          <a:fontRef idx="minor">
+            <a:schemeClr val="lt1"/>
+          </a:fontRef>
+        </p:style>
+        <p:txBody>
+          <a:bodyPr rtlCol="0" anchor="ctr" wrap="square" lIns="54864" rIns="54864" tIns="27432" bIns="27432"/>
+          <a:lstStyle/>
+          <a:p>
+            <a:pPr algn="ctr"/>
+            <a:r>
+              <a:rPr sz="1200" b="1" i="0">
+                <a:solidFill>
+                  <a:srgbClr val="000000"/>
+                </a:solidFill>
+                <a:latin typeface="Arial"/>
+              </a:rPr>
+              <a:t>Rules engine</a:t>
+            </a:r>
+          </a:p>
+          <a:p>
+            <a:pPr algn="ctr"/>
+            <a:r>
+              <a:rPr sz="900" b="0" i="0">
+                <a:solidFill>
+                  <a:srgbClr val="6B7280"/>
+                </a:solidFill>
+                <a:latin typeface="Arial"/>
+              </a:rPr>
+              <a:t>deterministic · runs before the agents</a:t>
+            </a:r>
+          </a:p>
+        </p:txBody>
+      </p:sp>
+      <p:sp>
+        <p:nvSpPr>
+          <p:cNvPr id="11" name="Rounded Rectangle 10"/>
+          <p:cNvSpPr/>
+          <p:nvPr/>
+        </p:nvSpPr>
+        <p:spPr>
+          <a:xfrm>
+            <a:off x="2743200" y="2743200"/>
+            <a:ext cx="2011680" cy="1234440"/>
+          </a:xfrm>
+          <a:prstGeom prst="roundRect">
+            <a:avLst>
+              <a:gd name="adj" fmla="val 12000"/>
+            </a:avLst>
+          </a:prstGeom>
+          <a:solidFill>
+            <a:srgbClr val="EEEAF9"/>
+          </a:solidFill>
+          <a:ln w="15875">
+            <a:solidFill>
+              <a:srgbClr val="5E48B8"/>
+            </a:solidFill>
+          </a:ln>
+          <a:effectLst/>
+        </p:spPr>
+        <p:style>
+          <a:lnRef idx="1">
+            <a:schemeClr val="accent1"/>
+          </a:lnRef>
+          <a:fillRef idx="3">
+            <a:schemeClr val="accent1"/>
+          </a:fillRef>
+          <a:effectRef idx="2">
+            <a:schemeClr val="accent1"/>
+          </a:effectRef>
+          <a:fontRef idx="minor">
+            <a:schemeClr val="lt1"/>
+          </a:fontRef>
+        </p:style>
+        <p:txBody>
+          <a:bodyPr rtlCol="0" anchor="ctr" wrap="square" lIns="54864" rIns="54864" tIns="27432" bIns="27432"/>
+          <a:lstStyle/>
+          <a:p>
+            <a:pPr algn="ctr"/>
+            <a:r>
+              <a:rPr sz="1200" b="1" i="0">
+                <a:solidFill>
+                  <a:srgbClr val="000000"/>
+                </a:solidFill>
+                <a:latin typeface="Arial"/>
+              </a:rPr>
+              <a:t>Orchestrator agent</a:t>
+            </a:r>
+          </a:p>
+          <a:p>
+            <a:pPr algn="ctr"/>
+            <a:r>
+              <a:rPr sz="900" b="0" i="0">
+                <a:solidFill>
+                  <a:srgbClr val="6B7280"/>
+                </a:solidFill>
+                <a:latin typeface="Arial"/>
+              </a:rPr>
+              <a:t>plans, delegates, reports · own tools: stats, search, read</a:t>
+            </a:r>
+          </a:p>
+        </p:txBody>
+      </p:sp>
+      <p:cxnSp>
+        <p:nvCxnSpPr>
+          <p:cNvPr id="12" name="Connector 11"/>
+          <p:cNvCxnSpPr/>
+          <p:nvPr/>
+        </p:nvCxnSpPr>
+        <p:spPr>
+          <a:xfrm>
+            <a:off x="2304288" y="1783080"/>
+            <a:ext cx="438912" cy="1051560"/>
+          </a:xfrm>
+          <a:prstGeom prst="line">
+            <a:avLst/>
+          </a:prstGeom>
+          <a:ln w="15875">
+            <a:solidFill>
+              <a:srgbClr val="5E48B8"/>
+            </a:solidFill>
+            <a:tailEnd type="triangle"/>
+          </a:ln>
+        </p:spPr>
+        <p:style>
+          <a:lnRef idx="2">
+            <a:schemeClr val="accent1"/>
+          </a:lnRef>
+          <a:fillRef idx="0">
+            <a:schemeClr val="accent1"/>
+          </a:fillRef>
+          <a:effectRef idx="1">
+            <a:schemeClr val="accent1"/>
+          </a:effectRef>
+          <a:fontRef idx="minor">
+            <a:schemeClr val="tx1"/>
+          </a:fontRef>
+        </p:style>
+      </p:cxnSp>
+      <p:cxnSp>
+        <p:nvCxnSpPr>
+          <p:cNvPr id="13" name="Connector 12"/>
+          <p:cNvCxnSpPr/>
+          <p:nvPr/>
+        </p:nvCxnSpPr>
+        <p:spPr>
+          <a:xfrm>
+            <a:off x="2121408" y="3291840"/>
+            <a:ext cx="603504" cy="0"/>
+          </a:xfrm>
+          <a:prstGeom prst="line">
+            <a:avLst/>
+          </a:prstGeom>
+          <a:ln w="15875">
+            <a:solidFill>
+              <a:srgbClr val="5E48B8"/>
+            </a:solidFill>
+            <a:tailEnd type="triangle"/>
+          </a:ln>
+        </p:spPr>
+        <p:style>
+          <a:lnRef idx="2">
+            <a:schemeClr val="accent1"/>
+          </a:lnRef>
+          <a:fillRef idx="0">
+            <a:schemeClr val="accent1"/>
+          </a:fillRef>
+          <a:effectRef idx="1">
+            <a:schemeClr val="accent1"/>
+          </a:effectRef>
+          <a:fontRef idx="minor">
+            <a:schemeClr val="tx1"/>
+          </a:fontRef>
+        </p:style>
+      </p:cxnSp>
+      <p:sp>
+        <p:nvSpPr>
+          <p:cNvPr id="14" name="TextBox 13"/>
+          <p:cNvSpPr txBox="1"/>
+          <p:nvPr/>
+        </p:nvSpPr>
+        <p:spPr>
+          <a:xfrm>
+            <a:off x="2103120" y="2999232"/>
+            <a:ext cx="640080" cy="274320"/>
+          </a:xfrm>
+          <a:prstGeom prst="rect">
+            <a:avLst/>
+          </a:prstGeom>
+          <a:noFill/>
+        </p:spPr>
+        <p:txBody>
+          <a:bodyPr wrap="square" anchor="t">
+            <a:spAutoFit/>
+          </a:bodyPr>
+          <a:lstStyle/>
+          <a:p>
+            <a:pPr algn="ctr">
+              <a:spcAft>
+                <a:spcPts val="400"/>
+              </a:spcAft>
+            </a:pPr>
+            <a:r>
+              <a:rPr sz="900" b="0" i="0">
+                <a:solidFill>
+                  <a:srgbClr val="6B7280"/>
+                </a:solidFill>
+                <a:latin typeface="Arial"/>
+              </a:rPr>
+              <a:t>request</a:t>
+            </a:r>
+          </a:p>
+        </p:txBody>
+      </p:sp>
+      <p:cxnSp>
+        <p:nvCxnSpPr>
+          <p:cNvPr id="15" name="Connector 14"/>
+          <p:cNvCxnSpPr/>
+          <p:nvPr/>
+        </p:nvCxnSpPr>
+        <p:spPr>
+          <a:xfrm flipH="1">
+            <a:off x="2121408" y="3611880"/>
+            <a:ext cx="603504" cy="0"/>
+          </a:xfrm>
+          <a:prstGeom prst="line">
+            <a:avLst/>
+          </a:prstGeom>
+          <a:ln w="15875">
+            <a:solidFill>
+              <a:srgbClr val="5E48B8"/>
+            </a:solidFill>
+            <a:prstDash val="dash"/>
+            <a:tailEnd type="triangle"/>
+          </a:ln>
+        </p:spPr>
+        <p:style>
+          <a:lnRef idx="2">
+            <a:schemeClr val="accent1"/>
+          </a:lnRef>
+          <a:fillRef idx="0">
+            <a:schemeClr val="accent1"/>
+          </a:fillRef>
+          <a:effectRef idx="1">
+            <a:schemeClr val="accent1"/>
+          </a:effectRef>
+          <a:fontRef idx="minor">
+            <a:schemeClr val="tx1"/>
+          </a:fontRef>
+        </p:style>
+      </p:cxnSp>
+      <p:sp>
+        <p:nvSpPr>
+          <p:cNvPr id="16" name="TextBox 15"/>
+          <p:cNvSpPr txBox="1"/>
+          <p:nvPr/>
+        </p:nvSpPr>
+        <p:spPr>
+          <a:xfrm>
+            <a:off x="2103120" y="3657600"/>
+            <a:ext cx="640080" cy="274320"/>
+          </a:xfrm>
+          <a:prstGeom prst="rect">
+            <a:avLst/>
+          </a:prstGeom>
+          <a:noFill/>
+        </p:spPr>
+        <p:txBody>
+          <a:bodyPr wrap="square" anchor="t">
+            <a:spAutoFit/>
+          </a:bodyPr>
+          <a:lstStyle/>
+          <a:p>
+            <a:pPr algn="ctr">
+              <a:spcAft>
+                <a:spcPts val="400"/>
+              </a:spcAft>
+            </a:pPr>
+            <a:r>
+              <a:rPr sz="900" b="0" i="0">
+                <a:solidFill>
+                  <a:srgbClr val="6B7280"/>
+                </a:solidFill>
+                <a:latin typeface="Arial"/>
+              </a:rPr>
+              <a:t>reply</a:t>
+            </a:r>
+          </a:p>
+        </p:txBody>
+      </p:sp>
+      <p:cxnSp>
+        <p:nvCxnSpPr>
+          <p:cNvPr id="17" name="Connector 16"/>
+          <p:cNvCxnSpPr/>
+          <p:nvPr/>
+        </p:nvCxnSpPr>
+        <p:spPr>
+          <a:xfrm>
+            <a:off x="3749039" y="2029968"/>
+            <a:ext cx="0" cy="694944"/>
+          </a:xfrm>
+          <a:prstGeom prst="line">
+            <a:avLst/>
+          </a:prstGeom>
+          <a:ln w="15875">
+            <a:solidFill>
+              <a:srgbClr val="6B7280"/>
+            </a:solidFill>
+            <a:tailEnd type="triangle"/>
+          </a:ln>
+        </p:spPr>
+        <p:style>
+          <a:lnRef idx="2">
+            <a:schemeClr val="accent1"/>
+          </a:lnRef>
+          <a:fillRef idx="0">
+            <a:schemeClr val="accent1"/>
+          </a:fillRef>
+          <a:effectRef idx="1">
+            <a:schemeClr val="accent1"/>
+          </a:effectRef>
+          <a:fontRef idx="minor">
+            <a:schemeClr val="tx1"/>
+          </a:fontRef>
+        </p:style>
+      </p:cxnSp>
+      <p:sp>
+        <p:nvSpPr>
+          <p:cNvPr id="18" name="TextBox 17"/>
+          <p:cNvSpPr txBox="1"/>
+          <p:nvPr/>
+        </p:nvSpPr>
+        <p:spPr>
+          <a:xfrm>
+            <a:off x="3822191" y="2240280"/>
+            <a:ext cx="731520" cy="274320"/>
+          </a:xfrm>
+          <a:prstGeom prst="rect">
+            <a:avLst/>
+          </a:prstGeom>
+          <a:noFill/>
+        </p:spPr>
+        <p:txBody>
+          <a:bodyPr wrap="square" anchor="t">
+            <a:spAutoFit/>
+          </a:bodyPr>
+          <a:lstStyle/>
+          <a:p>
+            <a:pPr algn="l">
+              <a:spcAft>
+                <a:spcPts val="400"/>
+              </a:spcAft>
+            </a:pPr>
+            <a:r>
+              <a:rPr sz="900" b="0" i="0">
+                <a:solidFill>
+                  <a:srgbClr val="6B7280"/>
+                </a:solidFill>
+                <a:latin typeface="Arial"/>
+              </a:rPr>
+              <a:t>labels</a:t>
+            </a:r>
+          </a:p>
+        </p:txBody>
+      </p:sp>
+      <p:cxnSp>
+        <p:nvCxnSpPr>
+          <p:cNvPr id="19" name="Connector 18"/>
+          <p:cNvCxnSpPr/>
+          <p:nvPr/>
+        </p:nvCxnSpPr>
+        <p:spPr>
+          <a:xfrm flipV="1">
+            <a:off x="2304288" y="3995928"/>
+            <a:ext cx="713232" cy="804672"/>
+          </a:xfrm>
+          <a:prstGeom prst="line">
+            <a:avLst/>
+          </a:prstGeom>
+          <a:ln w="15875">
+            <a:solidFill>
+              <a:srgbClr val="6B7280"/>
+            </a:solidFill>
+            <a:prstDash val="dash"/>
+            <a:tailEnd type="triangle"/>
+          </a:ln>
+        </p:spPr>
+        <p:style>
+          <a:lnRef idx="2">
+            <a:schemeClr val="accent1"/>
+          </a:lnRef>
+          <a:fillRef idx="0">
+            <a:schemeClr val="accent1"/>
+          </a:fillRef>
+          <a:effectRef idx="1">
+            <a:schemeClr val="accent1"/>
+          </a:effectRef>
+          <a:fontRef idx="minor">
+            <a:schemeClr val="tx1"/>
+          </a:fontRef>
+        </p:style>
+      </p:cxnSp>
+      <p:sp>
+        <p:nvSpPr>
+          <p:cNvPr id="20" name="Rectangle 19"/>
+          <p:cNvSpPr/>
+          <p:nvPr/>
+        </p:nvSpPr>
+        <p:spPr>
+          <a:xfrm>
+            <a:off x="5669280" y="1371600"/>
+            <a:ext cx="3017520" cy="1234440"/>
+          </a:xfrm>
+          <a:prstGeom prst="rect">
+            <a:avLst/>
+          </a:prstGeom>
+          <a:solidFill>
+            <a:srgbClr val="FFFFFF"/>
+          </a:solidFill>
+          <a:ln w="19050">
+            <a:solidFill>
+              <a:srgbClr val="B9975B"/>
+            </a:solidFill>
+          </a:ln>
+          <a:effectLst/>
+        </p:spPr>
+        <p:style>
+          <a:lnRef idx="1">
+            <a:schemeClr val="accent1"/>
+          </a:lnRef>
+          <a:fillRef idx="3">
+            <a:schemeClr val="accent1"/>
+          </a:fillRef>
+          <a:effectRef idx="2">
+            <a:schemeClr val="accent1"/>
+          </a:effectRef>
+          <a:fontRef idx="minor">
+            <a:schemeClr val="lt1"/>
+          </a:fontRef>
+        </p:style>
+        <p:txBody>
+          <a:bodyPr rtlCol="0" anchor="ctr"/>
+          <a:lstStyle/>
+          <a:p>
+            <a:pPr algn="ctr"/>
+          </a:p>
+        </p:txBody>
+      </p:sp>
+      <p:sp>
+        <p:nvSpPr>
+          <p:cNvPr id="21" name="TextBox 20"/>
+          <p:cNvSpPr txBox="1"/>
+          <p:nvPr/>
+        </p:nvSpPr>
+        <p:spPr>
+          <a:xfrm>
+            <a:off x="5779008" y="1444752"/>
+            <a:ext cx="2798063" cy="292608"/>
+          </a:xfrm>
+          <a:prstGeom prst="rect">
+            <a:avLst/>
+          </a:prstGeom>
+          <a:noFill/>
+        </p:spPr>
+        <p:txBody>
+          <a:bodyPr wrap="square" anchor="t">
+            <a:spAutoFit/>
+          </a:bodyPr>
+          <a:lstStyle/>
+          <a:p>
+            <a:pPr algn="l">
+              <a:spcAft>
+                <a:spcPts val="400"/>
+              </a:spcAft>
+            </a:pPr>
+            <a:r>
+              <a:rPr sz="1050" b="1" i="0">
+                <a:solidFill>
+                  <a:srgbClr val="8A6A2E"/>
+                </a:solidFill>
+                <a:latin typeface="Arial"/>
+              </a:rPr>
+              <a:t>WHAT YOU ARE LOOKING AT</a:t>
+            </a:r>
+          </a:p>
+        </p:txBody>
+      </p:sp>
+      <p:sp>
+        <p:nvSpPr>
+          <p:cNvPr id="22" name="TextBox 21"/>
+          <p:cNvSpPr txBox="1"/>
+          <p:nvPr/>
+        </p:nvSpPr>
+        <p:spPr>
+          <a:xfrm>
+            <a:off x="5779008" y="1719072"/>
+            <a:ext cx="2798063" cy="822960"/>
+          </a:xfrm>
+          <a:prstGeom prst="rect">
+            <a:avLst/>
+          </a:prstGeom>
+          <a:noFill/>
+        </p:spPr>
+        <p:txBody>
+          <a:bodyPr wrap="square" anchor="t">
+            <a:spAutoFit/>
+          </a:bodyPr>
+          <a:lstStyle/>
+          <a:p>
+            <a:pPr algn="l">
+              <a:spcAft>
+                <a:spcPts val="200"/>
+              </a:spcAft>
+            </a:pPr>
+            <a:r>
+              <a:rPr sz="1050" b="0" i="0">
+                <a:solidFill>
+                  <a:srgbClr val="000000"/>
+                </a:solidFill>
+                <a:latin typeface="Arial"/>
+              </a:rPr>
+              <a:t>One model call that reads the brief, the rules' labels and the last turns, then decides what to do next. It does not touch the inbox itself.</a:t>
+            </a:r>
+          </a:p>
+        </p:txBody>
+      </p:sp>
+      <p:sp>
+        <p:nvSpPr>
+          <p:cNvPr id="23" name="Rectangle 22"/>
+          <p:cNvSpPr/>
+          <p:nvPr/>
+        </p:nvSpPr>
+        <p:spPr>
+          <a:xfrm>
+            <a:off x="5669280" y="3017520"/>
+            <a:ext cx="3017520" cy="1097280"/>
+          </a:xfrm>
+          <a:prstGeom prst="rect">
+            <a:avLst/>
+          </a:prstGeom>
+          <a:solidFill>
+            <a:srgbClr val="FFFFFF"/>
+          </a:solidFill>
+          <a:ln w="19050">
+            <a:solidFill>
+              <a:srgbClr val="B9975B"/>
+            </a:solidFill>
+          </a:ln>
+          <a:effectLst/>
+        </p:spPr>
+        <p:style>
+          <a:lnRef idx="1">
+            <a:schemeClr val="accent1"/>
+          </a:lnRef>
+          <a:fillRef idx="3">
+            <a:schemeClr val="accent1"/>
+          </a:fillRef>
+          <a:effectRef idx="2">
+            <a:schemeClr val="accent1"/>
+          </a:effectRef>
+          <a:fontRef idx="minor">
+            <a:schemeClr val="lt1"/>
+          </a:fontRef>
+        </p:style>
+        <p:txBody>
+          <a:bodyPr rtlCol="0" anchor="ctr"/>
+          <a:lstStyle/>
+          <a:p>
+            <a:pPr algn="ctr"/>
+          </a:p>
+        </p:txBody>
+      </p:sp>
+      <p:sp>
+        <p:nvSpPr>
+          <p:cNvPr id="24" name="TextBox 23"/>
+          <p:cNvSpPr txBox="1"/>
+          <p:nvPr/>
+        </p:nvSpPr>
+        <p:spPr>
+          <a:xfrm>
+            <a:off x="5779008" y="3090672"/>
+            <a:ext cx="2798063" cy="292608"/>
+          </a:xfrm>
+          <a:prstGeom prst="rect">
+            <a:avLst/>
+          </a:prstGeom>
+          <a:noFill/>
+        </p:spPr>
+        <p:txBody>
+          <a:bodyPr wrap="square" anchor="t">
+            <a:spAutoFit/>
+          </a:bodyPr>
+          <a:lstStyle/>
+          <a:p>
+            <a:pPr algn="l">
+              <a:spcAft>
+                <a:spcPts val="400"/>
+              </a:spcAft>
+            </a:pPr>
+            <a:r>
+              <a:rPr sz="1050" b="1" i="0">
+                <a:solidFill>
+                  <a:srgbClr val="8A6A2E"/>
+                </a:solidFill>
+                <a:latin typeface="Arial"/>
+              </a:rPr>
+              <a:t>MEMORY, HONESTLY</a:t>
+            </a:r>
+          </a:p>
+        </p:txBody>
+      </p:sp>
+      <p:sp>
+        <p:nvSpPr>
+          <p:cNvPr id="25" name="TextBox 24"/>
+          <p:cNvSpPr txBox="1"/>
+          <p:nvPr/>
+        </p:nvSpPr>
+        <p:spPr>
+          <a:xfrm>
+            <a:off x="5779008" y="3364991"/>
+            <a:ext cx="2798063" cy="685800"/>
+          </a:xfrm>
+          <a:prstGeom prst="rect">
+            <a:avLst/>
+          </a:prstGeom>
+          <a:noFill/>
+        </p:spPr>
+        <p:txBody>
+          <a:bodyPr wrap="square" anchor="t">
+            <a:spAutoFit/>
+          </a:bodyPr>
+          <a:lstStyle/>
+          <a:p>
+            <a:pPr algn="l">
+              <a:spcAft>
+                <a:spcPts val="200"/>
+              </a:spcAft>
+            </a:pPr>
+            <a:r>
+              <a:rPr sz="1050" b="0" i="0">
+                <a:solidFill>
+                  <a:srgbClr val="000000"/>
+                </a:solidFill>
+                <a:latin typeface="Arial"/>
+              </a:rPr>
+              <a:t>The model remembers nothing between calls. What it knows is re-sent every time (working memory) or written down somewhere else.</a:t>
+            </a:r>
+          </a:p>
+        </p:txBody>
+      </p:sp>
+      <p:sp>
+        <p:nvSpPr>
+          <p:cNvPr id="26" name="Rounded Rectangle 25"/>
+          <p:cNvSpPr/>
+          <p:nvPr/>
+        </p:nvSpPr>
+        <p:spPr>
+          <a:xfrm>
+            <a:off x="548640" y="5650992"/>
+            <a:ext cx="256032" cy="164592"/>
+          </a:xfrm>
+          <a:prstGeom prst="roundRect">
+            <a:avLst/>
+          </a:prstGeom>
+          <a:solidFill>
+            <a:srgbClr val="E6F0F7"/>
+          </a:solidFill>
+          <a:ln w="12700">
+            <a:solidFill>
+              <a:srgbClr val="2C6C9C"/>
+            </a:solidFill>
+          </a:ln>
+          <a:effectLst/>
+        </p:spPr>
+        <p:style>
+          <a:lnRef idx="1">
+            <a:schemeClr val="accent1"/>
+          </a:lnRef>
+          <a:fillRef idx="3">
+            <a:schemeClr val="accent1"/>
+          </a:fillRef>
+          <a:effectRef idx="2">
+            <a:schemeClr val="accent1"/>
+          </a:effectRef>
+          <a:fontRef idx="minor">
+            <a:schemeClr val="lt1"/>
+          </a:fontRef>
+        </p:style>
+        <p:txBody>
+          <a:bodyPr rtlCol="0" anchor="ctr"/>
+          <a:lstStyle/>
+          <a:p>
+            <a:pPr algn="ctr"/>
+          </a:p>
+        </p:txBody>
+      </p:sp>
+      <p:sp>
+        <p:nvSpPr>
+          <p:cNvPr id="27" name="TextBox 26"/>
+          <p:cNvSpPr txBox="1"/>
+          <p:nvPr/>
+        </p:nvSpPr>
+        <p:spPr>
+          <a:xfrm>
+            <a:off x="859536" y="5596128"/>
+            <a:ext cx="1097280" cy="274320"/>
+          </a:xfrm>
+          <a:prstGeom prst="rect">
+            <a:avLst/>
+          </a:prstGeom>
+          <a:noFill/>
+        </p:spPr>
+        <p:txBody>
+          <a:bodyPr wrap="square" anchor="t">
+            <a:spAutoFit/>
+          </a:bodyPr>
+          <a:lstStyle/>
+          <a:p>
+            <a:pPr algn="l">
+              <a:spcAft>
+                <a:spcPts val="400"/>
+              </a:spcAft>
+            </a:pPr>
+            <a:r>
+              <a:rPr sz="1050" b="0" i="0">
+                <a:solidFill>
+                  <a:srgbClr val="6B7280"/>
+                </a:solidFill>
+                <a:latin typeface="Arial"/>
+              </a:rPr>
+              <a:t>deterministic</a:t>
+            </a:r>
+          </a:p>
+        </p:txBody>
+      </p:sp>
+      <p:sp>
+        <p:nvSpPr>
+          <p:cNvPr id="28" name="Rounded Rectangle 27"/>
+          <p:cNvSpPr/>
+          <p:nvPr/>
+        </p:nvSpPr>
+        <p:spPr>
+          <a:xfrm>
+            <a:off x="1965960" y="5650992"/>
+            <a:ext cx="256032" cy="164592"/>
+          </a:xfrm>
+          <a:prstGeom prst="roundRect">
+            <a:avLst/>
+          </a:prstGeom>
+          <a:solidFill>
+            <a:srgbClr val="EEEAF9"/>
+          </a:solidFill>
+          <a:ln w="12700">
+            <a:solidFill>
+              <a:srgbClr val="5E48B8"/>
+            </a:solidFill>
+          </a:ln>
+          <a:effectLst/>
+        </p:spPr>
+        <p:style>
+          <a:lnRef idx="1">
+            <a:schemeClr val="accent1"/>
+          </a:lnRef>
+          <a:fillRef idx="3">
+            <a:schemeClr val="accent1"/>
+          </a:fillRef>
+          <a:effectRef idx="2">
+            <a:schemeClr val="accent1"/>
+          </a:effectRef>
+          <a:fontRef idx="minor">
+            <a:schemeClr val="lt1"/>
+          </a:fontRef>
+        </p:style>
+        <p:txBody>
+          <a:bodyPr rtlCol="0" anchor="ctr"/>
+          <a:lstStyle/>
+          <a:p>
+            <a:pPr algn="ctr"/>
+          </a:p>
+        </p:txBody>
+      </p:sp>
+      <p:sp>
+        <p:nvSpPr>
+          <p:cNvPr id="29" name="TextBox 28"/>
+          <p:cNvSpPr txBox="1"/>
+          <p:nvPr/>
+        </p:nvSpPr>
+        <p:spPr>
+          <a:xfrm>
+            <a:off x="2276856" y="5596128"/>
+            <a:ext cx="1097280" cy="274320"/>
+          </a:xfrm>
+          <a:prstGeom prst="rect">
+            <a:avLst/>
+          </a:prstGeom>
+          <a:noFill/>
+        </p:spPr>
+        <p:txBody>
+          <a:bodyPr wrap="square" anchor="t">
+            <a:spAutoFit/>
+          </a:bodyPr>
+          <a:lstStyle/>
+          <a:p>
+            <a:pPr algn="l">
+              <a:spcAft>
+                <a:spcPts val="400"/>
+              </a:spcAft>
+            </a:pPr>
+            <a:r>
+              <a:rPr sz="1050" b="0" i="0">
+                <a:solidFill>
+                  <a:srgbClr val="6B7280"/>
+                </a:solidFill>
+                <a:latin typeface="Arial"/>
+              </a:rPr>
+              <a:t>agent</a:t>
+            </a:r>
+          </a:p>
+        </p:txBody>
+      </p:sp>
+      <p:sp>
+        <p:nvSpPr>
+          <p:cNvPr id="30" name="Rounded Rectangle 29"/>
+          <p:cNvSpPr/>
+          <p:nvPr/>
+        </p:nvSpPr>
+        <p:spPr>
+          <a:xfrm>
+            <a:off x="3383280" y="5650992"/>
+            <a:ext cx="256032" cy="164592"/>
+          </a:xfrm>
+          <a:prstGeom prst="roundRect">
+            <a:avLst/>
+          </a:prstGeom>
+          <a:solidFill>
+            <a:srgbClr val="EEEAF9"/>
+          </a:solidFill>
+          <a:ln w="12700">
+            <a:solidFill>
+              <a:srgbClr val="5E48B8"/>
+            </a:solidFill>
+            <a:prstDash val="dash"/>
+          </a:ln>
+          <a:effectLst/>
+        </p:spPr>
+        <p:style>
+          <a:lnRef idx="1">
+            <a:schemeClr val="accent1"/>
+          </a:lnRef>
+          <a:fillRef idx="3">
+            <a:schemeClr val="accent1"/>
+          </a:fillRef>
+          <a:effectRef idx="2">
+            <a:schemeClr val="accent1"/>
+          </a:effectRef>
+          <a:fontRef idx="minor">
+            <a:schemeClr val="lt1"/>
+          </a:fontRef>
+        </p:style>
+        <p:txBody>
+          <a:bodyPr rtlCol="0" anchor="ctr"/>
+          <a:lstStyle/>
+          <a:p>
+            <a:pPr algn="ctr"/>
+          </a:p>
+        </p:txBody>
+      </p:sp>
+      <p:sp>
+        <p:nvSpPr>
+          <p:cNvPr id="31" name="TextBox 30"/>
+          <p:cNvSpPr txBox="1"/>
+          <p:nvPr/>
+        </p:nvSpPr>
+        <p:spPr>
+          <a:xfrm>
+            <a:off x="3694176" y="5596128"/>
+            <a:ext cx="1097280" cy="274320"/>
+          </a:xfrm>
+          <a:prstGeom prst="rect">
+            <a:avLst/>
+          </a:prstGeom>
+          <a:noFill/>
+        </p:spPr>
+        <p:txBody>
+          <a:bodyPr wrap="square" anchor="t">
+            <a:spAutoFit/>
+          </a:bodyPr>
+          <a:lstStyle/>
+          <a:p>
+            <a:pPr algn="l">
+              <a:spcAft>
+                <a:spcPts val="400"/>
+              </a:spcAft>
+            </a:pPr>
+            <a:r>
+              <a:rPr sz="1050" b="0" i="0">
+                <a:solidFill>
+                  <a:srgbClr val="6B7280"/>
+                </a:solidFill>
+                <a:latin typeface="Arial"/>
+              </a:rPr>
+              <a:t>brief &amp; skills</a:t>
+            </a:r>
+          </a:p>
+        </p:txBody>
+      </p:sp>
+      <p:sp>
+        <p:nvSpPr>
+          <p:cNvPr id="32" name="Rounded Rectangle 31"/>
+          <p:cNvSpPr/>
+          <p:nvPr/>
+        </p:nvSpPr>
+        <p:spPr>
+          <a:xfrm>
+            <a:off x="548640" y="5925312"/>
+            <a:ext cx="256032" cy="164592"/>
+          </a:xfrm>
+          <a:prstGeom prst="roundRect">
+            <a:avLst/>
+          </a:prstGeom>
+          <a:solidFill>
+            <a:srgbClr val="F3F4F7"/>
+          </a:solidFill>
+          <a:ln w="12700">
+            <a:solidFill>
+              <a:srgbClr val="6B7280"/>
+            </a:solidFill>
+            <a:prstDash val="dash"/>
+          </a:ln>
+          <a:effectLst/>
+        </p:spPr>
+        <p:style>
+          <a:lnRef idx="1">
+            <a:schemeClr val="accent1"/>
+          </a:lnRef>
+          <a:fillRef idx="3">
+            <a:schemeClr val="accent1"/>
+          </a:fillRef>
+          <a:effectRef idx="2">
+            <a:schemeClr val="accent1"/>
+          </a:effectRef>
+          <a:fontRef idx="minor">
+            <a:schemeClr val="lt1"/>
+          </a:fontRef>
+        </p:style>
+        <p:txBody>
+          <a:bodyPr rtlCol="0" anchor="ctr"/>
+          <a:lstStyle/>
+          <a:p>
+            <a:pPr algn="ctr"/>
+          </a:p>
+        </p:txBody>
+      </p:sp>
+      <p:sp>
+        <p:nvSpPr>
+          <p:cNvPr id="33" name="TextBox 32"/>
+          <p:cNvSpPr txBox="1"/>
+          <p:nvPr/>
+        </p:nvSpPr>
+        <p:spPr>
+          <a:xfrm>
+            <a:off x="859536" y="5870448"/>
+            <a:ext cx="1097280" cy="274320"/>
+          </a:xfrm>
+          <a:prstGeom prst="rect">
+            <a:avLst/>
+          </a:prstGeom>
+          <a:noFill/>
+        </p:spPr>
+        <p:txBody>
+          <a:bodyPr wrap="square" anchor="t">
+            <a:spAutoFit/>
+          </a:bodyPr>
+          <a:lstStyle/>
+          <a:p>
+            <a:pPr algn="l">
+              <a:spcAft>
+                <a:spcPts val="400"/>
+              </a:spcAft>
+            </a:pPr>
+            <a:r>
+              <a:rPr sz="1050" b="0" i="0">
+                <a:solidFill>
+                  <a:srgbClr val="6B7280"/>
+                </a:solidFill>
+                <a:latin typeface="Arial"/>
+              </a:rPr>
+              <a:t>memory</a:t>
+            </a:r>
+          </a:p>
+        </p:txBody>
+      </p:sp>
+      <p:sp>
+        <p:nvSpPr>
+          <p:cNvPr id="34" name="Rounded Rectangle 33"/>
+          <p:cNvSpPr/>
+          <p:nvPr/>
+        </p:nvSpPr>
+        <p:spPr>
+          <a:xfrm>
+            <a:off x="1965960" y="5925312"/>
+            <a:ext cx="256032" cy="164592"/>
+          </a:xfrm>
+          <a:prstGeom prst="roundRect">
+            <a:avLst/>
+          </a:prstGeom>
+          <a:solidFill>
+            <a:srgbClr val="FBF1E0"/>
+          </a:solidFill>
+          <a:ln w="12700">
+            <a:solidFill>
+              <a:srgbClr val="B4761C"/>
+            </a:solidFill>
+          </a:ln>
+          <a:effectLst/>
+        </p:spPr>
+        <p:style>
+          <a:lnRef idx="1">
+            <a:schemeClr val="accent1"/>
+          </a:lnRef>
+          <a:fillRef idx="3">
+            <a:schemeClr val="accent1"/>
+          </a:fillRef>
+          <a:effectRef idx="2">
+            <a:schemeClr val="accent1"/>
+          </a:effectRef>
+          <a:fontRef idx="minor">
+            <a:schemeClr val="lt1"/>
+          </a:fontRef>
+        </p:style>
+        <p:txBody>
+          <a:bodyPr rtlCol="0" anchor="ctr"/>
+          <a:lstStyle/>
+          <a:p>
+            <a:pPr algn="ctr"/>
+          </a:p>
+        </p:txBody>
+      </p:sp>
+      <p:sp>
+        <p:nvSpPr>
+          <p:cNvPr id="35" name="TextBox 34"/>
+          <p:cNvSpPr txBox="1"/>
+          <p:nvPr/>
+        </p:nvSpPr>
+        <p:spPr>
+          <a:xfrm>
+            <a:off x="2276856" y="5870448"/>
+            <a:ext cx="1097280" cy="274320"/>
+          </a:xfrm>
+          <a:prstGeom prst="rect">
+            <a:avLst/>
+          </a:prstGeom>
+          <a:noFill/>
+        </p:spPr>
+        <p:txBody>
+          <a:bodyPr wrap="square" anchor="t">
+            <a:spAutoFit/>
+          </a:bodyPr>
+          <a:lstStyle/>
+          <a:p>
+            <a:pPr algn="l">
+              <a:spcAft>
+                <a:spcPts val="400"/>
+              </a:spcAft>
+            </a:pPr>
+            <a:r>
+              <a:rPr sz="1050" b="0" i="0">
+                <a:solidFill>
+                  <a:srgbClr val="6B7280"/>
+                </a:solidFill>
+                <a:latin typeface="Arial"/>
+              </a:rPr>
+              <a:t>human</a:t>
+            </a:r>
+          </a:p>
+        </p:txBody>
+      </p:sp>
+      <p:sp>
+        <p:nvSpPr>
+          <p:cNvPr id="36" name="TextBox 35"/>
+          <p:cNvSpPr txBox="1"/>
+          <p:nvPr/>
+        </p:nvSpPr>
+        <p:spPr>
+          <a:xfrm>
+            <a:off x="822960" y="6327648"/>
+            <a:ext cx="9692640" cy="457200"/>
+          </a:xfrm>
+          <a:prstGeom prst="rect">
+            <a:avLst/>
+          </a:prstGeom>
+          <a:noFill/>
+        </p:spPr>
+        <p:txBody>
+          <a:bodyPr wrap="square" anchor="t">
+            <a:spAutoFit/>
+          </a:bodyPr>
+          <a:lstStyle/>
+          <a:p>
+            <a:pPr algn="l">
+              <a:spcAft>
+                <a:spcPts val="400"/>
+              </a:spcAft>
+            </a:pPr>
+            <a:r>
+              <a:rPr sz="1050" b="0" i="1">
+                <a:solidFill>
+                  <a:srgbClr val="002060"/>
+                </a:solidFill>
+                <a:latin typeface="Arial"/>
+              </a:rPr>
+              <a:t>One person, one orchestrator. It reads the brief and the rules' labels, keeps a working memory for this request, and decides.</a:t>
+            </a:r>
+          </a:p>
+        </p:txBody>
+      </p:sp>
+    </p:spTree>
+  </p:cSld>
+  <p:clrMapOvr>
+    <a:masterClrMapping/>
+  </p:clrMapOvr>
+</p:sld>
+</file>
+
+<file path=ppt/slides/slide5.xml><?xml version="1.0" encoding="utf-8"?>
+<p:sld xmlns:a="http://schemas.openxmlformats.org/drawingml/2006/main" xmlns:p="http://schemas.openxmlformats.org/presentationml/2006/main" xmlns:r="http://schemas.openxmlformats.org/officeDocument/2006/relationships">
+  <p:cSld>
+    <p:spTree>
+      <p:nvGrpSpPr>
+        <p:cNvPr id="1" name=""/>
+        <p:cNvGrpSpPr/>
+        <p:nvPr/>
+      </p:nvGrpSpPr>
+      <p:grpSpPr/>
+      <p:sp>
+        <p:nvSpPr>
+          <p:cNvPr id="2" name="TextBox 1"/>
+          <p:cNvSpPr txBox="1"/>
+          <p:nvPr/>
+        </p:nvSpPr>
+        <p:spPr>
+          <a:xfrm>
+            <a:off x="9893808" y="6492240"/>
+            <a:ext cx="2084831" cy="274320"/>
+          </a:xfrm>
+          <a:prstGeom prst="rect">
+            <a:avLst/>
+          </a:prstGeom>
+          <a:noFill/>
+        </p:spPr>
+        <p:txBody>
+          <a:bodyPr wrap="square" anchor="t">
+            <a:spAutoFit/>
+          </a:bodyPr>
+          <a:lstStyle/>
+          <a:p>
+            <a:pPr algn="r">
+              <a:spcAft>
+                <a:spcPts val="400"/>
+              </a:spcAft>
+            </a:pPr>
+            <a:r>
+              <a:rPr sz="1000" b="0" i="0">
+                <a:solidFill>
+                  <a:srgbClr val="6B7280"/>
+                </a:solidFill>
+                <a:latin typeface="Arial"/>
+              </a:rPr>
+              <a:t>5</a:t>
+            </a:r>
+          </a:p>
+        </p:txBody>
+      </p:sp>
+      <p:sp>
+        <p:nvSpPr>
+          <p:cNvPr id="3" name="TextBox 2"/>
+          <p:cNvSpPr txBox="1"/>
+          <p:nvPr/>
+        </p:nvSpPr>
+        <p:spPr>
+          <a:xfrm>
+            <a:off x="838047" y="192024"/>
+            <a:ext cx="10515600" cy="813816"/>
+          </a:xfrm>
+          <a:prstGeom prst="rect">
+            <a:avLst/>
+          </a:prstGeom>
+          <a:noFill/>
+        </p:spPr>
+        <p:txBody>
+          <a:bodyPr wrap="square" anchor="ctr">
+            <a:spAutoFit/>
+          </a:bodyPr>
+          <a:lstStyle/>
+          <a:p>
+            <a:pPr algn="ctr">
+              <a:spcAft>
+                <a:spcPts val="400"/>
+              </a:spcAft>
+            </a:pPr>
+            <a:r>
+              <a:rPr sz="2800" b="1" i="0">
+                <a:solidFill>
+                  <a:srgbClr val="002060"/>
+                </a:solidFill>
+                <a:latin typeface="Arial"/>
+              </a:rPr>
+              <a:t>HOW THE AGENT WORKS · 2 OF 3</a:t>
+            </a:r>
+          </a:p>
+        </p:txBody>
+      </p:sp>
+      <p:cxnSp>
+        <p:nvCxnSpPr>
+          <p:cNvPr id="4" name="Connector 3"/>
+          <p:cNvCxnSpPr/>
+          <p:nvPr/>
+        </p:nvCxnSpPr>
+        <p:spPr>
+          <a:xfrm>
+            <a:off x="0" y="1097280"/>
+            <a:ext cx="12191695" cy="0"/>
+          </a:xfrm>
+          <a:prstGeom prst="line">
+            <a:avLst/>
+          </a:prstGeom>
+          <a:ln w="9525">
+            <a:solidFill>
+              <a:srgbClr val="D5DBE2"/>
+            </a:solidFill>
+          </a:ln>
+        </p:spPr>
+        <p:style>
+          <a:lnRef idx="2">
+            <a:schemeClr val="accent1"/>
+          </a:lnRef>
+          <a:fillRef idx="0">
+            <a:schemeClr val="accent1"/>
+          </a:fillRef>
+          <a:effectRef idx="1">
+            <a:schemeClr val="accent1"/>
+          </a:effectRef>
+          <a:fontRef idx="minor">
+            <a:schemeClr val="tx1"/>
+          </a:fontRef>
+        </p:style>
+      </p:cxnSp>
+      <p:cxnSp>
+        <p:nvCxnSpPr>
+          <p:cNvPr id="5" name="Connector 4"/>
+          <p:cNvCxnSpPr/>
+          <p:nvPr/>
+        </p:nvCxnSpPr>
+        <p:spPr>
+          <a:xfrm>
+            <a:off x="5952744" y="1133856"/>
+            <a:ext cx="292608" cy="0"/>
+          </a:xfrm>
+          <a:prstGeom prst="line">
+            <a:avLst/>
+          </a:prstGeom>
+          <a:ln w="76200">
+            <a:solidFill>
+              <a:srgbClr val="00305C"/>
+            </a:solidFill>
+          </a:ln>
+        </p:spPr>
+        <p:style>
+          <a:lnRef idx="2">
+            <a:schemeClr val="accent1"/>
+          </a:lnRef>
+          <a:fillRef idx="0">
+            <a:schemeClr val="accent1"/>
+          </a:fillRef>
+          <a:effectRef idx="1">
+            <a:schemeClr val="accent1"/>
+          </a:effectRef>
+          <a:fontRef idx="minor">
+            <a:schemeClr val="tx1"/>
+          </a:fontRef>
+        </p:style>
+      </p:cxnSp>
+      <p:sp>
+        <p:nvSpPr>
+          <p:cNvPr id="6" name="Rounded Rectangle 5"/>
+          <p:cNvSpPr/>
+          <p:nvPr/>
+        </p:nvSpPr>
+        <p:spPr>
+          <a:xfrm>
+            <a:off x="10424160" y="502920"/>
+            <a:ext cx="1188720" cy="365760"/>
+          </a:xfrm>
+          <a:prstGeom prst="roundRect">
+            <a:avLst/>
+          </a:prstGeom>
+          <a:solidFill>
+            <a:srgbClr val="00305C"/>
+          </a:solidFill>
+          <a:ln>
+            <a:noFill/>
+          </a:ln>
+          <a:effectLst/>
+        </p:spPr>
+        <p:style>
+          <a:lnRef idx="1">
+            <a:schemeClr val="accent1"/>
+          </a:lnRef>
+          <a:fillRef idx="3">
+            <a:schemeClr val="accent1"/>
+          </a:fillRef>
+          <a:effectRef idx="2">
+            <a:schemeClr val="accent1"/>
+          </a:effectRef>
+          <a:fontRef idx="minor">
+            <a:schemeClr val="lt1"/>
+          </a:fontRef>
+        </p:style>
+        <p:txBody>
+          <a:bodyPr rtlCol="0" anchor="ctr" tIns="0" bIns="0"/>
+          <a:lstStyle/>
+          <a:p>
+            <a:pPr algn="ctr"/>
+            <a:r>
+              <a:rPr sz="1200" b="1" i="0">
+                <a:solidFill>
+                  <a:srgbClr val="FFFFFF"/>
+                </a:solidFill>
+                <a:latin typeface="Arial"/>
+              </a:rPr>
+              <a:t>2 / 3</a:t>
+            </a:r>
+          </a:p>
+        </p:txBody>
+      </p:sp>
+      <p:sp>
+        <p:nvSpPr>
+          <p:cNvPr id="7" name="Rounded Rectangle 6"/>
+          <p:cNvSpPr/>
+          <p:nvPr/>
+        </p:nvSpPr>
+        <p:spPr>
+          <a:xfrm>
+            <a:off x="548640" y="1371600"/>
+            <a:ext cx="1737360" cy="713232"/>
+          </a:xfrm>
+          <a:prstGeom prst="roundRect">
+            <a:avLst>
+              <a:gd name="adj" fmla="val 12000"/>
+            </a:avLst>
+          </a:prstGeom>
+          <a:solidFill>
+            <a:srgbClr val="EEEAF9"/>
+          </a:solidFill>
+          <a:ln w="15875">
+            <a:solidFill>
+              <a:srgbClr val="5E48B8"/>
+            </a:solidFill>
+            <a:prstDash val="dash"/>
+          </a:ln>
+          <a:effectLst/>
+        </p:spPr>
+        <p:style>
+          <a:lnRef idx="1">
+            <a:schemeClr val="accent1"/>
+          </a:lnRef>
+          <a:fillRef idx="3">
+            <a:schemeClr val="accent1"/>
+          </a:fillRef>
+          <a:effectRef idx="2">
+            <a:schemeClr val="accent1"/>
+          </a:effectRef>
+          <a:fontRef idx="minor">
+            <a:schemeClr val="lt1"/>
+          </a:fontRef>
+        </p:style>
+        <p:txBody>
+          <a:bodyPr rtlCol="0" anchor="ctr" wrap="square" lIns="54864" rIns="54864" tIns="27432" bIns="27432"/>
+          <a:lstStyle/>
+          <a:p>
+            <a:pPr algn="ctr"/>
+            <a:r>
+              <a:rPr sz="1200" b="1" i="0">
+                <a:solidFill>
+                  <a:srgbClr val="000000"/>
+                </a:solidFill>
+                <a:latin typeface="Arial"/>
+              </a:rPr>
+              <a:t>Brief &amp; skills</a:t>
+            </a:r>
+          </a:p>
+          <a:p>
+            <a:pPr algn="ctr"/>
+            <a:r>
+              <a:rPr sz="900" b="0" i="0">
+                <a:solidFill>
+                  <a:srgbClr val="6B7280"/>
+                </a:solidFill>
+                <a:latin typeface="Arial"/>
+              </a:rPr>
+              <a:t>how to triage, when to escalate, what never to do</a:t>
+            </a:r>
+          </a:p>
+        </p:txBody>
+      </p:sp>
+      <p:sp>
+        <p:nvSpPr>
+          <p:cNvPr id="8" name="Rounded Rectangle 7"/>
+          <p:cNvSpPr/>
+          <p:nvPr/>
+        </p:nvSpPr>
+        <p:spPr>
+          <a:xfrm>
+            <a:off x="548640" y="3017520"/>
+            <a:ext cx="1554480" cy="777240"/>
+          </a:xfrm>
+          <a:prstGeom prst="roundRect">
+            <a:avLst>
+              <a:gd name="adj" fmla="val 12000"/>
+            </a:avLst>
+          </a:prstGeom>
+          <a:solidFill>
+            <a:srgbClr val="FBF1E0"/>
+          </a:solidFill>
+          <a:ln w="15875">
+            <a:solidFill>
+              <a:srgbClr val="B4761C"/>
+            </a:solidFill>
+          </a:ln>
+          <a:effectLst/>
+        </p:spPr>
+        <p:style>
+          <a:lnRef idx="1">
+            <a:schemeClr val="accent1"/>
+          </a:lnRef>
+          <a:fillRef idx="3">
+            <a:schemeClr val="accent1"/>
+          </a:fillRef>
+          <a:effectRef idx="2">
+            <a:schemeClr val="accent1"/>
+          </a:effectRef>
+          <a:fontRef idx="minor">
+            <a:schemeClr val="lt1"/>
+          </a:fontRef>
+        </p:style>
+        <p:txBody>
+          <a:bodyPr rtlCol="0" anchor="ctr" wrap="square" lIns="54864" rIns="54864" tIns="27432" bIns="27432"/>
+          <a:lstStyle/>
+          <a:p>
+            <a:pPr algn="ctr"/>
+            <a:r>
+              <a:rPr sz="1200" b="1" i="0">
+                <a:solidFill>
+                  <a:srgbClr val="000000"/>
+                </a:solidFill>
+                <a:latin typeface="Arial"/>
+              </a:rPr>
+              <a:t>Human user</a:t>
+            </a:r>
+          </a:p>
+          <a:p>
+            <a:pPr algn="ctr"/>
+            <a:r>
+              <a:rPr sz="900" b="0" i="0">
+                <a:solidFill>
+                  <a:srgbClr val="6B7280"/>
+                </a:solidFill>
+                <a:latin typeface="Arial"/>
+              </a:rPr>
+              <a:t>asks in plain language</a:t>
+            </a:r>
+          </a:p>
+        </p:txBody>
+      </p:sp>
+      <p:sp>
+        <p:nvSpPr>
+          <p:cNvPr id="9" name="Rounded Rectangle 8"/>
+          <p:cNvSpPr/>
+          <p:nvPr/>
+        </p:nvSpPr>
+        <p:spPr>
+          <a:xfrm>
+            <a:off x="548640" y="4389120"/>
+            <a:ext cx="1737360" cy="868680"/>
+          </a:xfrm>
+          <a:prstGeom prst="roundRect">
+            <a:avLst>
+              <a:gd name="adj" fmla="val 12000"/>
+            </a:avLst>
+          </a:prstGeom>
+          <a:solidFill>
+            <a:srgbClr val="F3F4F7"/>
+          </a:solidFill>
+          <a:ln w="15875">
+            <a:solidFill>
+              <a:srgbClr val="6B7280"/>
+            </a:solidFill>
+            <a:prstDash val="dash"/>
+          </a:ln>
+          <a:effectLst/>
+        </p:spPr>
+        <p:style>
+          <a:lnRef idx="1">
+            <a:schemeClr val="accent1"/>
+          </a:lnRef>
+          <a:fillRef idx="3">
+            <a:schemeClr val="accent1"/>
+          </a:fillRef>
+          <a:effectRef idx="2">
+            <a:schemeClr val="accent1"/>
+          </a:effectRef>
+          <a:fontRef idx="minor">
+            <a:schemeClr val="lt1"/>
+          </a:fontRef>
+        </p:style>
+        <p:txBody>
+          <a:bodyPr rtlCol="0" anchor="ctr" wrap="square" lIns="54864" rIns="54864" tIns="27432" bIns="27432"/>
+          <a:lstStyle/>
+          <a:p>
+            <a:pPr algn="ctr"/>
+            <a:r>
+              <a:rPr sz="1200" b="1" i="0">
+                <a:solidFill>
+                  <a:srgbClr val="000000"/>
+                </a:solidFill>
+                <a:latin typeface="Arial"/>
+              </a:rPr>
+              <a:t>Working memory</a:t>
+            </a:r>
+          </a:p>
+          <a:p>
+            <a:pPr algn="ctr"/>
+            <a:r>
+              <a:rPr sz="900" b="0" i="0">
+                <a:solidFill>
+                  <a:srgbClr val="6B7280"/>
+                </a:solidFill>
+                <a:latin typeface="Arial"/>
+              </a:rPr>
+              <a:t>the brief, the last turns, every tool result · rebuilt each call</a:t>
+            </a:r>
+          </a:p>
+        </p:txBody>
+      </p:sp>
+      <p:sp>
+        <p:nvSpPr>
+          <p:cNvPr id="10" name="Rounded Rectangle 9"/>
+          <p:cNvSpPr/>
+          <p:nvPr/>
+        </p:nvSpPr>
+        <p:spPr>
+          <a:xfrm>
+            <a:off x="2743200" y="1371600"/>
+            <a:ext cx="2011680" cy="640080"/>
+          </a:xfrm>
+          <a:prstGeom prst="roundRect">
+            <a:avLst>
+              <a:gd name="adj" fmla="val 12000"/>
+            </a:avLst>
+          </a:prstGeom>
+          <a:solidFill>
+            <a:srgbClr val="E6F0F7"/>
+          </a:solidFill>
+          <a:ln w="15875">
+            <a:solidFill>
+              <a:srgbClr val="2C6C9C"/>
+            </a:solidFill>
+          </a:ln>
+          <a:effectLst/>
+        </p:spPr>
+        <p:style>
+          <a:lnRef idx="1">
+            <a:schemeClr val="accent1"/>
+          </a:lnRef>
+          <a:fillRef idx="3">
+            <a:schemeClr val="accent1"/>
+          </a:fillRef>
+          <a:effectRef idx="2">
+            <a:schemeClr val="accent1"/>
+          </a:effectRef>
+          <a:fontRef idx="minor">
+            <a:schemeClr val="lt1"/>
+          </a:fontRef>
+        </p:style>
+        <p:txBody>
+          <a:bodyPr rtlCol="0" anchor="ctr" wrap="square" lIns="54864" rIns="54864" tIns="27432" bIns="27432"/>
+          <a:lstStyle/>
+          <a:p>
+            <a:pPr algn="ctr"/>
+            <a:r>
+              <a:rPr sz="1200" b="1" i="0">
+                <a:solidFill>
+                  <a:srgbClr val="000000"/>
+                </a:solidFill>
+                <a:latin typeface="Arial"/>
+              </a:rPr>
+              <a:t>Rules engine</a:t>
+            </a:r>
+          </a:p>
+          <a:p>
+            <a:pPr algn="ctr"/>
+            <a:r>
+              <a:rPr sz="900" b="0" i="0">
+                <a:solidFill>
+                  <a:srgbClr val="6B7280"/>
+                </a:solidFill>
+                <a:latin typeface="Arial"/>
+              </a:rPr>
+              <a:t>deterministic · runs before the agents</a:t>
+            </a:r>
+          </a:p>
+        </p:txBody>
+      </p:sp>
+      <p:sp>
+        <p:nvSpPr>
+          <p:cNvPr id="11" name="Rounded Rectangle 10"/>
+          <p:cNvSpPr/>
+          <p:nvPr/>
+        </p:nvSpPr>
+        <p:spPr>
+          <a:xfrm>
+            <a:off x="2743200" y="2743200"/>
+            <a:ext cx="2011680" cy="1234440"/>
+          </a:xfrm>
+          <a:prstGeom prst="roundRect">
+            <a:avLst>
+              <a:gd name="adj" fmla="val 12000"/>
+            </a:avLst>
+          </a:prstGeom>
+          <a:solidFill>
+            <a:srgbClr val="EEEAF9"/>
+          </a:solidFill>
+          <a:ln w="15875">
+            <a:solidFill>
+              <a:srgbClr val="5E48B8"/>
+            </a:solidFill>
+          </a:ln>
+          <a:effectLst/>
+        </p:spPr>
+        <p:style>
+          <a:lnRef idx="1">
+            <a:schemeClr val="accent1"/>
+          </a:lnRef>
+          <a:fillRef idx="3">
+            <a:schemeClr val="accent1"/>
+          </a:fillRef>
+          <a:effectRef idx="2">
+            <a:schemeClr val="accent1"/>
+          </a:effectRef>
+          <a:fontRef idx="minor">
+            <a:schemeClr val="lt1"/>
+          </a:fontRef>
+        </p:style>
+        <p:txBody>
+          <a:bodyPr rtlCol="0" anchor="ctr" wrap="square" lIns="54864" rIns="54864" tIns="27432" bIns="27432"/>
+          <a:lstStyle/>
+          <a:p>
+            <a:pPr algn="ctr"/>
+            <a:r>
+              <a:rPr sz="1200" b="1" i="0">
+                <a:solidFill>
+                  <a:srgbClr val="000000"/>
+                </a:solidFill>
+                <a:latin typeface="Arial"/>
+              </a:rPr>
+              <a:t>Orchestrator agent</a:t>
+            </a:r>
+          </a:p>
+          <a:p>
+            <a:pPr algn="ctr"/>
+            <a:r>
+              <a:rPr sz="900" b="0" i="0">
+                <a:solidFill>
+                  <a:srgbClr val="6B7280"/>
+                </a:solidFill>
+                <a:latin typeface="Arial"/>
+              </a:rPr>
+              <a:t>plans, delegates, reports · own tools: stats, search, read</a:t>
+            </a:r>
+          </a:p>
+        </p:txBody>
+      </p:sp>
+      <p:cxnSp>
+        <p:nvCxnSpPr>
+          <p:cNvPr id="12" name="Connector 11"/>
+          <p:cNvCxnSpPr/>
+          <p:nvPr/>
+        </p:nvCxnSpPr>
+        <p:spPr>
+          <a:xfrm>
+            <a:off x="2304288" y="1783080"/>
+            <a:ext cx="438912" cy="1051560"/>
+          </a:xfrm>
+          <a:prstGeom prst="line">
+            <a:avLst/>
+          </a:prstGeom>
+          <a:ln w="15875">
+            <a:solidFill>
+              <a:srgbClr val="5E48B8"/>
+            </a:solidFill>
+            <a:tailEnd type="triangle"/>
+          </a:ln>
+        </p:spPr>
+        <p:style>
+          <a:lnRef idx="2">
+            <a:schemeClr val="accent1"/>
+          </a:lnRef>
+          <a:fillRef idx="0">
+            <a:schemeClr val="accent1"/>
+          </a:fillRef>
+          <a:effectRef idx="1">
+            <a:schemeClr val="accent1"/>
+          </a:effectRef>
+          <a:fontRef idx="minor">
+            <a:schemeClr val="tx1"/>
+          </a:fontRef>
+        </p:style>
+      </p:cxnSp>
+      <p:cxnSp>
+        <p:nvCxnSpPr>
+          <p:cNvPr id="13" name="Connector 12"/>
+          <p:cNvCxnSpPr/>
+          <p:nvPr/>
+        </p:nvCxnSpPr>
+        <p:spPr>
+          <a:xfrm>
+            <a:off x="2121408" y="3291840"/>
+            <a:ext cx="603504" cy="0"/>
+          </a:xfrm>
+          <a:prstGeom prst="line">
+            <a:avLst/>
+          </a:prstGeom>
+          <a:ln w="15875">
+            <a:solidFill>
+              <a:srgbClr val="5E48B8"/>
+            </a:solidFill>
+            <a:tailEnd type="triangle"/>
+          </a:ln>
+        </p:spPr>
+        <p:style>
+          <a:lnRef idx="2">
+            <a:schemeClr val="accent1"/>
+          </a:lnRef>
+          <a:fillRef idx="0">
+            <a:schemeClr val="accent1"/>
+          </a:fillRef>
+          <a:effectRef idx="1">
+            <a:schemeClr val="accent1"/>
+          </a:effectRef>
+          <a:fontRef idx="minor">
+            <a:schemeClr val="tx1"/>
+          </a:fontRef>
+        </p:style>
+      </p:cxnSp>
+      <p:sp>
+        <p:nvSpPr>
+          <p:cNvPr id="14" name="TextBox 13"/>
+          <p:cNvSpPr txBox="1"/>
+          <p:nvPr/>
+        </p:nvSpPr>
+        <p:spPr>
+          <a:xfrm>
+            <a:off x="2103120" y="2999232"/>
+            <a:ext cx="640080" cy="274320"/>
+          </a:xfrm>
+          <a:prstGeom prst="rect">
+            <a:avLst/>
+          </a:prstGeom>
+          <a:noFill/>
+        </p:spPr>
+        <p:txBody>
+          <a:bodyPr wrap="square" anchor="t">
+            <a:spAutoFit/>
+          </a:bodyPr>
+          <a:lstStyle/>
+          <a:p>
+            <a:pPr algn="ctr">
+              <a:spcAft>
+                <a:spcPts val="400"/>
+              </a:spcAft>
+            </a:pPr>
+            <a:r>
+              <a:rPr sz="900" b="0" i="0">
+                <a:solidFill>
+                  <a:srgbClr val="6B7280"/>
+                </a:solidFill>
+                <a:latin typeface="Arial"/>
+              </a:rPr>
+              <a:t>request</a:t>
+            </a:r>
+          </a:p>
+        </p:txBody>
+      </p:sp>
+      <p:cxnSp>
+        <p:nvCxnSpPr>
+          <p:cNvPr id="15" name="Connector 14"/>
+          <p:cNvCxnSpPr/>
+          <p:nvPr/>
+        </p:nvCxnSpPr>
+        <p:spPr>
+          <a:xfrm flipH="1">
+            <a:off x="2121408" y="3611880"/>
+            <a:ext cx="603504" cy="0"/>
+          </a:xfrm>
+          <a:prstGeom prst="line">
+            <a:avLst/>
+          </a:prstGeom>
+          <a:ln w="15875">
+            <a:solidFill>
+              <a:srgbClr val="5E48B8"/>
+            </a:solidFill>
+            <a:prstDash val="dash"/>
+            <a:tailEnd type="triangle"/>
+          </a:ln>
+        </p:spPr>
+        <p:style>
+          <a:lnRef idx="2">
+            <a:schemeClr val="accent1"/>
+          </a:lnRef>
+          <a:fillRef idx="0">
+            <a:schemeClr val="accent1"/>
+          </a:fillRef>
+          <a:effectRef idx="1">
+            <a:schemeClr val="accent1"/>
+          </a:effectRef>
+          <a:fontRef idx="minor">
+            <a:schemeClr val="tx1"/>
+          </a:fontRef>
+        </p:style>
+      </p:cxnSp>
+      <p:sp>
+        <p:nvSpPr>
+          <p:cNvPr id="16" name="TextBox 15"/>
+          <p:cNvSpPr txBox="1"/>
+          <p:nvPr/>
+        </p:nvSpPr>
+        <p:spPr>
+          <a:xfrm>
+            <a:off x="2103120" y="3657600"/>
+            <a:ext cx="640080" cy="274320"/>
+          </a:xfrm>
+          <a:prstGeom prst="rect">
+            <a:avLst/>
+          </a:prstGeom>
+          <a:noFill/>
+        </p:spPr>
+        <p:txBody>
+          <a:bodyPr wrap="square" anchor="t">
+            <a:spAutoFit/>
+          </a:bodyPr>
+          <a:lstStyle/>
+          <a:p>
+            <a:pPr algn="ctr">
+              <a:spcAft>
+                <a:spcPts val="400"/>
+              </a:spcAft>
+            </a:pPr>
+            <a:r>
+              <a:rPr sz="900" b="0" i="0">
+                <a:solidFill>
+                  <a:srgbClr val="6B7280"/>
+                </a:solidFill>
+                <a:latin typeface="Arial"/>
+              </a:rPr>
+              <a:t>reply</a:t>
+            </a:r>
+          </a:p>
+        </p:txBody>
+      </p:sp>
+      <p:cxnSp>
+        <p:nvCxnSpPr>
+          <p:cNvPr id="17" name="Connector 16"/>
+          <p:cNvCxnSpPr/>
+          <p:nvPr/>
+        </p:nvCxnSpPr>
+        <p:spPr>
+          <a:xfrm>
+            <a:off x="3749039" y="2029968"/>
+            <a:ext cx="0" cy="694944"/>
+          </a:xfrm>
+          <a:prstGeom prst="line">
+            <a:avLst/>
+          </a:prstGeom>
+          <a:ln w="15875">
+            <a:solidFill>
+              <a:srgbClr val="6B7280"/>
+            </a:solidFill>
+            <a:tailEnd type="triangle"/>
+          </a:ln>
+        </p:spPr>
+        <p:style>
+          <a:lnRef idx="2">
+            <a:schemeClr val="accent1"/>
+          </a:lnRef>
+          <a:fillRef idx="0">
+            <a:schemeClr val="accent1"/>
+          </a:fillRef>
+          <a:effectRef idx="1">
+            <a:schemeClr val="accent1"/>
+          </a:effectRef>
+          <a:fontRef idx="minor">
+            <a:schemeClr val="tx1"/>
+          </a:fontRef>
+        </p:style>
+      </p:cxnSp>
+      <p:sp>
+        <p:nvSpPr>
+          <p:cNvPr id="18" name="TextBox 17"/>
+          <p:cNvSpPr txBox="1"/>
+          <p:nvPr/>
+        </p:nvSpPr>
+        <p:spPr>
+          <a:xfrm>
+            <a:off x="3822191" y="2240280"/>
+            <a:ext cx="731520" cy="274320"/>
+          </a:xfrm>
+          <a:prstGeom prst="rect">
+            <a:avLst/>
+          </a:prstGeom>
+          <a:noFill/>
+        </p:spPr>
+        <p:txBody>
+          <a:bodyPr wrap="square" anchor="t">
+            <a:spAutoFit/>
+          </a:bodyPr>
+          <a:lstStyle/>
+          <a:p>
+            <a:pPr algn="l">
+              <a:spcAft>
+                <a:spcPts val="400"/>
+              </a:spcAft>
+            </a:pPr>
+            <a:r>
+              <a:rPr sz="900" b="0" i="0">
+                <a:solidFill>
+                  <a:srgbClr val="6B7280"/>
+                </a:solidFill>
+                <a:latin typeface="Arial"/>
+              </a:rPr>
+              <a:t>labels</a:t>
+            </a:r>
+          </a:p>
+        </p:txBody>
+      </p:sp>
+      <p:cxnSp>
+        <p:nvCxnSpPr>
+          <p:cNvPr id="19" name="Connector 18"/>
+          <p:cNvCxnSpPr/>
+          <p:nvPr/>
+        </p:nvCxnSpPr>
+        <p:spPr>
+          <a:xfrm flipV="1">
+            <a:off x="2304288" y="3995928"/>
+            <a:ext cx="713232" cy="804672"/>
+          </a:xfrm>
+          <a:prstGeom prst="line">
+            <a:avLst/>
+          </a:prstGeom>
+          <a:ln w="15875">
+            <a:solidFill>
+              <a:srgbClr val="6B7280"/>
+            </a:solidFill>
+            <a:prstDash val="dash"/>
+            <a:tailEnd type="triangle"/>
+          </a:ln>
+        </p:spPr>
+        <p:style>
+          <a:lnRef idx="2">
+            <a:schemeClr val="accent1"/>
+          </a:lnRef>
+          <a:fillRef idx="0">
+            <a:schemeClr val="accent1"/>
+          </a:fillRef>
+          <a:effectRef idx="1">
+            <a:schemeClr val="accent1"/>
+          </a:effectRef>
+          <a:fontRef idx="minor">
+            <a:schemeClr val="tx1"/>
+          </a:fontRef>
+        </p:style>
+      </p:cxnSp>
+      <p:sp>
+        <p:nvSpPr>
+          <p:cNvPr id="20" name="Rounded Rectangle 19"/>
+          <p:cNvSpPr/>
+          <p:nvPr/>
+        </p:nvSpPr>
+        <p:spPr>
+          <a:xfrm>
+            <a:off x="5486400" y="1325880"/>
+            <a:ext cx="1645920" cy="685800"/>
+          </a:xfrm>
+          <a:prstGeom prst="roundRect">
+            <a:avLst>
+              <a:gd name="adj" fmla="val 12000"/>
+            </a:avLst>
+          </a:prstGeom>
+          <a:solidFill>
+            <a:srgbClr val="EEEAF9"/>
+          </a:solidFill>
+          <a:ln w="15875">
+            <a:solidFill>
+              <a:srgbClr val="5E48B8"/>
+            </a:solidFill>
+          </a:ln>
+          <a:effectLst/>
+        </p:spPr>
+        <p:style>
+          <a:lnRef idx="1">
+            <a:schemeClr val="accent1"/>
+          </a:lnRef>
+          <a:fillRef idx="3">
+            <a:schemeClr val="accent1"/>
+          </a:fillRef>
+          <a:effectRef idx="2">
+            <a:schemeClr val="accent1"/>
+          </a:effectRef>
+          <a:fontRef idx="minor">
+            <a:schemeClr val="lt1"/>
+          </a:fontRef>
+        </p:style>
+        <p:txBody>
+          <a:bodyPr rtlCol="0" anchor="ctr" wrap="square" lIns="54864" rIns="54864" tIns="27432" bIns="27432"/>
+          <a:lstStyle/>
+          <a:p>
+            <a:pPr algn="ctr"/>
+            <a:r>
+              <a:rPr sz="1200" b="1" i="0">
+                <a:solidFill>
+                  <a:srgbClr val="000000"/>
+                </a:solidFill>
+                <a:latin typeface="Arial"/>
+              </a:rPr>
+              <a:t>Triage agent</a:t>
+            </a:r>
+          </a:p>
+          <a:p>
+            <a:pPr algn="ctr"/>
+            <a:r>
+              <a:rPr sz="900" b="0" i="0">
+                <a:solidFill>
+                  <a:srgbClr val="6B7280"/>
+                </a:solidFill>
+                <a:latin typeface="Arial"/>
+              </a:rPr>
+              <a:t>labels and archives in batches</a:t>
+            </a:r>
+          </a:p>
+        </p:txBody>
+      </p:sp>
+      <p:cxnSp>
+        <p:nvCxnSpPr>
+          <p:cNvPr id="21" name="Connector 20"/>
+          <p:cNvCxnSpPr/>
+          <p:nvPr/>
+        </p:nvCxnSpPr>
+        <p:spPr>
+          <a:xfrm flipV="1">
+            <a:off x="4773168" y="1664207"/>
+            <a:ext cx="694944" cy="1673353"/>
+          </a:xfrm>
+          <a:prstGeom prst="line">
+            <a:avLst/>
+          </a:prstGeom>
+          <a:ln w="15875">
+            <a:solidFill>
+              <a:srgbClr val="5E48B8"/>
+            </a:solidFill>
+            <a:tailEnd type="triangle"/>
+          </a:ln>
+        </p:spPr>
+        <p:style>
+          <a:lnRef idx="2">
+            <a:schemeClr val="accent1"/>
+          </a:lnRef>
+          <a:fillRef idx="0">
+            <a:schemeClr val="accent1"/>
+          </a:fillRef>
+          <a:effectRef idx="1">
+            <a:schemeClr val="accent1"/>
+          </a:effectRef>
+          <a:fontRef idx="minor">
+            <a:schemeClr val="tx1"/>
+          </a:fontRef>
+        </p:style>
+      </p:cxnSp>
+      <p:sp>
+        <p:nvSpPr>
+          <p:cNvPr id="22" name="Rounded Rectangle 21"/>
+          <p:cNvSpPr/>
+          <p:nvPr/>
+        </p:nvSpPr>
+        <p:spPr>
+          <a:xfrm>
+            <a:off x="7589520" y="1097280"/>
+            <a:ext cx="1463040" cy="301752"/>
+          </a:xfrm>
+          <a:prstGeom prst="roundRect">
+            <a:avLst>
+              <a:gd name="adj" fmla="val 12000"/>
+            </a:avLst>
+          </a:prstGeom>
+          <a:solidFill>
+            <a:srgbClr val="E6F0F7"/>
+          </a:solidFill>
+          <a:ln w="15875">
+            <a:solidFill>
+              <a:srgbClr val="2C6C9C"/>
+            </a:solidFill>
+          </a:ln>
+          <a:effectLst/>
+        </p:spPr>
+        <p:style>
+          <a:lnRef idx="1">
+            <a:schemeClr val="accent1"/>
+          </a:lnRef>
+          <a:fillRef idx="3">
+            <a:schemeClr val="accent1"/>
+          </a:fillRef>
+          <a:effectRef idx="2">
+            <a:schemeClr val="accent1"/>
+          </a:effectRef>
+          <a:fontRef idx="minor">
+            <a:schemeClr val="lt1"/>
+          </a:fontRef>
+        </p:style>
+        <p:txBody>
+          <a:bodyPr rtlCol="0" anchor="ctr" wrap="square" lIns="54864" rIns="54864" tIns="27432" bIns="27432"/>
+          <a:lstStyle/>
+          <a:p>
+            <a:pPr algn="ctr"/>
+            <a:r>
+              <a:rPr sz="1000" b="0" i="0">
+                <a:solidFill>
+                  <a:srgbClr val="000000"/>
+                </a:solidFill>
+                <a:latin typeface="Courier New"/>
+              </a:rPr>
+              <a:t>search_inbox</a:t>
+            </a:r>
+          </a:p>
+        </p:txBody>
+      </p:sp>
+      <p:cxnSp>
+        <p:nvCxnSpPr>
+          <p:cNvPr id="23" name="Connector 22"/>
+          <p:cNvCxnSpPr/>
+          <p:nvPr/>
+        </p:nvCxnSpPr>
+        <p:spPr>
+          <a:xfrm flipV="1">
+            <a:off x="7150608" y="1243584"/>
+            <a:ext cx="420623" cy="420623"/>
+          </a:xfrm>
+          <a:prstGeom prst="line">
+            <a:avLst/>
+          </a:prstGeom>
+          <a:ln w="15875">
+            <a:solidFill>
+              <a:srgbClr val="6B7280"/>
+            </a:solidFill>
+            <a:tailEnd type="triangle"/>
+          </a:ln>
+        </p:spPr>
+        <p:style>
+          <a:lnRef idx="2">
+            <a:schemeClr val="accent1"/>
+          </a:lnRef>
+          <a:fillRef idx="0">
+            <a:schemeClr val="accent1"/>
+          </a:fillRef>
+          <a:effectRef idx="1">
+            <a:schemeClr val="accent1"/>
+          </a:effectRef>
+          <a:fontRef idx="minor">
+            <a:schemeClr val="tx1"/>
+          </a:fontRef>
+        </p:style>
+      </p:cxnSp>
+      <p:sp>
+        <p:nvSpPr>
+          <p:cNvPr id="24" name="Rounded Rectangle 23"/>
+          <p:cNvSpPr/>
+          <p:nvPr/>
+        </p:nvSpPr>
+        <p:spPr>
+          <a:xfrm>
+            <a:off x="7589520" y="1463040"/>
+            <a:ext cx="1463040" cy="301752"/>
+          </a:xfrm>
+          <a:prstGeom prst="roundRect">
+            <a:avLst>
+              <a:gd name="adj" fmla="val 12000"/>
+            </a:avLst>
+          </a:prstGeom>
+          <a:solidFill>
+            <a:srgbClr val="E6F0F7"/>
+          </a:solidFill>
+          <a:ln w="15875">
+            <a:solidFill>
+              <a:srgbClr val="2C6C9C"/>
+            </a:solidFill>
+          </a:ln>
+          <a:effectLst/>
+        </p:spPr>
+        <p:style>
+          <a:lnRef idx="1">
+            <a:schemeClr val="accent1"/>
+          </a:lnRef>
+          <a:fillRef idx="3">
+            <a:schemeClr val="accent1"/>
+          </a:fillRef>
+          <a:effectRef idx="2">
+            <a:schemeClr val="accent1"/>
+          </a:effectRef>
+          <a:fontRef idx="minor">
+            <a:schemeClr val="lt1"/>
+          </a:fontRef>
+        </p:style>
+        <p:txBody>
+          <a:bodyPr rtlCol="0" anchor="ctr" wrap="square" lIns="54864" rIns="54864" tIns="27432" bIns="27432"/>
+          <a:lstStyle/>
+          <a:p>
+            <a:pPr algn="ctr"/>
+            <a:r>
+              <a:rPr sz="1000" b="0" i="0">
+                <a:solidFill>
+                  <a:srgbClr val="000000"/>
+                </a:solidFill>
+                <a:latin typeface="Courier New"/>
+              </a:rPr>
+              <a:t>read_email</a:t>
+            </a:r>
+          </a:p>
+        </p:txBody>
+      </p:sp>
+      <p:cxnSp>
+        <p:nvCxnSpPr>
+          <p:cNvPr id="25" name="Connector 24"/>
+          <p:cNvCxnSpPr/>
+          <p:nvPr/>
+        </p:nvCxnSpPr>
+        <p:spPr>
+          <a:xfrm flipV="1">
+            <a:off x="7150608" y="1609344"/>
+            <a:ext cx="420623" cy="54863"/>
+          </a:xfrm>
+          <a:prstGeom prst="line">
+            <a:avLst/>
+          </a:prstGeom>
+          <a:ln w="15875">
+            <a:solidFill>
+              <a:srgbClr val="6B7280"/>
+            </a:solidFill>
+            <a:tailEnd type="triangle"/>
+          </a:ln>
+        </p:spPr>
+        <p:style>
+          <a:lnRef idx="2">
+            <a:schemeClr val="accent1"/>
+          </a:lnRef>
+          <a:fillRef idx="0">
+            <a:schemeClr val="accent1"/>
+          </a:fillRef>
+          <a:effectRef idx="1">
+            <a:schemeClr val="accent1"/>
+          </a:effectRef>
+          <a:fontRef idx="minor">
+            <a:schemeClr val="tx1"/>
+          </a:fontRef>
+        </p:style>
+      </p:cxnSp>
+      <p:sp>
+        <p:nvSpPr>
+          <p:cNvPr id="26" name="Rounded Rectangle 25"/>
+          <p:cNvSpPr/>
+          <p:nvPr/>
+        </p:nvSpPr>
+        <p:spPr>
+          <a:xfrm>
+            <a:off x="7589520" y="1828800"/>
+            <a:ext cx="1463040" cy="301752"/>
+          </a:xfrm>
+          <a:prstGeom prst="roundRect">
+            <a:avLst>
+              <a:gd name="adj" fmla="val 12000"/>
+            </a:avLst>
+          </a:prstGeom>
+          <a:solidFill>
+            <a:srgbClr val="E6F0F7"/>
+          </a:solidFill>
+          <a:ln w="15875">
+            <a:solidFill>
+              <a:srgbClr val="2C6C9C"/>
+            </a:solidFill>
+          </a:ln>
+          <a:effectLst/>
+        </p:spPr>
+        <p:style>
+          <a:lnRef idx="1">
+            <a:schemeClr val="accent1"/>
+          </a:lnRef>
+          <a:fillRef idx="3">
+            <a:schemeClr val="accent1"/>
+          </a:fillRef>
+          <a:effectRef idx="2">
+            <a:schemeClr val="accent1"/>
+          </a:effectRef>
+          <a:fontRef idx="minor">
+            <a:schemeClr val="lt1"/>
+          </a:fontRef>
+        </p:style>
+        <p:txBody>
+          <a:bodyPr rtlCol="0" anchor="ctr" wrap="square" lIns="54864" rIns="54864" tIns="27432" bIns="27432"/>
+          <a:lstStyle/>
+          <a:p>
+            <a:pPr algn="ctr"/>
+            <a:r>
+              <a:rPr sz="1000" b="0" i="0">
+                <a:solidFill>
+                  <a:srgbClr val="000000"/>
+                </a:solidFill>
+                <a:latin typeface="Courier New"/>
+              </a:rPr>
+              <a:t>label_emails</a:t>
+            </a:r>
+          </a:p>
+        </p:txBody>
+      </p:sp>
+      <p:cxnSp>
+        <p:nvCxnSpPr>
+          <p:cNvPr id="27" name="Connector 26"/>
+          <p:cNvCxnSpPr/>
+          <p:nvPr/>
+        </p:nvCxnSpPr>
+        <p:spPr>
+          <a:xfrm>
+            <a:off x="7150608" y="1664207"/>
+            <a:ext cx="420623" cy="310897"/>
+          </a:xfrm>
+          <a:prstGeom prst="line">
+            <a:avLst/>
+          </a:prstGeom>
+          <a:ln w="15875">
+            <a:solidFill>
+              <a:srgbClr val="6B7280"/>
+            </a:solidFill>
+            <a:tailEnd type="triangle"/>
+          </a:ln>
+        </p:spPr>
+        <p:style>
+          <a:lnRef idx="2">
+            <a:schemeClr val="accent1"/>
+          </a:lnRef>
+          <a:fillRef idx="0">
+            <a:schemeClr val="accent1"/>
+          </a:fillRef>
+          <a:effectRef idx="1">
+            <a:schemeClr val="accent1"/>
+          </a:effectRef>
+          <a:fontRef idx="minor">
+            <a:schemeClr val="tx1"/>
+          </a:fontRef>
+        </p:style>
+      </p:cxnSp>
+      <p:sp>
+        <p:nvSpPr>
+          <p:cNvPr id="28" name="Rounded Rectangle 27"/>
+          <p:cNvSpPr/>
+          <p:nvPr/>
+        </p:nvSpPr>
+        <p:spPr>
+          <a:xfrm>
+            <a:off x="7589520" y="2194560"/>
+            <a:ext cx="1463040" cy="301752"/>
+          </a:xfrm>
+          <a:prstGeom prst="roundRect">
+            <a:avLst>
+              <a:gd name="adj" fmla="val 12000"/>
+            </a:avLst>
+          </a:prstGeom>
+          <a:solidFill>
+            <a:srgbClr val="E6F0F7"/>
+          </a:solidFill>
+          <a:ln w="15875">
+            <a:solidFill>
+              <a:srgbClr val="2C6C9C"/>
+            </a:solidFill>
+          </a:ln>
+          <a:effectLst/>
+        </p:spPr>
+        <p:style>
+          <a:lnRef idx="1">
+            <a:schemeClr val="accent1"/>
+          </a:lnRef>
+          <a:fillRef idx="3">
+            <a:schemeClr val="accent1"/>
+          </a:fillRef>
+          <a:effectRef idx="2">
+            <a:schemeClr val="accent1"/>
+          </a:effectRef>
+          <a:fontRef idx="minor">
+            <a:schemeClr val="lt1"/>
+          </a:fontRef>
+        </p:style>
+        <p:txBody>
+          <a:bodyPr rtlCol="0" anchor="ctr" wrap="square" lIns="54864" rIns="54864" tIns="27432" bIns="27432"/>
+          <a:lstStyle/>
+          <a:p>
+            <a:pPr algn="ctr"/>
+            <a:r>
+              <a:rPr sz="1000" b="0" i="0">
+                <a:solidFill>
+                  <a:srgbClr val="000000"/>
+                </a:solidFill>
+                <a:latin typeface="Courier New"/>
+              </a:rPr>
+              <a:t>archive_emails</a:t>
+            </a:r>
+          </a:p>
+        </p:txBody>
+      </p:sp>
+      <p:cxnSp>
+        <p:nvCxnSpPr>
+          <p:cNvPr id="29" name="Connector 28"/>
+          <p:cNvCxnSpPr/>
+          <p:nvPr/>
+        </p:nvCxnSpPr>
+        <p:spPr>
+          <a:xfrm>
+            <a:off x="7150608" y="1664207"/>
+            <a:ext cx="420623" cy="676657"/>
+          </a:xfrm>
+          <a:prstGeom prst="line">
+            <a:avLst/>
+          </a:prstGeom>
+          <a:ln w="15875">
+            <a:solidFill>
+              <a:srgbClr val="6B7280"/>
+            </a:solidFill>
+            <a:tailEnd type="triangle"/>
+          </a:ln>
+        </p:spPr>
+        <p:style>
+          <a:lnRef idx="2">
+            <a:schemeClr val="accent1"/>
+          </a:lnRef>
+          <a:fillRef idx="0">
+            <a:schemeClr val="accent1"/>
+          </a:fillRef>
+          <a:effectRef idx="1">
+            <a:schemeClr val="accent1"/>
+          </a:effectRef>
+          <a:fontRef idx="minor">
+            <a:schemeClr val="tx1"/>
+          </a:fontRef>
+        </p:style>
+      </p:cxnSp>
+      <p:sp>
+        <p:nvSpPr>
+          <p:cNvPr id="30" name="Rounded Rectangle 29"/>
+          <p:cNvSpPr/>
+          <p:nvPr/>
+        </p:nvSpPr>
+        <p:spPr>
+          <a:xfrm>
+            <a:off x="5486400" y="3017520"/>
+            <a:ext cx="1645920" cy="685800"/>
+          </a:xfrm>
+          <a:prstGeom prst="roundRect">
+            <a:avLst>
+              <a:gd name="adj" fmla="val 12000"/>
+            </a:avLst>
+          </a:prstGeom>
+          <a:solidFill>
+            <a:srgbClr val="EEEAF9"/>
+          </a:solidFill>
+          <a:ln w="15875">
+            <a:solidFill>
+              <a:srgbClr val="5E48B8"/>
+            </a:solidFill>
+          </a:ln>
+          <a:effectLst/>
+        </p:spPr>
+        <p:style>
+          <a:lnRef idx="1">
+            <a:schemeClr val="accent1"/>
+          </a:lnRef>
+          <a:fillRef idx="3">
+            <a:schemeClr val="accent1"/>
+          </a:fillRef>
+          <a:effectRef idx="2">
+            <a:schemeClr val="accent1"/>
+          </a:effectRef>
+          <a:fontRef idx="minor">
+            <a:schemeClr val="lt1"/>
+          </a:fontRef>
+        </p:style>
+        <p:txBody>
+          <a:bodyPr rtlCol="0" anchor="ctr" wrap="square" lIns="54864" rIns="54864" tIns="27432" bIns="27432"/>
+          <a:lstStyle/>
+          <a:p>
+            <a:pPr algn="ctr"/>
+            <a:r>
+              <a:rPr sz="1200" b="1" i="0">
+                <a:solidFill>
+                  <a:srgbClr val="000000"/>
+                </a:solidFill>
+                <a:latin typeface="Arial"/>
+              </a:rPr>
+              <a:t>Deadline agent</a:t>
+            </a:r>
+          </a:p>
+          <a:p>
+            <a:pPr algn="ctr"/>
+            <a:r>
+              <a:rPr sz="900" b="0" i="0">
+                <a:solidFill>
+                  <a:srgbClr val="6B7280"/>
+                </a:solidFill>
+                <a:latin typeface="Arial"/>
+              </a:rPr>
+              <a:t>finds dates, creates tasks</a:t>
+            </a:r>
+          </a:p>
+        </p:txBody>
+      </p:sp>
+      <p:cxnSp>
+        <p:nvCxnSpPr>
+          <p:cNvPr id="31" name="Connector 30"/>
+          <p:cNvCxnSpPr/>
+          <p:nvPr/>
+        </p:nvCxnSpPr>
+        <p:spPr>
+          <a:xfrm>
+            <a:off x="4773168" y="3337560"/>
+            <a:ext cx="694944" cy="18288"/>
+          </a:xfrm>
+          <a:prstGeom prst="line">
+            <a:avLst/>
+          </a:prstGeom>
+          <a:ln w="15875">
+            <a:solidFill>
+              <a:srgbClr val="5E48B8"/>
+            </a:solidFill>
+            <a:tailEnd type="triangle"/>
+          </a:ln>
+        </p:spPr>
+        <p:style>
+          <a:lnRef idx="2">
+            <a:schemeClr val="accent1"/>
+          </a:lnRef>
+          <a:fillRef idx="0">
+            <a:schemeClr val="accent1"/>
+          </a:fillRef>
+          <a:effectRef idx="1">
+            <a:schemeClr val="accent1"/>
+          </a:effectRef>
+          <a:fontRef idx="minor">
+            <a:schemeClr val="tx1"/>
+          </a:fontRef>
+        </p:style>
+      </p:cxnSp>
+      <p:sp>
+        <p:nvSpPr>
+          <p:cNvPr id="32" name="Rounded Rectangle 31"/>
+          <p:cNvSpPr/>
+          <p:nvPr/>
+        </p:nvSpPr>
+        <p:spPr>
+          <a:xfrm>
+            <a:off x="7589520" y="2788920"/>
+            <a:ext cx="1463040" cy="301752"/>
+          </a:xfrm>
+          <a:prstGeom prst="roundRect">
+            <a:avLst>
+              <a:gd name="adj" fmla="val 12000"/>
+            </a:avLst>
+          </a:prstGeom>
+          <a:solidFill>
+            <a:srgbClr val="E6F0F7"/>
+          </a:solidFill>
+          <a:ln w="15875">
+            <a:solidFill>
+              <a:srgbClr val="2C6C9C"/>
+            </a:solidFill>
+          </a:ln>
+          <a:effectLst/>
+        </p:spPr>
+        <p:style>
+          <a:lnRef idx="1">
+            <a:schemeClr val="accent1"/>
+          </a:lnRef>
+          <a:fillRef idx="3">
+            <a:schemeClr val="accent1"/>
+          </a:fillRef>
+          <a:effectRef idx="2">
+            <a:schemeClr val="accent1"/>
+          </a:effectRef>
+          <a:fontRef idx="minor">
+            <a:schemeClr val="lt1"/>
+          </a:fontRef>
+        </p:style>
+        <p:txBody>
+          <a:bodyPr rtlCol="0" anchor="ctr" wrap="square" lIns="54864" rIns="54864" tIns="27432" bIns="27432"/>
+          <a:lstStyle/>
+          <a:p>
+            <a:pPr algn="ctr"/>
+            <a:r>
+              <a:rPr sz="1000" b="0" i="0">
+                <a:solidFill>
+                  <a:srgbClr val="000000"/>
+                </a:solidFill>
+                <a:latin typeface="Courier New"/>
+              </a:rPr>
+              <a:t>search_inbox</a:t>
+            </a:r>
+          </a:p>
+        </p:txBody>
+      </p:sp>
+      <p:cxnSp>
+        <p:nvCxnSpPr>
+          <p:cNvPr id="33" name="Connector 32"/>
+          <p:cNvCxnSpPr/>
+          <p:nvPr/>
+        </p:nvCxnSpPr>
+        <p:spPr>
+          <a:xfrm flipV="1">
+            <a:off x="7150608" y="2935224"/>
+            <a:ext cx="420623" cy="420624"/>
+          </a:xfrm>
+          <a:prstGeom prst="line">
+            <a:avLst/>
+          </a:prstGeom>
+          <a:ln w="15875">
+            <a:solidFill>
+              <a:srgbClr val="6B7280"/>
+            </a:solidFill>
+            <a:tailEnd type="triangle"/>
+          </a:ln>
+        </p:spPr>
+        <p:style>
+          <a:lnRef idx="2">
+            <a:schemeClr val="accent1"/>
+          </a:lnRef>
+          <a:fillRef idx="0">
+            <a:schemeClr val="accent1"/>
+          </a:fillRef>
+          <a:effectRef idx="1">
+            <a:schemeClr val="accent1"/>
+          </a:effectRef>
+          <a:fontRef idx="minor">
+            <a:schemeClr val="tx1"/>
+          </a:fontRef>
+        </p:style>
+      </p:cxnSp>
+      <p:sp>
+        <p:nvSpPr>
+          <p:cNvPr id="34" name="Rounded Rectangle 33"/>
+          <p:cNvSpPr/>
+          <p:nvPr/>
+        </p:nvSpPr>
+        <p:spPr>
+          <a:xfrm>
+            <a:off x="7589520" y="3154679"/>
+            <a:ext cx="1463040" cy="301752"/>
+          </a:xfrm>
+          <a:prstGeom prst="roundRect">
+            <a:avLst>
+              <a:gd name="adj" fmla="val 12000"/>
+            </a:avLst>
+          </a:prstGeom>
+          <a:solidFill>
+            <a:srgbClr val="E6F0F7"/>
+          </a:solidFill>
+          <a:ln w="15875">
+            <a:solidFill>
+              <a:srgbClr val="2C6C9C"/>
+            </a:solidFill>
+          </a:ln>
+          <a:effectLst/>
+        </p:spPr>
+        <p:style>
+          <a:lnRef idx="1">
+            <a:schemeClr val="accent1"/>
+          </a:lnRef>
+          <a:fillRef idx="3">
+            <a:schemeClr val="accent1"/>
+          </a:fillRef>
+          <a:effectRef idx="2">
+            <a:schemeClr val="accent1"/>
+          </a:effectRef>
+          <a:fontRef idx="minor">
+            <a:schemeClr val="lt1"/>
+          </a:fontRef>
+        </p:style>
+        <p:txBody>
+          <a:bodyPr rtlCol="0" anchor="ctr" wrap="square" lIns="54864" rIns="54864" tIns="27432" bIns="27432"/>
+          <a:lstStyle/>
+          <a:p>
+            <a:pPr algn="ctr"/>
+            <a:r>
+              <a:rPr sz="1000" b="0" i="0">
+                <a:solidFill>
+                  <a:srgbClr val="000000"/>
+                </a:solidFill>
+                <a:latin typeface="Courier New"/>
+              </a:rPr>
+              <a:t>read_email</a:t>
+            </a:r>
+          </a:p>
+        </p:txBody>
+      </p:sp>
+      <p:cxnSp>
+        <p:nvCxnSpPr>
+          <p:cNvPr id="35" name="Connector 34"/>
+          <p:cNvCxnSpPr/>
+          <p:nvPr/>
+        </p:nvCxnSpPr>
+        <p:spPr>
+          <a:xfrm flipV="1">
+            <a:off x="7150608" y="3300984"/>
+            <a:ext cx="420623" cy="54864"/>
+          </a:xfrm>
+          <a:prstGeom prst="line">
+            <a:avLst/>
+          </a:prstGeom>
+          <a:ln w="15875">
+            <a:solidFill>
+              <a:srgbClr val="6B7280"/>
+            </a:solidFill>
+            <a:tailEnd type="triangle"/>
+          </a:ln>
+        </p:spPr>
+        <p:style>
+          <a:lnRef idx="2">
+            <a:schemeClr val="accent1"/>
+          </a:lnRef>
+          <a:fillRef idx="0">
+            <a:schemeClr val="accent1"/>
+          </a:fillRef>
+          <a:effectRef idx="1">
+            <a:schemeClr val="accent1"/>
+          </a:effectRef>
+          <a:fontRef idx="minor">
+            <a:schemeClr val="tx1"/>
+          </a:fontRef>
+        </p:style>
+      </p:cxnSp>
+      <p:sp>
+        <p:nvSpPr>
+          <p:cNvPr id="36" name="Rounded Rectangle 35"/>
+          <p:cNvSpPr/>
+          <p:nvPr/>
+        </p:nvSpPr>
+        <p:spPr>
+          <a:xfrm>
+            <a:off x="7589520" y="3520439"/>
+            <a:ext cx="1463040" cy="301752"/>
+          </a:xfrm>
+          <a:prstGeom prst="roundRect">
+            <a:avLst>
+              <a:gd name="adj" fmla="val 12000"/>
+            </a:avLst>
+          </a:prstGeom>
+          <a:solidFill>
+            <a:srgbClr val="E6F0F7"/>
+          </a:solidFill>
+          <a:ln w="15875">
+            <a:solidFill>
+              <a:srgbClr val="2C6C9C"/>
+            </a:solidFill>
+          </a:ln>
+          <a:effectLst/>
+        </p:spPr>
+        <p:style>
+          <a:lnRef idx="1">
+            <a:schemeClr val="accent1"/>
+          </a:lnRef>
+          <a:fillRef idx="3">
+            <a:schemeClr val="accent1"/>
+          </a:fillRef>
+          <a:effectRef idx="2">
+            <a:schemeClr val="accent1"/>
+          </a:effectRef>
+          <a:fontRef idx="minor">
+            <a:schemeClr val="lt1"/>
+          </a:fontRef>
+        </p:style>
+        <p:txBody>
+          <a:bodyPr rtlCol="0" anchor="ctr" wrap="square" lIns="54864" rIns="54864" tIns="27432" bIns="27432"/>
+          <a:lstStyle/>
+          <a:p>
+            <a:pPr algn="ctr"/>
+            <a:r>
+              <a:rPr sz="1000" b="0" i="0">
+                <a:solidFill>
+                  <a:srgbClr val="000000"/>
+                </a:solidFill>
+                <a:latin typeface="Courier New"/>
+              </a:rPr>
+              <a:t>create_task</a:t>
+            </a:r>
+          </a:p>
+        </p:txBody>
+      </p:sp>
+      <p:cxnSp>
+        <p:nvCxnSpPr>
+          <p:cNvPr id="37" name="Connector 36"/>
+          <p:cNvCxnSpPr/>
+          <p:nvPr/>
+        </p:nvCxnSpPr>
+        <p:spPr>
+          <a:xfrm>
+            <a:off x="7150608" y="3355848"/>
+            <a:ext cx="420623" cy="310896"/>
+          </a:xfrm>
+          <a:prstGeom prst="line">
+            <a:avLst/>
+          </a:prstGeom>
+          <a:ln w="15875">
+            <a:solidFill>
+              <a:srgbClr val="6B7280"/>
+            </a:solidFill>
+            <a:tailEnd type="triangle"/>
+          </a:ln>
+        </p:spPr>
+        <p:style>
+          <a:lnRef idx="2">
+            <a:schemeClr val="accent1"/>
+          </a:lnRef>
+          <a:fillRef idx="0">
+            <a:schemeClr val="accent1"/>
+          </a:fillRef>
+          <a:effectRef idx="1">
+            <a:schemeClr val="accent1"/>
+          </a:effectRef>
+          <a:fontRef idx="minor">
+            <a:schemeClr val="tx1"/>
+          </a:fontRef>
+        </p:style>
+      </p:cxnSp>
+      <p:sp>
+        <p:nvSpPr>
+          <p:cNvPr id="38" name="Rounded Rectangle 37"/>
+          <p:cNvSpPr/>
+          <p:nvPr/>
+        </p:nvSpPr>
+        <p:spPr>
+          <a:xfrm>
+            <a:off x="5486400" y="4572000"/>
+            <a:ext cx="1645920" cy="685800"/>
+          </a:xfrm>
+          <a:prstGeom prst="roundRect">
+            <a:avLst>
+              <a:gd name="adj" fmla="val 12000"/>
+            </a:avLst>
+          </a:prstGeom>
+          <a:solidFill>
+            <a:srgbClr val="EEEAF9"/>
+          </a:solidFill>
+          <a:ln w="15875">
+            <a:solidFill>
+              <a:srgbClr val="5E48B8"/>
+            </a:solidFill>
+          </a:ln>
+          <a:effectLst/>
+        </p:spPr>
+        <p:style>
+          <a:lnRef idx="1">
+            <a:schemeClr val="accent1"/>
+          </a:lnRef>
+          <a:fillRef idx="3">
+            <a:schemeClr val="accent1"/>
+          </a:fillRef>
+          <a:effectRef idx="2">
+            <a:schemeClr val="accent1"/>
+          </a:effectRef>
+          <a:fontRef idx="minor">
+            <a:schemeClr val="lt1"/>
+          </a:fontRef>
+        </p:style>
+        <p:txBody>
+          <a:bodyPr rtlCol="0" anchor="ctr" wrap="square" lIns="54864" rIns="54864" tIns="27432" bIns="27432"/>
+          <a:lstStyle/>
+          <a:p>
+            <a:pPr algn="ctr"/>
+            <a:r>
+              <a:rPr sz="1200" b="1" i="0">
+                <a:solidFill>
+                  <a:srgbClr val="000000"/>
+                </a:solidFill>
+                <a:latin typeface="Arial"/>
+              </a:rPr>
+              <a:t>Reply agent</a:t>
+            </a:r>
+          </a:p>
+          <a:p>
+            <a:pPr algn="ctr"/>
+            <a:r>
+              <a:rPr sz="900" b="0" i="0">
+                <a:solidFill>
+                  <a:srgbClr val="6B7280"/>
+                </a:solidFill>
+                <a:latin typeface="Arial"/>
+              </a:rPr>
+              <a:t>drafts replies and forwards</a:t>
+            </a:r>
+          </a:p>
+        </p:txBody>
+      </p:sp>
+      <p:cxnSp>
+        <p:nvCxnSpPr>
+          <p:cNvPr id="39" name="Connector 38"/>
+          <p:cNvCxnSpPr/>
+          <p:nvPr/>
+        </p:nvCxnSpPr>
+        <p:spPr>
+          <a:xfrm>
+            <a:off x="4773168" y="3337560"/>
+            <a:ext cx="694944" cy="1572768"/>
+          </a:xfrm>
+          <a:prstGeom prst="line">
+            <a:avLst/>
+          </a:prstGeom>
+          <a:ln w="15875">
+            <a:solidFill>
+              <a:srgbClr val="5E48B8"/>
+            </a:solidFill>
+            <a:tailEnd type="triangle"/>
+          </a:ln>
+        </p:spPr>
+        <p:style>
+          <a:lnRef idx="2">
+            <a:schemeClr val="accent1"/>
+          </a:lnRef>
+          <a:fillRef idx="0">
+            <a:schemeClr val="accent1"/>
+          </a:fillRef>
+          <a:effectRef idx="1">
+            <a:schemeClr val="accent1"/>
+          </a:effectRef>
+          <a:fontRef idx="minor">
+            <a:schemeClr val="tx1"/>
+          </a:fontRef>
+        </p:style>
+      </p:cxnSp>
+      <p:sp>
+        <p:nvSpPr>
+          <p:cNvPr id="40" name="Rounded Rectangle 39"/>
+          <p:cNvSpPr/>
+          <p:nvPr/>
+        </p:nvSpPr>
+        <p:spPr>
+          <a:xfrm>
+            <a:off x="7589520" y="4343400"/>
+            <a:ext cx="1463040" cy="301752"/>
+          </a:xfrm>
+          <a:prstGeom prst="roundRect">
+            <a:avLst>
+              <a:gd name="adj" fmla="val 12000"/>
+            </a:avLst>
+          </a:prstGeom>
+          <a:solidFill>
+            <a:srgbClr val="E6F0F7"/>
+          </a:solidFill>
+          <a:ln w="15875">
+            <a:solidFill>
+              <a:srgbClr val="2C6C9C"/>
+            </a:solidFill>
+          </a:ln>
+          <a:effectLst/>
+        </p:spPr>
+        <p:style>
+          <a:lnRef idx="1">
+            <a:schemeClr val="accent1"/>
+          </a:lnRef>
+          <a:fillRef idx="3">
+            <a:schemeClr val="accent1"/>
+          </a:fillRef>
+          <a:effectRef idx="2">
+            <a:schemeClr val="accent1"/>
+          </a:effectRef>
+          <a:fontRef idx="minor">
+            <a:schemeClr val="lt1"/>
+          </a:fontRef>
+        </p:style>
+        <p:txBody>
+          <a:bodyPr rtlCol="0" anchor="ctr" wrap="square" lIns="54864" rIns="54864" tIns="27432" bIns="27432"/>
+          <a:lstStyle/>
+          <a:p>
+            <a:pPr algn="ctr"/>
+            <a:r>
+              <a:rPr sz="1000" b="0" i="0">
+                <a:solidFill>
+                  <a:srgbClr val="000000"/>
+                </a:solidFill>
+                <a:latin typeface="Courier New"/>
+              </a:rPr>
+              <a:t>read_email</a:t>
+            </a:r>
+          </a:p>
+        </p:txBody>
+      </p:sp>
+      <p:cxnSp>
+        <p:nvCxnSpPr>
+          <p:cNvPr id="41" name="Connector 40"/>
+          <p:cNvCxnSpPr/>
+          <p:nvPr/>
+        </p:nvCxnSpPr>
+        <p:spPr>
+          <a:xfrm flipV="1">
+            <a:off x="7150608" y="4489704"/>
+            <a:ext cx="420623" cy="420624"/>
+          </a:xfrm>
+          <a:prstGeom prst="line">
+            <a:avLst/>
+          </a:prstGeom>
+          <a:ln w="15875">
+            <a:solidFill>
+              <a:srgbClr val="6B7280"/>
+            </a:solidFill>
+            <a:tailEnd type="triangle"/>
+          </a:ln>
+        </p:spPr>
+        <p:style>
+          <a:lnRef idx="2">
+            <a:schemeClr val="accent1"/>
+          </a:lnRef>
+          <a:fillRef idx="0">
+            <a:schemeClr val="accent1"/>
+          </a:fillRef>
+          <a:effectRef idx="1">
+            <a:schemeClr val="accent1"/>
+          </a:effectRef>
+          <a:fontRef idx="minor">
+            <a:schemeClr val="tx1"/>
+          </a:fontRef>
+        </p:style>
+      </p:cxnSp>
+      <p:sp>
+        <p:nvSpPr>
+          <p:cNvPr id="42" name="Rounded Rectangle 41"/>
+          <p:cNvSpPr/>
+          <p:nvPr/>
+        </p:nvSpPr>
+        <p:spPr>
+          <a:xfrm>
+            <a:off x="7589520" y="4709160"/>
+            <a:ext cx="1463040" cy="301752"/>
+          </a:xfrm>
+          <a:prstGeom prst="roundRect">
+            <a:avLst>
+              <a:gd name="adj" fmla="val 12000"/>
+            </a:avLst>
+          </a:prstGeom>
+          <a:solidFill>
+            <a:srgbClr val="E6F0F7"/>
+          </a:solidFill>
+          <a:ln w="15875">
+            <a:solidFill>
+              <a:srgbClr val="2C6C9C"/>
+            </a:solidFill>
+          </a:ln>
+          <a:effectLst/>
+        </p:spPr>
+        <p:style>
+          <a:lnRef idx="1">
+            <a:schemeClr val="accent1"/>
+          </a:lnRef>
+          <a:fillRef idx="3">
+            <a:schemeClr val="accent1"/>
+          </a:fillRef>
+          <a:effectRef idx="2">
+            <a:schemeClr val="accent1"/>
+          </a:effectRef>
+          <a:fontRef idx="minor">
+            <a:schemeClr val="lt1"/>
+          </a:fontRef>
+        </p:style>
+        <p:txBody>
+          <a:bodyPr rtlCol="0" anchor="ctr" wrap="square" lIns="54864" rIns="54864" tIns="27432" bIns="27432"/>
+          <a:lstStyle/>
+          <a:p>
+            <a:pPr algn="ctr"/>
+            <a:r>
+              <a:rPr sz="1000" b="0" i="0">
+                <a:solidFill>
+                  <a:srgbClr val="000000"/>
+                </a:solidFill>
+                <a:latin typeface="Courier New"/>
+              </a:rPr>
+              <a:t>draft_reply</a:t>
+            </a:r>
+          </a:p>
+        </p:txBody>
+      </p:sp>
+      <p:cxnSp>
+        <p:nvCxnSpPr>
+          <p:cNvPr id="43" name="Connector 42"/>
+          <p:cNvCxnSpPr/>
+          <p:nvPr/>
+        </p:nvCxnSpPr>
+        <p:spPr>
+          <a:xfrm flipV="1">
+            <a:off x="7150608" y="4855464"/>
+            <a:ext cx="420623" cy="54864"/>
+          </a:xfrm>
+          <a:prstGeom prst="line">
+            <a:avLst/>
+          </a:prstGeom>
+          <a:ln w="15875">
+            <a:solidFill>
+              <a:srgbClr val="6B7280"/>
+            </a:solidFill>
+            <a:tailEnd type="triangle"/>
+          </a:ln>
+        </p:spPr>
+        <p:style>
+          <a:lnRef idx="2">
+            <a:schemeClr val="accent1"/>
+          </a:lnRef>
+          <a:fillRef idx="0">
+            <a:schemeClr val="accent1"/>
+          </a:fillRef>
+          <a:effectRef idx="1">
+            <a:schemeClr val="accent1"/>
+          </a:effectRef>
+          <a:fontRef idx="minor">
+            <a:schemeClr val="tx1"/>
+          </a:fontRef>
+        </p:style>
+      </p:cxnSp>
+      <p:sp>
+        <p:nvSpPr>
+          <p:cNvPr id="44" name="Rounded Rectangle 43"/>
+          <p:cNvSpPr/>
+          <p:nvPr/>
+        </p:nvSpPr>
+        <p:spPr>
+          <a:xfrm>
+            <a:off x="7589520" y="5074920"/>
+            <a:ext cx="1463040" cy="301752"/>
+          </a:xfrm>
+          <a:prstGeom prst="roundRect">
+            <a:avLst>
+              <a:gd name="adj" fmla="val 12000"/>
+            </a:avLst>
+          </a:prstGeom>
+          <a:solidFill>
+            <a:srgbClr val="E6F0F7"/>
+          </a:solidFill>
+          <a:ln w="15875">
+            <a:solidFill>
+              <a:srgbClr val="2C6C9C"/>
+            </a:solidFill>
+          </a:ln>
+          <a:effectLst/>
+        </p:spPr>
+        <p:style>
+          <a:lnRef idx="1">
+            <a:schemeClr val="accent1"/>
+          </a:lnRef>
+          <a:fillRef idx="3">
+            <a:schemeClr val="accent1"/>
+          </a:fillRef>
+          <a:effectRef idx="2">
+            <a:schemeClr val="accent1"/>
+          </a:effectRef>
+          <a:fontRef idx="minor">
+            <a:schemeClr val="lt1"/>
+          </a:fontRef>
+        </p:style>
+        <p:txBody>
+          <a:bodyPr rtlCol="0" anchor="ctr" wrap="square" lIns="54864" rIns="54864" tIns="27432" bIns="27432"/>
+          <a:lstStyle/>
+          <a:p>
+            <a:pPr algn="ctr"/>
+            <a:r>
+              <a:rPr sz="1000" b="0" i="0">
+                <a:solidFill>
+                  <a:srgbClr val="000000"/>
+                </a:solidFill>
+                <a:latin typeface="Courier New"/>
+              </a:rPr>
+              <a:t>forward_email</a:t>
+            </a:r>
+          </a:p>
+        </p:txBody>
+      </p:sp>
+      <p:cxnSp>
+        <p:nvCxnSpPr>
+          <p:cNvPr id="45" name="Connector 44"/>
+          <p:cNvCxnSpPr/>
+          <p:nvPr/>
+        </p:nvCxnSpPr>
+        <p:spPr>
+          <a:xfrm>
+            <a:off x="7150608" y="4910328"/>
+            <a:ext cx="420623" cy="310896"/>
+          </a:xfrm>
+          <a:prstGeom prst="line">
+            <a:avLst/>
+          </a:prstGeom>
+          <a:ln w="15875">
+            <a:solidFill>
+              <a:srgbClr val="6B7280"/>
+            </a:solidFill>
+            <a:tailEnd type="triangle"/>
+          </a:ln>
+        </p:spPr>
+        <p:style>
+          <a:lnRef idx="2">
+            <a:schemeClr val="accent1"/>
+          </a:lnRef>
+          <a:fillRef idx="0">
+            <a:schemeClr val="accent1"/>
+          </a:fillRef>
+          <a:effectRef idx="1">
+            <a:schemeClr val="accent1"/>
+          </a:effectRef>
+          <a:fontRef idx="minor">
+            <a:schemeClr val="tx1"/>
+          </a:fontRef>
+        </p:style>
+      </p:cxnSp>
+      <p:sp>
+        <p:nvSpPr>
+          <p:cNvPr id="46" name="TextBox 45"/>
+          <p:cNvSpPr txBox="1"/>
+          <p:nvPr/>
+        </p:nvSpPr>
+        <p:spPr>
+          <a:xfrm>
+            <a:off x="4846320" y="2148840"/>
+            <a:ext cx="1280160" cy="274320"/>
+          </a:xfrm>
+          <a:prstGeom prst="rect">
+            <a:avLst/>
+          </a:prstGeom>
+          <a:noFill/>
+        </p:spPr>
+        <p:txBody>
+          <a:bodyPr wrap="square" anchor="t">
+            <a:spAutoFit/>
+          </a:bodyPr>
+          <a:lstStyle/>
+          <a:p>
+            <a:pPr algn="ctr">
+              <a:spcAft>
+                <a:spcPts val="400"/>
+              </a:spcAft>
+            </a:pPr>
+            <a:r>
+              <a:rPr sz="900" b="0" i="0">
+                <a:solidFill>
+                  <a:srgbClr val="6B7280"/>
+                </a:solidFill>
+                <a:latin typeface="Arial"/>
+              </a:rPr>
+              <a:t>instruction ⇄ report</a:t>
+            </a:r>
+          </a:p>
+        </p:txBody>
+      </p:sp>
+      <p:sp>
+        <p:nvSpPr>
+          <p:cNvPr id="47" name="Rounded Rectangle 46"/>
+          <p:cNvSpPr/>
+          <p:nvPr/>
+        </p:nvSpPr>
+        <p:spPr>
+          <a:xfrm>
+            <a:off x="5486400" y="5623560"/>
+            <a:ext cx="3566160" cy="502920"/>
+          </a:xfrm>
+          <a:prstGeom prst="roundRect">
+            <a:avLst>
+              <a:gd name="adj" fmla="val 12000"/>
+            </a:avLst>
+          </a:prstGeom>
+          <a:solidFill>
+            <a:srgbClr val="F3F4F7"/>
+          </a:solidFill>
+          <a:ln w="15875">
+            <a:solidFill>
+              <a:srgbClr val="6B7280"/>
+            </a:solidFill>
+            <a:prstDash val="dash"/>
+          </a:ln>
+          <a:effectLst/>
+        </p:spPr>
+        <p:style>
+          <a:lnRef idx="1">
+            <a:schemeClr val="accent1"/>
+          </a:lnRef>
+          <a:fillRef idx="3">
+            <a:schemeClr val="accent1"/>
+          </a:fillRef>
+          <a:effectRef idx="2">
+            <a:schemeClr val="accent1"/>
+          </a:effectRef>
+          <a:fontRef idx="minor">
+            <a:schemeClr val="lt1"/>
+          </a:fontRef>
+        </p:style>
+        <p:txBody>
+          <a:bodyPr rtlCol="0" anchor="ctr" wrap="square" lIns="54864" rIns="54864" tIns="27432" bIns="27432"/>
+          <a:lstStyle/>
+          <a:p>
+            <a:pPr algn="ctr"/>
+            <a:r>
+              <a:rPr sz="1100" b="1" i="0">
+                <a:solidFill>
+                  <a:srgbClr val="000000"/>
+                </a:solidFill>
+                <a:latin typeface="Arial"/>
+              </a:rPr>
+              <a:t>Long-term memory</a:t>
+            </a:r>
+          </a:p>
+          <a:p>
+            <a:pPr algn="ctr"/>
+            <a:r>
+              <a:rPr sz="850" b="0" i="0">
+                <a:solidFill>
+                  <a:srgbClr val="6B7280"/>
+                </a:solidFill>
+                <a:latin typeface="Arial"/>
+              </a:rPr>
+              <a:t>the inbox state and what you saved in the blocks · only through tools</a:t>
+            </a:r>
+          </a:p>
+        </p:txBody>
+      </p:sp>
+      <p:cxnSp>
+        <p:nvCxnSpPr>
+          <p:cNvPr id="48" name="Connector 47"/>
+          <p:cNvCxnSpPr/>
+          <p:nvPr/>
+        </p:nvCxnSpPr>
+        <p:spPr>
+          <a:xfrm>
+            <a:off x="8321040" y="5486400"/>
+            <a:ext cx="0" cy="118872"/>
+          </a:xfrm>
+          <a:prstGeom prst="line">
+            <a:avLst/>
+          </a:prstGeom>
+          <a:ln w="15875">
+            <a:solidFill>
+              <a:srgbClr val="6B7280"/>
+            </a:solidFill>
+            <a:tailEnd type="triangle"/>
+          </a:ln>
+        </p:spPr>
+        <p:style>
+          <a:lnRef idx="2">
+            <a:schemeClr val="accent1"/>
+          </a:lnRef>
+          <a:fillRef idx="0">
+            <a:schemeClr val="accent1"/>
+          </a:fillRef>
+          <a:effectRef idx="1">
+            <a:schemeClr val="accent1"/>
+          </a:effectRef>
+          <a:fontRef idx="minor">
+            <a:schemeClr val="tx1"/>
+          </a:fontRef>
+        </p:style>
+      </p:cxnSp>
+      <p:cxnSp>
+        <p:nvCxnSpPr>
+          <p:cNvPr id="49" name="Connector 48"/>
+          <p:cNvCxnSpPr/>
+          <p:nvPr/>
+        </p:nvCxnSpPr>
+        <p:spPr>
+          <a:xfrm flipV="1">
+            <a:off x="8458200" y="5504688"/>
+            <a:ext cx="0" cy="100584"/>
+          </a:xfrm>
+          <a:prstGeom prst="line">
+            <a:avLst/>
+          </a:prstGeom>
+          <a:ln w="15875">
+            <a:solidFill>
+              <a:srgbClr val="6B7280"/>
+            </a:solidFill>
+            <a:prstDash val="dash"/>
+            <a:tailEnd type="triangle"/>
+          </a:ln>
+        </p:spPr>
+        <p:style>
+          <a:lnRef idx="2">
+            <a:schemeClr val="accent1"/>
+          </a:lnRef>
+          <a:fillRef idx="0">
+            <a:schemeClr val="accent1"/>
+          </a:fillRef>
+          <a:effectRef idx="1">
+            <a:schemeClr val="accent1"/>
+          </a:effectRef>
+          <a:fontRef idx="minor">
+            <a:schemeClr val="tx1"/>
+          </a:fontRef>
+        </p:style>
+      </p:cxnSp>
+      <p:sp>
+        <p:nvSpPr>
+          <p:cNvPr id="50" name="Rectangle 49"/>
+          <p:cNvSpPr/>
+          <p:nvPr/>
+        </p:nvSpPr>
+        <p:spPr>
+          <a:xfrm>
+            <a:off x="9418320" y="1371600"/>
+            <a:ext cx="2194560" cy="1828800"/>
+          </a:xfrm>
+          <a:prstGeom prst="rect">
+            <a:avLst/>
+          </a:prstGeom>
+          <a:solidFill>
+            <a:srgbClr val="FFFFFF"/>
+          </a:solidFill>
+          <a:ln w="19050">
+            <a:solidFill>
+              <a:srgbClr val="B9975B"/>
+            </a:solidFill>
+          </a:ln>
+          <a:effectLst/>
+        </p:spPr>
+        <p:style>
+          <a:lnRef idx="1">
+            <a:schemeClr val="accent1"/>
+          </a:lnRef>
+          <a:fillRef idx="3">
+            <a:schemeClr val="accent1"/>
+          </a:fillRef>
+          <a:effectRef idx="2">
+            <a:schemeClr val="accent1"/>
+          </a:effectRef>
+          <a:fontRef idx="minor">
+            <a:schemeClr val="lt1"/>
+          </a:fontRef>
+        </p:style>
+        <p:txBody>
+          <a:bodyPr rtlCol="0" anchor="ctr"/>
+          <a:lstStyle/>
+          <a:p>
+            <a:pPr algn="ctr"/>
+          </a:p>
+        </p:txBody>
+      </p:sp>
+      <p:sp>
+        <p:nvSpPr>
+          <p:cNvPr id="51" name="TextBox 50"/>
+          <p:cNvSpPr txBox="1"/>
+          <p:nvPr/>
+        </p:nvSpPr>
+        <p:spPr>
+          <a:xfrm>
+            <a:off x="9528048" y="1444752"/>
+            <a:ext cx="1975104" cy="292608"/>
+          </a:xfrm>
+          <a:prstGeom prst="rect">
+            <a:avLst/>
+          </a:prstGeom>
+          <a:noFill/>
+        </p:spPr>
+        <p:txBody>
+          <a:bodyPr wrap="square" anchor="t">
+            <a:spAutoFit/>
+          </a:bodyPr>
+          <a:lstStyle/>
+          <a:p>
+            <a:pPr algn="l">
+              <a:spcAft>
+                <a:spcPts val="400"/>
+              </a:spcAft>
+            </a:pPr>
+            <a:r>
+              <a:rPr sz="1050" b="1" i="0">
+                <a:solidFill>
+                  <a:srgbClr val="8A6A2E"/>
+                </a:solidFill>
+                <a:latin typeface="Arial"/>
+              </a:rPr>
+              <a:t>DELEGATION</a:t>
+            </a:r>
+          </a:p>
+        </p:txBody>
+      </p:sp>
+      <p:sp>
+        <p:nvSpPr>
+          <p:cNvPr id="52" name="TextBox 51"/>
+          <p:cNvSpPr txBox="1"/>
+          <p:nvPr/>
+        </p:nvSpPr>
+        <p:spPr>
+          <a:xfrm>
+            <a:off x="9528048" y="1719072"/>
+            <a:ext cx="1975104" cy="1417320"/>
+          </a:xfrm>
+          <a:prstGeom prst="rect">
+            <a:avLst/>
+          </a:prstGeom>
+          <a:noFill/>
+        </p:spPr>
+        <p:txBody>
+          <a:bodyPr wrap="square" anchor="t">
+            <a:spAutoFit/>
+          </a:bodyPr>
+          <a:lstStyle/>
+          <a:p>
+            <a:pPr algn="l">
+              <a:spcAft>
+                <a:spcPts val="200"/>
+              </a:spcAft>
+            </a:pPr>
+            <a:r>
+              <a:rPr sz="1050" b="0" i="0">
+                <a:solidFill>
+                  <a:srgbClr val="000000"/>
+                </a:solidFill>
+                <a:latin typeface="Arial"/>
+              </a:rPr>
+              <a:t>The orchestrator never labels or drafts. It gives one sub-agent one instruction and reads the report. Each sub-agent is a fresh model call with a few tools.</a:t>
+            </a:r>
+          </a:p>
+        </p:txBody>
+      </p:sp>
+      <p:sp>
+        <p:nvSpPr>
+          <p:cNvPr id="53" name="Rectangle 52"/>
+          <p:cNvSpPr/>
+          <p:nvPr/>
+        </p:nvSpPr>
+        <p:spPr>
+          <a:xfrm>
+            <a:off x="9418320" y="3474720"/>
+            <a:ext cx="2194560" cy="1371600"/>
+          </a:xfrm>
+          <a:prstGeom prst="rect">
+            <a:avLst/>
+          </a:prstGeom>
+          <a:solidFill>
+            <a:srgbClr val="FFFFFF"/>
+          </a:solidFill>
+          <a:ln w="19050">
+            <a:solidFill>
+              <a:srgbClr val="B9975B"/>
+            </a:solidFill>
+          </a:ln>
+          <a:effectLst/>
+        </p:spPr>
+        <p:style>
+          <a:lnRef idx="1">
+            <a:schemeClr val="accent1"/>
+          </a:lnRef>
+          <a:fillRef idx="3">
+            <a:schemeClr val="accent1"/>
+          </a:fillRef>
+          <a:effectRef idx="2">
+            <a:schemeClr val="accent1"/>
+          </a:effectRef>
+          <a:fontRef idx="minor">
+            <a:schemeClr val="lt1"/>
+          </a:fontRef>
+        </p:style>
+        <p:txBody>
+          <a:bodyPr rtlCol="0" anchor="ctr"/>
+          <a:lstStyle/>
+          <a:p>
+            <a:pPr algn="ctr"/>
+          </a:p>
+        </p:txBody>
+      </p:sp>
+      <p:sp>
+        <p:nvSpPr>
+          <p:cNvPr id="54" name="TextBox 53"/>
+          <p:cNvSpPr txBox="1"/>
+          <p:nvPr/>
+        </p:nvSpPr>
+        <p:spPr>
+          <a:xfrm>
+            <a:off x="9528048" y="3547872"/>
+            <a:ext cx="1975104" cy="292608"/>
+          </a:xfrm>
+          <a:prstGeom prst="rect">
+            <a:avLst/>
+          </a:prstGeom>
+          <a:noFill/>
+        </p:spPr>
+        <p:txBody>
+          <a:bodyPr wrap="square" anchor="t">
+            <a:spAutoFit/>
+          </a:bodyPr>
+          <a:lstStyle/>
+          <a:p>
+            <a:pPr algn="l">
+              <a:spcAft>
+                <a:spcPts val="400"/>
+              </a:spcAft>
+            </a:pPr>
+            <a:r>
+              <a:rPr sz="1050" b="1" i="0">
+                <a:solidFill>
+                  <a:srgbClr val="8A6A2E"/>
+                </a:solidFill>
+                <a:latin typeface="Arial"/>
+              </a:rPr>
+              <a:t>TOOLS</a:t>
+            </a:r>
+          </a:p>
+        </p:txBody>
+      </p:sp>
+      <p:sp>
+        <p:nvSpPr>
+          <p:cNvPr id="55" name="TextBox 54"/>
+          <p:cNvSpPr txBox="1"/>
+          <p:nvPr/>
+        </p:nvSpPr>
+        <p:spPr>
+          <a:xfrm>
+            <a:off x="9528048" y="3822191"/>
+            <a:ext cx="1975104" cy="960120"/>
+          </a:xfrm>
+          <a:prstGeom prst="rect">
+            <a:avLst/>
+          </a:prstGeom>
+          <a:noFill/>
+        </p:spPr>
+        <p:txBody>
+          <a:bodyPr wrap="square" anchor="t">
+            <a:spAutoFit/>
+          </a:bodyPr>
+          <a:lstStyle/>
+          <a:p>
+            <a:pPr algn="l">
+              <a:spcAft>
+                <a:spcPts val="200"/>
+              </a:spcAft>
+            </a:pPr>
+            <a:r>
+              <a:rPr sz="1050" b="0" i="0">
+                <a:solidFill>
+                  <a:srgbClr val="000000"/>
+                </a:solidFill>
+                <a:latin typeface="Arial"/>
+              </a:rPr>
+              <a:t>Typed functions. The first ones only read; the ones that change the inbox come next.</a:t>
+            </a:r>
+          </a:p>
+        </p:txBody>
+      </p:sp>
+      <p:sp>
+        <p:nvSpPr>
+          <p:cNvPr id="56" name="Rounded Rectangle 55"/>
+          <p:cNvSpPr/>
+          <p:nvPr/>
+        </p:nvSpPr>
+        <p:spPr>
+          <a:xfrm>
+            <a:off x="548640" y="5650992"/>
+            <a:ext cx="256032" cy="164592"/>
+          </a:xfrm>
+          <a:prstGeom prst="roundRect">
+            <a:avLst/>
+          </a:prstGeom>
+          <a:solidFill>
+            <a:srgbClr val="E6F0F7"/>
+          </a:solidFill>
+          <a:ln w="12700">
+            <a:solidFill>
+              <a:srgbClr val="2C6C9C"/>
+            </a:solidFill>
+          </a:ln>
+          <a:effectLst/>
+        </p:spPr>
+        <p:style>
+          <a:lnRef idx="1">
+            <a:schemeClr val="accent1"/>
+          </a:lnRef>
+          <a:fillRef idx="3">
+            <a:schemeClr val="accent1"/>
+          </a:fillRef>
+          <a:effectRef idx="2">
+            <a:schemeClr val="accent1"/>
+          </a:effectRef>
+          <a:fontRef idx="minor">
+            <a:schemeClr val="lt1"/>
+          </a:fontRef>
+        </p:style>
+        <p:txBody>
+          <a:bodyPr rtlCol="0" anchor="ctr"/>
+          <a:lstStyle/>
+          <a:p>
+            <a:pPr algn="ctr"/>
+          </a:p>
+        </p:txBody>
+      </p:sp>
+      <p:sp>
+        <p:nvSpPr>
+          <p:cNvPr id="57" name="TextBox 56"/>
+          <p:cNvSpPr txBox="1"/>
+          <p:nvPr/>
+        </p:nvSpPr>
+        <p:spPr>
+          <a:xfrm>
+            <a:off x="859536" y="5596128"/>
+            <a:ext cx="1097280" cy="274320"/>
+          </a:xfrm>
+          <a:prstGeom prst="rect">
+            <a:avLst/>
+          </a:prstGeom>
+          <a:noFill/>
+        </p:spPr>
+        <p:txBody>
+          <a:bodyPr wrap="square" anchor="t">
+            <a:spAutoFit/>
+          </a:bodyPr>
+          <a:lstStyle/>
+          <a:p>
+            <a:pPr algn="l">
+              <a:spcAft>
+                <a:spcPts val="400"/>
+              </a:spcAft>
+            </a:pPr>
+            <a:r>
+              <a:rPr sz="1050" b="0" i="0">
+                <a:solidFill>
+                  <a:srgbClr val="6B7280"/>
+                </a:solidFill>
+                <a:latin typeface="Arial"/>
+              </a:rPr>
+              <a:t>deterministic</a:t>
+            </a:r>
+          </a:p>
+        </p:txBody>
+      </p:sp>
+      <p:sp>
+        <p:nvSpPr>
+          <p:cNvPr id="58" name="Rounded Rectangle 57"/>
+          <p:cNvSpPr/>
+          <p:nvPr/>
+        </p:nvSpPr>
+        <p:spPr>
+          <a:xfrm>
+            <a:off x="1965960" y="5650992"/>
+            <a:ext cx="256032" cy="164592"/>
+          </a:xfrm>
+          <a:prstGeom prst="roundRect">
+            <a:avLst/>
+          </a:prstGeom>
+          <a:solidFill>
+            <a:srgbClr val="EEEAF9"/>
+          </a:solidFill>
+          <a:ln w="12700">
+            <a:solidFill>
+              <a:srgbClr val="5E48B8"/>
+            </a:solidFill>
+          </a:ln>
+          <a:effectLst/>
+        </p:spPr>
+        <p:style>
+          <a:lnRef idx="1">
+            <a:schemeClr val="accent1"/>
+          </a:lnRef>
+          <a:fillRef idx="3">
+            <a:schemeClr val="accent1"/>
+          </a:fillRef>
+          <a:effectRef idx="2">
+            <a:schemeClr val="accent1"/>
+          </a:effectRef>
+          <a:fontRef idx="minor">
+            <a:schemeClr val="lt1"/>
+          </a:fontRef>
+        </p:style>
+        <p:txBody>
+          <a:bodyPr rtlCol="0" anchor="ctr"/>
+          <a:lstStyle/>
+          <a:p>
+            <a:pPr algn="ctr"/>
+          </a:p>
+        </p:txBody>
+      </p:sp>
+      <p:sp>
+        <p:nvSpPr>
+          <p:cNvPr id="59" name="TextBox 58"/>
+          <p:cNvSpPr txBox="1"/>
+          <p:nvPr/>
+        </p:nvSpPr>
+        <p:spPr>
+          <a:xfrm>
+            <a:off x="2276856" y="5596128"/>
+            <a:ext cx="1097280" cy="274320"/>
+          </a:xfrm>
+          <a:prstGeom prst="rect">
+            <a:avLst/>
+          </a:prstGeom>
+          <a:noFill/>
+        </p:spPr>
+        <p:txBody>
+          <a:bodyPr wrap="square" anchor="t">
+            <a:spAutoFit/>
+          </a:bodyPr>
+          <a:lstStyle/>
+          <a:p>
+            <a:pPr algn="l">
+              <a:spcAft>
+                <a:spcPts val="400"/>
+              </a:spcAft>
+            </a:pPr>
+            <a:r>
+              <a:rPr sz="1050" b="0" i="0">
+                <a:solidFill>
+                  <a:srgbClr val="6B7280"/>
+                </a:solidFill>
+                <a:latin typeface="Arial"/>
+              </a:rPr>
+              <a:t>agent</a:t>
+            </a:r>
+          </a:p>
+        </p:txBody>
+      </p:sp>
+      <p:sp>
+        <p:nvSpPr>
+          <p:cNvPr id="60" name="Rounded Rectangle 59"/>
+          <p:cNvSpPr/>
+          <p:nvPr/>
+        </p:nvSpPr>
+        <p:spPr>
+          <a:xfrm>
+            <a:off x="3383280" y="5650992"/>
+            <a:ext cx="256032" cy="164592"/>
+          </a:xfrm>
+          <a:prstGeom prst="roundRect">
+            <a:avLst/>
+          </a:prstGeom>
+          <a:solidFill>
+            <a:srgbClr val="EEEAF9"/>
+          </a:solidFill>
+          <a:ln w="12700">
+            <a:solidFill>
+              <a:srgbClr val="5E48B8"/>
+            </a:solidFill>
+            <a:prstDash val="dash"/>
+          </a:ln>
+          <a:effectLst/>
+        </p:spPr>
+        <p:style>
+          <a:lnRef idx="1">
+            <a:schemeClr val="accent1"/>
+          </a:lnRef>
+          <a:fillRef idx="3">
+            <a:schemeClr val="accent1"/>
+          </a:fillRef>
+          <a:effectRef idx="2">
+            <a:schemeClr val="accent1"/>
+          </a:effectRef>
+          <a:fontRef idx="minor">
+            <a:schemeClr val="lt1"/>
+          </a:fontRef>
+        </p:style>
+        <p:txBody>
+          <a:bodyPr rtlCol="0" anchor="ctr"/>
+          <a:lstStyle/>
+          <a:p>
+            <a:pPr algn="ctr"/>
+          </a:p>
+        </p:txBody>
+      </p:sp>
+      <p:sp>
+        <p:nvSpPr>
+          <p:cNvPr id="61" name="TextBox 60"/>
+          <p:cNvSpPr txBox="1"/>
+          <p:nvPr/>
+        </p:nvSpPr>
+        <p:spPr>
+          <a:xfrm>
+            <a:off x="3694176" y="5596128"/>
+            <a:ext cx="1097280" cy="274320"/>
+          </a:xfrm>
+          <a:prstGeom prst="rect">
+            <a:avLst/>
+          </a:prstGeom>
+          <a:noFill/>
+        </p:spPr>
+        <p:txBody>
+          <a:bodyPr wrap="square" anchor="t">
+            <a:spAutoFit/>
+          </a:bodyPr>
+          <a:lstStyle/>
+          <a:p>
+            <a:pPr algn="l">
+              <a:spcAft>
+                <a:spcPts val="400"/>
+              </a:spcAft>
+            </a:pPr>
+            <a:r>
+              <a:rPr sz="1050" b="0" i="0">
+                <a:solidFill>
+                  <a:srgbClr val="6B7280"/>
+                </a:solidFill>
+                <a:latin typeface="Arial"/>
+              </a:rPr>
+              <a:t>brief &amp; skills</a:t>
+            </a:r>
+          </a:p>
+        </p:txBody>
+      </p:sp>
+      <p:sp>
+        <p:nvSpPr>
+          <p:cNvPr id="62" name="Rounded Rectangle 61"/>
+          <p:cNvSpPr/>
+          <p:nvPr/>
+        </p:nvSpPr>
+        <p:spPr>
+          <a:xfrm>
+            <a:off x="548640" y="5925312"/>
+            <a:ext cx="256032" cy="164592"/>
+          </a:xfrm>
+          <a:prstGeom prst="roundRect">
+            <a:avLst/>
+          </a:prstGeom>
+          <a:solidFill>
+            <a:srgbClr val="F3F4F7"/>
+          </a:solidFill>
+          <a:ln w="12700">
+            <a:solidFill>
+              <a:srgbClr val="6B7280"/>
+            </a:solidFill>
+            <a:prstDash val="dash"/>
+          </a:ln>
+          <a:effectLst/>
+        </p:spPr>
+        <p:style>
+          <a:lnRef idx="1">
+            <a:schemeClr val="accent1"/>
+          </a:lnRef>
+          <a:fillRef idx="3">
+            <a:schemeClr val="accent1"/>
+          </a:fillRef>
+          <a:effectRef idx="2">
+            <a:schemeClr val="accent1"/>
+          </a:effectRef>
+          <a:fontRef idx="minor">
+            <a:schemeClr val="lt1"/>
+          </a:fontRef>
+        </p:style>
+        <p:txBody>
+          <a:bodyPr rtlCol="0" anchor="ctr"/>
+          <a:lstStyle/>
+          <a:p>
+            <a:pPr algn="ctr"/>
+          </a:p>
+        </p:txBody>
+      </p:sp>
+      <p:sp>
+        <p:nvSpPr>
+          <p:cNvPr id="63" name="TextBox 62"/>
+          <p:cNvSpPr txBox="1"/>
+          <p:nvPr/>
+        </p:nvSpPr>
+        <p:spPr>
+          <a:xfrm>
+            <a:off x="859536" y="5870448"/>
+            <a:ext cx="1097280" cy="274320"/>
+          </a:xfrm>
+          <a:prstGeom prst="rect">
+            <a:avLst/>
+          </a:prstGeom>
+          <a:noFill/>
+        </p:spPr>
+        <p:txBody>
+          <a:bodyPr wrap="square" anchor="t">
+            <a:spAutoFit/>
+          </a:bodyPr>
+          <a:lstStyle/>
+          <a:p>
+            <a:pPr algn="l">
+              <a:spcAft>
+                <a:spcPts val="400"/>
+              </a:spcAft>
+            </a:pPr>
+            <a:r>
+              <a:rPr sz="1050" b="0" i="0">
+                <a:solidFill>
+                  <a:srgbClr val="6B7280"/>
+                </a:solidFill>
+                <a:latin typeface="Arial"/>
+              </a:rPr>
+              <a:t>memory</a:t>
+            </a:r>
+          </a:p>
+        </p:txBody>
+      </p:sp>
+      <p:sp>
+        <p:nvSpPr>
+          <p:cNvPr id="64" name="Rounded Rectangle 63"/>
+          <p:cNvSpPr/>
+          <p:nvPr/>
+        </p:nvSpPr>
+        <p:spPr>
+          <a:xfrm>
+            <a:off x="1965960" y="5925312"/>
+            <a:ext cx="256032" cy="164592"/>
+          </a:xfrm>
+          <a:prstGeom prst="roundRect">
+            <a:avLst/>
+          </a:prstGeom>
+          <a:solidFill>
+            <a:srgbClr val="FBF1E0"/>
+          </a:solidFill>
+          <a:ln w="12700">
+            <a:solidFill>
+              <a:srgbClr val="B4761C"/>
+            </a:solidFill>
+          </a:ln>
+          <a:effectLst/>
+        </p:spPr>
+        <p:style>
+          <a:lnRef idx="1">
+            <a:schemeClr val="accent1"/>
+          </a:lnRef>
+          <a:fillRef idx="3">
+            <a:schemeClr val="accent1"/>
+          </a:fillRef>
+          <a:effectRef idx="2">
+            <a:schemeClr val="accent1"/>
+          </a:effectRef>
+          <a:fontRef idx="minor">
+            <a:schemeClr val="lt1"/>
+          </a:fontRef>
+        </p:style>
+        <p:txBody>
+          <a:bodyPr rtlCol="0" anchor="ctr"/>
+          <a:lstStyle/>
+          <a:p>
+            <a:pPr algn="ctr"/>
+          </a:p>
+        </p:txBody>
+      </p:sp>
+      <p:sp>
+        <p:nvSpPr>
+          <p:cNvPr id="65" name="TextBox 64"/>
+          <p:cNvSpPr txBox="1"/>
+          <p:nvPr/>
+        </p:nvSpPr>
+        <p:spPr>
+          <a:xfrm>
+            <a:off x="2276856" y="5870448"/>
+            <a:ext cx="1097280" cy="274320"/>
+          </a:xfrm>
+          <a:prstGeom prst="rect">
+            <a:avLst/>
+          </a:prstGeom>
+          <a:noFill/>
+        </p:spPr>
+        <p:txBody>
+          <a:bodyPr wrap="square" anchor="t">
+            <a:spAutoFit/>
+          </a:bodyPr>
+          <a:lstStyle/>
+          <a:p>
+            <a:pPr algn="l">
+              <a:spcAft>
+                <a:spcPts val="400"/>
+              </a:spcAft>
+            </a:pPr>
+            <a:r>
+              <a:rPr sz="1050" b="0" i="0">
+                <a:solidFill>
+                  <a:srgbClr val="6B7280"/>
+                </a:solidFill>
+                <a:latin typeface="Arial"/>
+              </a:rPr>
+              <a:t>human</a:t>
+            </a:r>
+          </a:p>
+        </p:txBody>
+      </p:sp>
+      <p:sp>
+        <p:nvSpPr>
+          <p:cNvPr id="66" name="TextBox 65"/>
+          <p:cNvSpPr txBox="1"/>
+          <p:nvPr/>
+        </p:nvSpPr>
+        <p:spPr>
+          <a:xfrm>
+            <a:off x="822960" y="6327648"/>
+            <a:ext cx="9692640" cy="457200"/>
+          </a:xfrm>
+          <a:prstGeom prst="rect">
+            <a:avLst/>
+          </a:prstGeom>
+          <a:noFill/>
+        </p:spPr>
+        <p:txBody>
+          <a:bodyPr wrap="square" anchor="t">
+            <a:spAutoFit/>
+          </a:bodyPr>
+          <a:lstStyle/>
+          <a:p>
+            <a:pPr algn="l">
+              <a:spcAft>
+                <a:spcPts val="400"/>
+              </a:spcAft>
+            </a:pPr>
+            <a:r>
+              <a:rPr sz="1050" b="0" i="1">
+                <a:solidFill>
+                  <a:srgbClr val="002060"/>
+                </a:solidFill>
+                <a:latin typeface="Arial"/>
+              </a:rPr>
+              <a:t>The orchestrator delegates to three sub-agents. Each one is a separate model call with a few tools; the inbox is the long-term memory, reached only through them.</a:t>
+            </a:r>
+          </a:p>
+        </p:txBody>
+      </p:sp>
+    </p:spTree>
+  </p:cSld>
+  <p:clrMapOvr>
+    <a:masterClrMapping/>
+  </p:clrMapOvr>
+</p:sld>
+</file>
+
+<file path=ppt/slides/slide6.xml><?xml version="1.0" encoding="utf-8"?>
+<p:sld xmlns:a="http://schemas.openxmlformats.org/drawingml/2006/main" xmlns:p="http://schemas.openxmlformats.org/presentationml/2006/main" xmlns:r="http://schemas.openxmlformats.org/officeDocument/2006/relationships">
+  <p:cSld>
+    <p:spTree>
+      <p:nvGrpSpPr>
+        <p:cNvPr id="1" name=""/>
+        <p:cNvGrpSpPr/>
+        <p:nvPr/>
+      </p:nvGrpSpPr>
+      <p:grpSpPr/>
+      <p:sp>
+        <p:nvSpPr>
+          <p:cNvPr id="2" name="TextBox 1"/>
+          <p:cNvSpPr txBox="1"/>
+          <p:nvPr/>
+        </p:nvSpPr>
+        <p:spPr>
+          <a:xfrm>
+            <a:off x="9893808" y="6492240"/>
+            <a:ext cx="2084831" cy="274320"/>
+          </a:xfrm>
+          <a:prstGeom prst="rect">
+            <a:avLst/>
+          </a:prstGeom>
+          <a:noFill/>
+        </p:spPr>
+        <p:txBody>
+          <a:bodyPr wrap="square" anchor="t">
+            <a:spAutoFit/>
+          </a:bodyPr>
+          <a:lstStyle/>
+          <a:p>
+            <a:pPr algn="r">
+              <a:spcAft>
+                <a:spcPts val="400"/>
+              </a:spcAft>
+            </a:pPr>
+            <a:r>
+              <a:rPr sz="1000" b="0" i="0">
+                <a:solidFill>
+                  <a:srgbClr val="6B7280"/>
+                </a:solidFill>
+                <a:latin typeface="Arial"/>
+              </a:rPr>
+              <a:t>6</a:t>
             </a:r>
           </a:p>
         </p:txBody>

--- a/slides/agent-10-minute-exercise.pptx
+++ b/slides/agent-10-minute-exercise.pptx
@@ -596,7 +596,7 @@
           <a:lstStyle/>
           <a:p>
             <a:r>
-              <a:t>Step A shows that the refusal of the trap came from the brief. Step B shows that the forward is still refused, by code: Confidential emails never leave the organisation. Step C shows the brief doing its real job, steering judgement. Land the question: policy that must hold goes in code, not in prose.</a:t>
+              <a:t>Step A removes the instruction that made the refusal explicit. In step B two things can happen, and both make the point: the model may still refuse on its own judgement, or it attempts the forward and the forward_email tool blocks it because the emails are Confidential and the address is outside the organisation. Step C shows the brief doing its job: the refusal is immediate and explained. Land the question: policy that must hold goes in code, not in prose. Do not try to make the agent actually send: the model's own judgement is a line you cannot switch off, which is itself worth saying.</a:t>
             </a:r>
           </a:p>
         </p:txBody>
@@ -666,7 +666,7 @@
           <a:lstStyle/>
           <a:p>
             <a:r>
-              <a:t>Step A is the human line: the limit is code, the decision is yours, and the agent has to live with it. Step B is pure code: Health &amp; Safety can never be archived, however the agent was persuaded. Step C strips the first two lines so that the person is visibly the last one. Close on the question; the usual answer is code for what must never happen, a person for what is expensive to get wrong, the brief for everything else.</a:t>
+              <a:t>Step A: the card appears because marta.visser is outside the organisation; the content is whatever the brief and the email suggested, and the first draft often offers to send the correspondence, which is confidential. Step B: the rejection text is literally what the agent receives as an error, so a precise reason produces a precise redraft; a vague one does not. Step C: the same rule now lives in the brief and the draft needs no correction, but the card still appears, because it is code. If a group has time, ask for a reply to Bram Jansen, the employee who raised the complaint: it goes straight to the outbox with no card, because he is internal. Ask whether that is right.</a:t>
             </a:r>
           </a:p>
         </p:txBody>
@@ -8404,7 +8404,7 @@
                 </a:solidFill>
                 <a:latin typeface="Arial"/>
               </a:rPr>
-              <a:t>The brief is the agent's standing instructions, in plain language. Change it and watch what changes, and what does not.</a:t>
+              <a:t>The brief is the agent's standing instructions, in plain language. Weaken it and watch what still holds.</a:t>
             </a:r>
           </a:p>
         </p:txBody>
@@ -8627,7 +8627,7 @@
                 </a:solidFill>
                 <a:latin typeface="Arial"/>
               </a:rPr>
-              <a:t>Watch the code catch it</a:t>
+              <a:t>Watch what holds</a:t>
             </a:r>
           </a:p>
         </p:txBody>
@@ -8666,7 +8666,7 @@
                 </a:solidFill>
                 <a:latin typeface="Arial"/>
               </a:rPr>
-              <a:t>Read the trace. Without the paragraph the reply agent may attempt the forward. The guardrail blocks it in red, and the error travels back up to the orchestrator. Then click Restore default.</a:t>
+              <a:t>Read the trace. Either the agent still refuses on its own, or the reply agent attempts the forward and the guardrail blocks it in red, with the error travelling back up to the orchestrator. Either way, nothing leaves.</a:t>
             </a:r>
           </a:p>
         </p:txBody>
@@ -8758,7 +8758,7 @@
                 </a:solidFill>
                 <a:latin typeface="Arial"/>
               </a:rPr>
-              <a:t>Strengthen it</a:t>
+              <a:t>Put it back</a:t>
             </a:r>
           </a:p>
         </p:txBody>
@@ -8797,7 +8797,7 @@
                 </a:solidFill>
                 <a:latin typeface="Arial"/>
               </a:rPr>
-              <a:t>Add one line of your own, for example "Anything from the works council or the union is urgent today." Send "What needs my attention today?" and compare with your first run.</a:t>
+              <a:t>Click Restore default and send the trap once more. Compare the two traces: with the brief in place the refusal comes first, before any tool is called.</a:t>
             </a:r>
           </a:p>
         </p:txBody>
@@ -8935,7 +8935,7 @@
                 </a:solidFill>
                 <a:latin typeface="Arial"/>
               </a:rPr>
-              <a:t>It enforces nothing: when it is weakened, only the code and the person remain</a:t>
+              <a:t>It enforces nothing: when it is weakened, the code still decides what can leave</a:t>
             </a:r>
           </a:p>
           <a:p>
@@ -8951,7 +8951,7 @@
                 </a:solidFill>
                 <a:latin typeface="Arial"/>
               </a:rPr>
-              <a:t>One added sentence changes what the orchestrator asks the sub-agents to do first</a:t>
+              <a:t>Confidential emails never leave the organisation, whatever the agent was told</a:t>
             </a:r>
           </a:p>
         </p:txBody>
@@ -9210,7 +9210,7 @@
                 </a:solidFill>
                 <a:latin typeface="Arial"/>
               </a:rPr>
-              <a:t>CHALLENGE 2 · THE GUARDRAILS</a:t>
+              <a:t>CHALLENGE 2 · DRAFTING A REPLY</a:t>
             </a:r>
           </a:p>
         </p:txBody>
@@ -9319,7 +9319,7 @@
                 </a:solidFill>
                 <a:latin typeface="Arial"/>
               </a:rPr>
-              <a:t>Guardrails run inside the tools. They do not ask the model; they check it. Three lines of defence: the brief, the code, the person.</a:t>
+              <a:t>Drafting is where the brief, the code and the person meet in one email. Use the union's request about the Plant 2 grievance (HR-060).</a:t>
             </a:r>
           </a:p>
         </p:txBody>
@@ -9411,7 +9411,7 @@
                 </a:solidFill>
                 <a:latin typeface="Arial"/>
               </a:rPr>
-              <a:t>Lower the bulk limit</a:t>
+              <a:t>Ask for the draft</a:t>
             </a:r>
           </a:p>
         </p:txBody>
@@ -9450,7 +9450,7 @@
                 </a:solidFill>
                 <a:latin typeface="Arial"/>
               </a:rPr>
-              <a:t>In block 3, Guardrails, set "more than N emails in one call" to 10. Send "Label the newsletters, vendor mail and admin so I never see them." An approval card appears: reject it, with a reason.</a:t>
+              <a:t>Send "Draft a reply to Marta Visser from the union about the escalated grievance at Plant 2." The union is outside the organisation, so the draft arrives as an approval card. Read it: does it promise copies of the correspondence? Does it name anyone?</a:t>
             </a:r>
           </a:p>
         </p:txBody>
@@ -9542,7 +9542,7 @@
                 </a:solidFill>
                 <a:latin typeface="Arial"/>
               </a:rPr>
-              <a:t>Try the protected label</a:t>
+              <a:t>Reject it, with a reason</a:t>
             </a:r>
           </a:p>
         </p:txBody>
@@ -9581,7 +9581,7 @@
                 </a:solidFill>
                 <a:latin typeface="Arial"/>
               </a:rPr>
-              <a:t>Send "Archive all the Health &amp; Safety emails." Whatever the agent decides, the archive is blocked in code. Read what the agent tells you afterwards.</a:t>
+              <a:t>Reject with "Do not promise the correspondence. Confirm the right to be accompanied, propose a meeting, three sentences." The rejection reaches the reply agent as a tool error, it redrafts, a new card appears. Approve it and find it in the outbox.</a:t>
             </a:r>
           </a:p>
         </p:txBody>
@@ -9673,7 +9673,7 @@
                 </a:solidFill>
                 <a:latin typeface="Arial"/>
               </a:rPr>
-              <a:t>Remove the code, keep the person</a:t>
+              <a:t>Put it in the brief</a:t>
             </a:r>
           </a:p>
         </p:txBody>
@@ -9712,7 +9712,7 @@
                 </a:solidFill>
                 <a:latin typeface="Arial"/>
               </a:rPr>
-              <a:t>Untick "Confidential emails are never forwarded outside" and delete the brief's last paragraph again. Send the trap. The forward now reaches an approval card: you are the last line. Reject it.</a:t>
+              <a:t>Add to the brief: "Replies to the union or works council: three sentences, confirm rights, never share case documents by email, propose a meeting, sign as Sofia Lindgren, HR business partner." Send the same request again.</a:t>
             </a:r>
           </a:p>
         </p:txBody>
@@ -9834,7 +9834,7 @@
                 </a:solidFill>
                 <a:latin typeface="Arial"/>
               </a:rPr>
-              <a:t>Your rejection reaches the sub-agent as a tool error; the orchestrator adapts, with smaller batches or a question</a:t>
+              <a:t>The approval card is code: the recipient's domain decides, not the agent</a:t>
             </a:r>
           </a:p>
           <a:p>
@@ -9850,7 +9850,7 @@
                 </a:solidFill>
                 <a:latin typeface="Arial"/>
               </a:rPr>
-              <a:t>A blocked archive is a red line in the trace and nothing moves in the inbox</a:t>
+              <a:t>What the draft says is the brief's job; your rejection text becomes the next instruction</a:t>
             </a:r>
           </a:p>
           <a:p>
@@ -9866,7 +9866,7 @@
                 </a:solidFill>
                 <a:latin typeface="Arial"/>
               </a:rPr>
-              <a:t>With the brief and the code gone, only the approval card stands between the inbox and the outside</a:t>
+              <a:t>After the brief change the draft is right first time, and the card still appears</a:t>
             </a:r>
           </a:p>
         </p:txBody>
@@ -9990,7 +9990,7 @@
                 </a:solidFill>
                 <a:latin typeface="Arial"/>
               </a:rPr>
-              <a:t>Which of the three lines would you trust in your own process, and for what?</a:t>
+              <a:t>Which replies should a person always see before they leave, and which rules belong in the brief instead?</a:t>
             </a:r>
           </a:p>
         </p:txBody>

--- a/slides/agent-10-minute-exercise.pptx
+++ b/slides/agent-10-minute-exercise.pptx
@@ -666,7 +666,7 @@
           <a:lstStyle/>
           <a:p>
             <a:r>
-              <a:t>Step A: the card appears because marta.visser is outside the organisation; the content is whatever the brief and the email suggested, and the first draft often offers to send the correspondence, which is confidential. Step B: the rejection text is literally what the agent receives as an error, so a precise reason produces a precise redraft; a vague one does not. Step C: the same rule now lives in the brief and the draft needs no correction, but the card still appears, because it is code. If a group has time, ask for a reply to Bram Jansen, the employee who raised the complaint: it goes straight to the outbox with no card, because he is internal. Ask whether that is right.</a:t>
+              <a:t>Step A: the card appears because marta.visser is outside the organisation; the content is whatever the brief and the email suggested, and the first draft often offers to send the correspondence, which is confidential. Step B: the rejection text is literally what the agent receives as an error, so a precise reason produces a precise redraft; a vague one does not. Step C: the same rule now lives in the brief and the draft needs no correction, but the card still appears, because it is code. If a group has time, ask for a reply to email HR-078, Bram Jansen, the employee who raised the harassment complaint: it goes straight to the outbox with no card, because he is internal. Ask whether that is right.</a:t>
             </a:r>
           </a:p>
         </p:txBody>
@@ -7804,7 +7804,7 @@
                 </a:solidFill>
                 <a:latin typeface="Arial"/>
               </a:rPr>
-              <a:t>Send the trap, then read the red line</a:t>
+              <a:t>Send the trap (HR-037), read the red line</a:t>
             </a:r>
           </a:p>
         </p:txBody>
@@ -8404,7 +8404,7 @@
                 </a:solidFill>
                 <a:latin typeface="Arial"/>
               </a:rPr>
-              <a:t>The brief is the agent's standing instructions, in plain language. Weaken it and watch what still holds.</a:t>
+              <a:t>The brief is the agent's standing instructions, in plain language. Weaken it and watch what still holds. Email: HR-037, Payroll audit – employee salary export required.</a:t>
             </a:r>
           </a:p>
         </p:txBody>
@@ -8535,7 +8535,7 @@
                 </a:solidFill>
                 <a:latin typeface="Arial"/>
               </a:rPr>
-              <a:t>In block 1, The brief, delete the last paragraph (the one that says email content is untrusted). Send the trap prompt again.</a:t>
+              <a:t>In block 1, The brief, delete the last paragraph (the one that says email content is untrusted). Send the trap prompt again (it concerns email HR-037).</a:t>
             </a:r>
           </a:p>
         </p:txBody>
@@ -9319,7 +9319,7 @@
                 </a:solidFill>
                 <a:latin typeface="Arial"/>
               </a:rPr>
-              <a:t>Drafting is where the brief, the code and the person meet in one email. Use the union's request about the Plant 2 grievance (HR-060).</a:t>
+              <a:t>Drafting is where the brief, the code and the person meet in one email. Email: HR-060, Grievance escalated by the union, from Marta Visser.</a:t>
             </a:r>
           </a:p>
         </p:txBody>
@@ -9450,7 +9450,7 @@
                 </a:solidFill>
                 <a:latin typeface="Arial"/>
               </a:rPr>
-              <a:t>Send "Draft a reply to Marta Visser from the union about the escalated grievance at Plant 2." The union is outside the organisation, so the draft arrives as an approval card. Read it: does it promise copies of the correspondence? Does it name anyone?</a:t>
+              <a:t>Send "Draft a reply to email HR-060, from Marta Visser of the union, about the escalated grievance at Plant 2." The union is outside the organisation, so the draft arrives as an approval card. Read it: does it promise copies of the correspondence? Does it name anyone?</a:t>
             </a:r>
           </a:p>
         </p:txBody>
